--- a/report/Casting_Defect_Inspection_Presentation.pptx
+++ b/report/Casting_Defect_Inspection_Presentation.pptx
@@ -3,18 +3,20 @@
 <p:presentation xmlns:a="http://schemas.openxmlformats.org/drawingml/2006/main" xmlns:r="http://schemas.openxmlformats.org/officeDocument/2006/relationships" xmlns:p="http://schemas.openxmlformats.org/presentationml/2006/main" saveSubsetFonts="1" autoCompressPictures="0">
   <p:sldMasterIdLst>
     <p:sldMasterId id="2147483648" r:id="rId1"/>
+    <p:sldMasterId id="2147483652" r:id="rId2"/>
   </p:sldMasterIdLst>
   <p:notesMasterIdLst>
-    <p:notesMasterId r:id="rId9"/>
+    <p:notesMasterId r:id="rId11"/>
   </p:notesMasterIdLst>
   <p:sldIdLst>
-    <p:sldId id="256" r:id="rId2"/>
-    <p:sldId id="257" r:id="rId3"/>
-    <p:sldId id="258" r:id="rId4"/>
-    <p:sldId id="259" r:id="rId5"/>
-    <p:sldId id="260" r:id="rId6"/>
-    <p:sldId id="261" r:id="rId7"/>
-    <p:sldId id="262" r:id="rId8"/>
+    <p:sldId id="256" r:id="rId3"/>
+    <p:sldId id="257" r:id="rId4"/>
+    <p:sldId id="263" r:id="rId5"/>
+    <p:sldId id="258" r:id="rId6"/>
+    <p:sldId id="259" r:id="rId7"/>
+    <p:sldId id="260" r:id="rId8"/>
+    <p:sldId id="261" r:id="rId9"/>
+    <p:sldId id="262" r:id="rId10"/>
   </p:sldIdLst>
   <p:sldSz cx="9144000" cy="5143500" type="screen16x9"/>
   <p:notesSz cx="5143500" cy="9144000"/>
@@ -121,6 +123,7 @@
         <p14:section name="Study" id="{AC553C26-9B7E-5D46-A666-EA96F0A02C7A}">
           <p14:sldIdLst>
             <p14:sldId id="257"/>
+            <p14:sldId id="263"/>
             <p14:sldId id="258"/>
           </p14:sldIdLst>
         </p14:section>
@@ -449,7 +452,13 @@
   <p:cSld>
     <p:spTree>
       <p:nvGrpSpPr>
-        <p:cNvPr id="1" name=""/>
+        <p:cNvPr id="1" name="">
+          <a:extLst>
+            <a:ext uri="{FF2B5EF4-FFF2-40B4-BE49-F238E27FC236}">
+              <a16:creationId xmlns:a16="http://schemas.microsoft.com/office/drawing/2014/main" id="{96400934-1D3C-C687-1131-B82129379B74}"/>
+            </a:ext>
+          </a:extLst>
+        </p:cNvPr>
         <p:cNvGrpSpPr/>
         <p:nvPr/>
       </p:nvGrpSpPr>
@@ -463,7 +472,13 @@
       </p:grpSpPr>
       <p:sp>
         <p:nvSpPr>
-          <p:cNvPr id="2" name="Slide Image Placeholder 1"/>
+          <p:cNvPr id="2" name="Slide Image Placeholder 1">
+            <a:extLst>
+              <a:ext uri="{FF2B5EF4-FFF2-40B4-BE49-F238E27FC236}">
+                <a16:creationId xmlns:a16="http://schemas.microsoft.com/office/drawing/2014/main" id="{F049D07D-F9ED-7E68-BAA6-E46E3EE964EC}"/>
+              </a:ext>
+            </a:extLst>
+          </p:cNvPr>
           <p:cNvSpPr>
             <a:spLocks noGrp="1" noRot="1" noChangeAspect="1"/>
           </p:cNvSpPr>
@@ -475,7 +490,13 @@
       </p:sp>
       <p:sp>
         <p:nvSpPr>
-          <p:cNvPr id="3" name="Notes Placeholder 2"/>
+          <p:cNvPr id="3" name="Notes Placeholder 2">
+            <a:extLst>
+              <a:ext uri="{FF2B5EF4-FFF2-40B4-BE49-F238E27FC236}">
+                <a16:creationId xmlns:a16="http://schemas.microsoft.com/office/drawing/2014/main" id="{04BAA794-FD39-D421-DBEE-9D3C255D470F}"/>
+              </a:ext>
+            </a:extLst>
+          </p:cNvPr>
           <p:cNvSpPr>
             <a:spLocks noGrp="1"/>
           </p:cNvSpPr>
@@ -490,14 +511,20 @@
           <a:p>
             <a:r>
               <a:rPr lang="en-US" dirty="0"/>
-              <a:t>(~35 s) Top-view photographs of cast impellers, split into train, validation and a fixed test set. Both models start from ImageNet weights and share the same pre-processing and training protocol, so the only variables are architecture and training-set size.</a:t>
-            </a:r>
-          </a:p>
-        </p:txBody>
-      </p:sp>
-      <p:sp>
-        <p:nvSpPr>
-          <p:cNvPr id="4" name="Slide Number Placeholder 3"/>
+              <a:t>(~20 s) Read the research question. Quality inspection needs a quick yes/no decision and defect labels are scarce, so we ask whether a ViT holds up better than a CNN as labelled data shrinks. Mention the fixed 715-image test set.</a:t>
+            </a:r>
+          </a:p>
+        </p:txBody>
+      </p:sp>
+      <p:sp>
+        <p:nvSpPr>
+          <p:cNvPr id="4" name="Slide Number Placeholder 3">
+            <a:extLst>
+              <a:ext uri="{FF2B5EF4-FFF2-40B4-BE49-F238E27FC236}">
+                <a16:creationId xmlns:a16="http://schemas.microsoft.com/office/drawing/2014/main" id="{2484FEDE-4F54-AA00-DED1-525A1EFCD42A}"/>
+              </a:ext>
+            </a:extLst>
+          </p:cNvPr>
           <p:cNvSpPr>
             <a:spLocks noGrp="1"/>
           </p:cNvSpPr>
@@ -521,7 +548,7 @@
     </p:spTree>
     <p:extLst>
       <p:ext uri="{BB962C8B-B14F-4D97-AF65-F5344CB8AC3E}">
-        <p14:creationId xmlns:p14="http://schemas.microsoft.com/office/powerpoint/2010/main" val="1024086991"/>
+        <p14:creationId xmlns:p14="http://schemas.microsoft.com/office/powerpoint/2010/main" val="3234285044"/>
       </p:ext>
     </p:extLst>
   </p:cSld>
@@ -577,7 +604,7 @@
           <a:p>
             <a:r>
               <a:rPr lang="en-US" dirty="0"/>
-              <a:t>(~45 s) Accuracy is near ceiling for both models, between 99.4% and 99.7%. At 50% and 25% of the training data ResNet is slightly ahead on accuracy and macro-F1. The real difference is cost: ResNet is about 43 MB and under 1 ms per image, ViT about 327 MB and around 12 ms. Defect recall matters most because a missed defect is the costly error; there were one to three per run.</a:t>
+              <a:t>(~35 s) Top-view photographs of cast impellers, split into train, validation and a fixed test set. Both models start from ImageNet weights and share the same pre-processing and training protocol, so the only variables are architecture and training-set size.</a:t>
             </a:r>
           </a:p>
         </p:txBody>
@@ -664,7 +691,7 @@
           <a:p>
             <a:r>
               <a:rPr lang="en-US" dirty="0"/>
-              <a:t>(~25 s) Show the Streamlit app: upload an impeller image, read the class scores, view the Grad-CAM overlay, and open the Results page. It runs locally with: streamlit run streamlit_app.py.</a:t>
+              <a:t>(~45 s) Accuracy is near ceiling for both models, between 99.4% and 99.7%. At 50% and 25% of the training data ResNet is slightly ahead on accuracy and macro-F1. The real difference is cost: ResNet is about 43 MB and under 1 ms per image, ViT about 327 MB and around 12 ms. Defect recall matters most because a missed defect is the costly error; there were one to three per run.</a:t>
             </a:r>
           </a:p>
         </p:txBody>
@@ -751,7 +778,7 @@
           <a:p>
             <a:r>
               <a:rPr lang="en-US" dirty="0"/>
-              <a:t>(~25 s) Challenges were mostly practical: Colab sessions, CSV logging, Grad-CAM in Streamlit and GPU time for ViT. Main limitations: one product and lighting setup, very high scores, and a single seed. Next steps: multiple seeds, edge deployment, ViT attention maps and a new site.</a:t>
+              <a:t>(~25 s) Show the Streamlit app: upload an impeller image, read the class scores, view the Grad-CAM overlay, and open the Results page. It runs locally with: streamlit run streamlit_app.py.</a:t>
             </a:r>
           </a:p>
         </p:txBody>
@@ -838,7 +865,7 @@
           <a:p>
             <a:r>
               <a:rPr lang="en-US" dirty="0"/>
-              <a:t>(~20 s) Both models work well. With limited labels or edge hardware, ResNet-18 matched or beat ViT at far lower cost; ViT is reasonable when full data and GPU time are available. Thank the audience and invite questions.</a:t>
+              <a:t>(~25 s) Challenges were mostly practical: Colab sessions, CSV logging, Grad-CAM in Streamlit and GPU time for ViT. Main limitations: one product and lighting setup, very high scores, and a single seed. Next steps: multiple seeds, edge deployment, ViT attention maps and a new site.</a:t>
             </a:r>
           </a:p>
         </p:txBody>
@@ -861,6 +888,93 @@
             <a:fld id="{F7021451-1387-4CA6-816F-3879F97B5CBC}" type="slidenum">
               <a:rPr lang="en-US"/>
               <a:t>7</a:t>
+            </a:fld>
+            <a:endParaRPr lang="en-US"/>
+          </a:p>
+        </p:txBody>
+      </p:sp>
+    </p:spTree>
+    <p:extLst>
+      <p:ext uri="{BB962C8B-B14F-4D97-AF65-F5344CB8AC3E}">
+        <p14:creationId xmlns:p14="http://schemas.microsoft.com/office/powerpoint/2010/main" val="1024086991"/>
+      </p:ext>
+    </p:extLst>
+  </p:cSld>
+  <p:clrMapOvr>
+    <a:masterClrMapping/>
+  </p:clrMapOvr>
+</p:notes>
+</file>
+
+<file path=ppt/notesSlides/notesSlide8.xml><?xml version="1.0" encoding="utf-8"?>
+<p:notes xmlns:a="http://schemas.openxmlformats.org/drawingml/2006/main" xmlns:r="http://schemas.openxmlformats.org/officeDocument/2006/relationships" xmlns:p="http://schemas.openxmlformats.org/presentationml/2006/main">
+  <p:cSld>
+    <p:spTree>
+      <p:nvGrpSpPr>
+        <p:cNvPr id="1" name=""/>
+        <p:cNvGrpSpPr/>
+        <p:nvPr/>
+      </p:nvGrpSpPr>
+      <p:grpSpPr>
+        <a:xfrm>
+          <a:off x="0" y="0"/>
+          <a:ext cx="0" cy="0"/>
+          <a:chOff x="0" y="0"/>
+          <a:chExt cx="0" cy="0"/>
+        </a:xfrm>
+      </p:grpSpPr>
+      <p:sp>
+        <p:nvSpPr>
+          <p:cNvPr id="2" name="Slide Image Placeholder 1"/>
+          <p:cNvSpPr>
+            <a:spLocks noGrp="1" noRot="1" noChangeAspect="1"/>
+          </p:cNvSpPr>
+          <p:nvPr>
+            <p:ph type="sldImg"/>
+          </p:nvPr>
+        </p:nvSpPr>
+        <p:spPr/>
+      </p:sp>
+      <p:sp>
+        <p:nvSpPr>
+          <p:cNvPr id="3" name="Notes Placeholder 2"/>
+          <p:cNvSpPr>
+            <a:spLocks noGrp="1"/>
+          </p:cNvSpPr>
+          <p:nvPr>
+            <p:ph type="body" idx="1"/>
+          </p:nvPr>
+        </p:nvSpPr>
+        <p:spPr/>
+        <p:txBody>
+          <a:bodyPr/>
+          <a:lstStyle/>
+          <a:p>
+            <a:r>
+              <a:rPr lang="en-US" dirty="0"/>
+              <a:t>(~20 s) Both models work well. With limited labels or edge hardware, ResNet-18 matched or beat ViT at far lower cost; ViT is reasonable when full data and GPU time are available. Thank the audience and invite questions.</a:t>
+            </a:r>
+          </a:p>
+        </p:txBody>
+      </p:sp>
+      <p:sp>
+        <p:nvSpPr>
+          <p:cNvPr id="4" name="Slide Number Placeholder 3"/>
+          <p:cNvSpPr>
+            <a:spLocks noGrp="1"/>
+          </p:cNvSpPr>
+          <p:nvPr>
+            <p:ph type="sldNum" sz="quarter" idx="10"/>
+          </p:nvPr>
+        </p:nvSpPr>
+        <p:spPr/>
+        <p:txBody>
+          <a:bodyPr/>
+          <a:lstStyle/>
+          <a:p>
+            <a:fld id="{F7021451-1387-4CA6-816F-3879F97B5CBC}" type="slidenum">
+              <a:rPr lang="en-US"/>
+              <a:t>8</a:t>
             </a:fld>
             <a:endParaRPr lang="en-US"/>
           </a:p>
@@ -909,6 +1023,2989 @@
 </p:sldLayout>
 </file>
 
+<file path=ppt/slideLayouts/slideLayout10.xml><?xml version="1.0" encoding="utf-8"?>
+<p:sldLayout xmlns:a="http://schemas.openxmlformats.org/drawingml/2006/main" xmlns:r="http://schemas.openxmlformats.org/officeDocument/2006/relationships" xmlns:p="http://schemas.openxmlformats.org/presentationml/2006/main" type="blank" preserve="1">
+  <p:cSld name="Blank">
+    <p:spTree>
+      <p:nvGrpSpPr>
+        <p:cNvPr id="1" name=""/>
+        <p:cNvGrpSpPr/>
+        <p:nvPr/>
+      </p:nvGrpSpPr>
+      <p:grpSpPr>
+        <a:xfrm>
+          <a:off x="0" y="0"/>
+          <a:ext cx="0" cy="0"/>
+          <a:chOff x="0" y="0"/>
+          <a:chExt cx="0" cy="0"/>
+        </a:xfrm>
+      </p:grpSpPr>
+      <p:sp>
+        <p:nvSpPr>
+          <p:cNvPr id="2" name="Date Placeholder 1"/>
+          <p:cNvSpPr>
+            <a:spLocks noGrp="1"/>
+          </p:cNvSpPr>
+          <p:nvPr>
+            <p:ph type="dt" sz="half" idx="10"/>
+          </p:nvPr>
+        </p:nvSpPr>
+        <p:spPr/>
+        <p:txBody>
+          <a:bodyPr/>
+          <a:lstStyle/>
+          <a:p>
+            <a:fld id="{B61BEF0D-F0BB-DE4B-95CE-6DB70DBA9567}" type="datetimeFigureOut">
+              <a:rPr lang="en-US" dirty="0"/>
+              <a:pPr/>
+              <a:t>10/26/2026</a:t>
+            </a:fld>
+            <a:endParaRPr lang="en-US" dirty="0"/>
+          </a:p>
+        </p:txBody>
+      </p:sp>
+      <p:sp>
+        <p:nvSpPr>
+          <p:cNvPr id="3" name="Footer Placeholder 2"/>
+          <p:cNvSpPr>
+            <a:spLocks noGrp="1"/>
+          </p:cNvSpPr>
+          <p:nvPr>
+            <p:ph type="ftr" sz="quarter" idx="11"/>
+          </p:nvPr>
+        </p:nvSpPr>
+        <p:spPr/>
+        <p:txBody>
+          <a:bodyPr/>
+          <a:lstStyle/>
+          <a:p>
+            <a:endParaRPr lang="en-US" dirty="0"/>
+          </a:p>
+        </p:txBody>
+      </p:sp>
+      <p:sp>
+        <p:nvSpPr>
+          <p:cNvPr id="4" name="Slide Number Placeholder 3"/>
+          <p:cNvSpPr>
+            <a:spLocks noGrp="1"/>
+          </p:cNvSpPr>
+          <p:nvPr>
+            <p:ph type="sldNum" sz="quarter" idx="12"/>
+          </p:nvPr>
+        </p:nvSpPr>
+        <p:spPr/>
+        <p:txBody>
+          <a:bodyPr/>
+          <a:lstStyle/>
+          <a:p>
+            <a:pPr algn="r"/>
+            <a:fld id="{F7021451-1387-4CA6-816F-3879F97B5CBC}" type="slidenum">
+              <a:rPr lang="en-US" b="0" smtClean="0"/>
+              <a:t>‹#›</a:t>
+            </a:fld>
+            <a:endParaRPr lang="en-US"/>
+          </a:p>
+        </p:txBody>
+      </p:sp>
+    </p:spTree>
+    <p:extLst>
+      <p:ext uri="{BB962C8B-B14F-4D97-AF65-F5344CB8AC3E}">
+        <p14:creationId xmlns:p14="http://schemas.microsoft.com/office/powerpoint/2010/main" val="2427634427"/>
+      </p:ext>
+    </p:extLst>
+  </p:cSld>
+  <p:clrMapOvr>
+    <a:masterClrMapping/>
+  </p:clrMapOvr>
+  <p:hf sldNum="0" hdr="0" ftr="0" dt="0"/>
+</p:sldLayout>
+</file>
+
+<file path=ppt/slideLayouts/slideLayout11.xml><?xml version="1.0" encoding="utf-8"?>
+<p:sldLayout xmlns:a="http://schemas.openxmlformats.org/drawingml/2006/main" xmlns:r="http://schemas.openxmlformats.org/officeDocument/2006/relationships" xmlns:p="http://schemas.openxmlformats.org/presentationml/2006/main" type="objTx" preserve="1">
+  <p:cSld name="Content with Caption">
+    <p:spTree>
+      <p:nvGrpSpPr>
+        <p:cNvPr id="1" name=""/>
+        <p:cNvGrpSpPr/>
+        <p:nvPr/>
+      </p:nvGrpSpPr>
+      <p:grpSpPr>
+        <a:xfrm>
+          <a:off x="0" y="0"/>
+          <a:ext cx="0" cy="0"/>
+          <a:chOff x="0" y="0"/>
+          <a:chExt cx="0" cy="0"/>
+        </a:xfrm>
+      </p:grpSpPr>
+      <p:sp>
+        <p:nvSpPr>
+          <p:cNvPr id="2" name="Title 1"/>
+          <p:cNvSpPr>
+            <a:spLocks noGrp="1"/>
+          </p:cNvSpPr>
+          <p:nvPr>
+            <p:ph type="title"/>
+          </p:nvPr>
+        </p:nvSpPr>
+        <p:spPr>
+          <a:xfrm>
+            <a:off x="856059" y="1200150"/>
+            <a:ext cx="2661841" cy="1028700"/>
+          </a:xfrm>
+        </p:spPr>
+        <p:txBody>
+          <a:bodyPr anchor="b">
+            <a:normAutofit/>
+          </a:bodyPr>
+          <a:lstStyle>
+            <a:lvl1pPr algn="l">
+              <a:defRPr sz="1800" b="0"/>
+            </a:lvl1pPr>
+          </a:lstStyle>
+          <a:p>
+            <a:r>
+              <a:rPr lang="en-US"/>
+              <a:t>Click to edit Master title style</a:t>
+            </a:r>
+            <a:endParaRPr lang="en-US" dirty="0"/>
+          </a:p>
+        </p:txBody>
+      </p:sp>
+      <p:sp>
+        <p:nvSpPr>
+          <p:cNvPr id="3" name="Content Placeholder 2"/>
+          <p:cNvSpPr>
+            <a:spLocks noGrp="1"/>
+          </p:cNvSpPr>
+          <p:nvPr>
+            <p:ph idx="1"/>
+          </p:nvPr>
+        </p:nvSpPr>
+        <p:spPr>
+          <a:xfrm>
+            <a:off x="3827859" y="457201"/>
+            <a:ext cx="4457701" cy="3886200"/>
+          </a:xfrm>
+        </p:spPr>
+        <p:txBody>
+          <a:bodyPr anchor="ctr">
+            <a:normAutofit/>
+          </a:bodyPr>
+          <a:lstStyle>
+            <a:lvl1pPr>
+              <a:defRPr sz="1500"/>
+            </a:lvl1pPr>
+            <a:lvl2pPr>
+              <a:defRPr sz="1350"/>
+            </a:lvl2pPr>
+            <a:lvl3pPr>
+              <a:defRPr sz="1200"/>
+            </a:lvl3pPr>
+            <a:lvl4pPr>
+              <a:defRPr sz="1050"/>
+            </a:lvl4pPr>
+            <a:lvl5pPr>
+              <a:defRPr sz="1050"/>
+            </a:lvl5pPr>
+            <a:lvl6pPr>
+              <a:defRPr sz="1050"/>
+            </a:lvl6pPr>
+            <a:lvl7pPr>
+              <a:defRPr sz="1050"/>
+            </a:lvl7pPr>
+            <a:lvl8pPr>
+              <a:defRPr sz="1050"/>
+            </a:lvl8pPr>
+            <a:lvl9pPr>
+              <a:defRPr sz="1050"/>
+            </a:lvl9pPr>
+          </a:lstStyle>
+          <a:p>
+            <a:pPr lvl="0"/>
+            <a:r>
+              <a:rPr lang="en-US"/>
+              <a:t>Click to edit Master text styles</a:t>
+            </a:r>
+          </a:p>
+          <a:p>
+            <a:pPr lvl="1"/>
+            <a:r>
+              <a:rPr lang="en-US"/>
+              <a:t>Second level</a:t>
+            </a:r>
+          </a:p>
+          <a:p>
+            <a:pPr lvl="2"/>
+            <a:r>
+              <a:rPr lang="en-US"/>
+              <a:t>Third level</a:t>
+            </a:r>
+          </a:p>
+          <a:p>
+            <a:pPr lvl="3"/>
+            <a:r>
+              <a:rPr lang="en-US"/>
+              <a:t>Fourth level</a:t>
+            </a:r>
+          </a:p>
+          <a:p>
+            <a:pPr lvl="4"/>
+            <a:r>
+              <a:rPr lang="en-US"/>
+              <a:t>Fifth level</a:t>
+            </a:r>
+            <a:endParaRPr lang="en-US" dirty="0"/>
+          </a:p>
+        </p:txBody>
+      </p:sp>
+      <p:sp>
+        <p:nvSpPr>
+          <p:cNvPr id="4" name="Text Placeholder 3"/>
+          <p:cNvSpPr>
+            <a:spLocks noGrp="1"/>
+          </p:cNvSpPr>
+          <p:nvPr>
+            <p:ph type="body" sz="half" idx="2"/>
+          </p:nvPr>
+        </p:nvSpPr>
+        <p:spPr>
+          <a:xfrm>
+            <a:off x="856059" y="2228850"/>
+            <a:ext cx="2661841" cy="1371600"/>
+          </a:xfrm>
+        </p:spPr>
+        <p:txBody>
+          <a:bodyPr>
+            <a:normAutofit/>
+          </a:bodyPr>
+          <a:lstStyle>
+            <a:lvl1pPr marL="0" indent="0">
+              <a:buNone/>
+              <a:defRPr sz="1200"/>
+            </a:lvl1pPr>
+            <a:lvl2pPr marL="342900" indent="0">
+              <a:buNone/>
+              <a:defRPr sz="900"/>
+            </a:lvl2pPr>
+            <a:lvl3pPr marL="685800" indent="0">
+              <a:buNone/>
+              <a:defRPr sz="750"/>
+            </a:lvl3pPr>
+            <a:lvl4pPr marL="1028700" indent="0">
+              <a:buNone/>
+              <a:defRPr sz="675"/>
+            </a:lvl4pPr>
+            <a:lvl5pPr marL="1371600" indent="0">
+              <a:buNone/>
+              <a:defRPr sz="675"/>
+            </a:lvl5pPr>
+            <a:lvl6pPr marL="1714500" indent="0">
+              <a:buNone/>
+              <a:defRPr sz="675"/>
+            </a:lvl6pPr>
+            <a:lvl7pPr marL="2057400" indent="0">
+              <a:buNone/>
+              <a:defRPr sz="675"/>
+            </a:lvl7pPr>
+            <a:lvl8pPr marL="2400300" indent="0">
+              <a:buNone/>
+              <a:defRPr sz="675"/>
+            </a:lvl8pPr>
+            <a:lvl9pPr marL="2743200" indent="0">
+              <a:buNone/>
+              <a:defRPr sz="675"/>
+            </a:lvl9pPr>
+          </a:lstStyle>
+          <a:p>
+            <a:pPr lvl="0"/>
+            <a:r>
+              <a:rPr lang="en-US"/>
+              <a:t>Click to edit Master text styles</a:t>
+            </a:r>
+          </a:p>
+        </p:txBody>
+      </p:sp>
+      <p:sp>
+        <p:nvSpPr>
+          <p:cNvPr id="5" name="Date Placeholder 4"/>
+          <p:cNvSpPr>
+            <a:spLocks noGrp="1"/>
+          </p:cNvSpPr>
+          <p:nvPr>
+            <p:ph type="dt" sz="half" idx="10"/>
+          </p:nvPr>
+        </p:nvSpPr>
+        <p:spPr/>
+        <p:txBody>
+          <a:bodyPr/>
+          <a:lstStyle/>
+          <a:p>
+            <a:fld id="{B61BEF0D-F0BB-DE4B-95CE-6DB70DBA9567}" type="datetimeFigureOut">
+              <a:rPr lang="en-US" dirty="0"/>
+              <a:pPr/>
+              <a:t>10/26/2026</a:t>
+            </a:fld>
+            <a:endParaRPr lang="en-US" dirty="0"/>
+          </a:p>
+        </p:txBody>
+      </p:sp>
+      <p:sp>
+        <p:nvSpPr>
+          <p:cNvPr id="6" name="Footer Placeholder 5"/>
+          <p:cNvSpPr>
+            <a:spLocks noGrp="1"/>
+          </p:cNvSpPr>
+          <p:nvPr>
+            <p:ph type="ftr" sz="quarter" idx="11"/>
+          </p:nvPr>
+        </p:nvSpPr>
+        <p:spPr/>
+        <p:txBody>
+          <a:bodyPr/>
+          <a:lstStyle/>
+          <a:p>
+            <a:endParaRPr lang="en-US" dirty="0"/>
+          </a:p>
+        </p:txBody>
+      </p:sp>
+      <p:sp>
+        <p:nvSpPr>
+          <p:cNvPr id="7" name="Slide Number Placeholder 6"/>
+          <p:cNvSpPr>
+            <a:spLocks noGrp="1"/>
+          </p:cNvSpPr>
+          <p:nvPr>
+            <p:ph type="sldNum" sz="quarter" idx="12"/>
+          </p:nvPr>
+        </p:nvSpPr>
+        <p:spPr/>
+        <p:txBody>
+          <a:bodyPr/>
+          <a:lstStyle/>
+          <a:p>
+            <a:pPr algn="r"/>
+            <a:fld id="{F7021451-1387-4CA6-816F-3879F97B5CBC}" type="slidenum">
+              <a:rPr lang="en-US" b="0" smtClean="0"/>
+              <a:t>‹#›</a:t>
+            </a:fld>
+            <a:endParaRPr lang="en-US"/>
+          </a:p>
+        </p:txBody>
+      </p:sp>
+    </p:spTree>
+    <p:extLst>
+      <p:ext uri="{BB962C8B-B14F-4D97-AF65-F5344CB8AC3E}">
+        <p14:creationId xmlns:p14="http://schemas.microsoft.com/office/powerpoint/2010/main" val="2998547825"/>
+      </p:ext>
+    </p:extLst>
+  </p:cSld>
+  <p:clrMapOvr>
+    <a:masterClrMapping/>
+  </p:clrMapOvr>
+  <p:hf sldNum="0" hdr="0" ftr="0" dt="0"/>
+</p:sldLayout>
+</file>
+
+<file path=ppt/slideLayouts/slideLayout12.xml><?xml version="1.0" encoding="utf-8"?>
+<p:sldLayout xmlns:a="http://schemas.openxmlformats.org/drawingml/2006/main" xmlns:r="http://schemas.openxmlformats.org/officeDocument/2006/relationships" xmlns:p="http://schemas.openxmlformats.org/presentationml/2006/main" type="picTx" preserve="1">
+  <p:cSld name="Picture with Caption">
+    <p:spTree>
+      <p:nvGrpSpPr>
+        <p:cNvPr id="1" name=""/>
+        <p:cNvGrpSpPr/>
+        <p:nvPr/>
+      </p:nvGrpSpPr>
+      <p:grpSpPr>
+        <a:xfrm>
+          <a:off x="0" y="0"/>
+          <a:ext cx="0" cy="0"/>
+          <a:chOff x="0" y="0"/>
+          <a:chExt cx="0" cy="0"/>
+        </a:xfrm>
+      </p:grpSpPr>
+      <p:sp>
+        <p:nvSpPr>
+          <p:cNvPr id="2" name="Title 1"/>
+          <p:cNvSpPr>
+            <a:spLocks noGrp="1"/>
+          </p:cNvSpPr>
+          <p:nvPr>
+            <p:ph type="title"/>
+          </p:nvPr>
+        </p:nvSpPr>
+        <p:spPr>
+          <a:xfrm>
+            <a:off x="856059" y="1200150"/>
+            <a:ext cx="4000501" cy="1028700"/>
+          </a:xfrm>
+        </p:spPr>
+        <p:txBody>
+          <a:bodyPr anchor="b">
+            <a:normAutofit/>
+          </a:bodyPr>
+          <a:lstStyle>
+            <a:lvl1pPr algn="l">
+              <a:defRPr sz="2100" b="0"/>
+            </a:lvl1pPr>
+          </a:lstStyle>
+          <a:p>
+            <a:r>
+              <a:rPr lang="en-US"/>
+              <a:t>Click to edit Master title style</a:t>
+            </a:r>
+            <a:endParaRPr lang="en-US" dirty="0"/>
+          </a:p>
+        </p:txBody>
+      </p:sp>
+      <p:sp>
+        <p:nvSpPr>
+          <p:cNvPr id="14" name="Picture Placeholder 2"/>
+          <p:cNvSpPr>
+            <a:spLocks noGrp="1" noChangeAspect="1"/>
+          </p:cNvSpPr>
+          <p:nvPr>
+            <p:ph type="pic" idx="1"/>
+          </p:nvPr>
+        </p:nvSpPr>
+        <p:spPr>
+          <a:xfrm>
+            <a:off x="5575300" y="-13716"/>
+            <a:ext cx="2457449" cy="5177790"/>
+          </a:xfrm>
+          <a:ln w="38100">
+            <a:gradFill flip="none" rotWithShape="1">
+              <a:gsLst>
+                <a:gs pos="0">
+                  <a:schemeClr val="bg2"/>
+                </a:gs>
+                <a:gs pos="100000">
+                  <a:schemeClr val="bg2">
+                    <a:lumMod val="75000"/>
+                  </a:schemeClr>
+                </a:gs>
+              </a:gsLst>
+              <a:lin ang="5400000" scaled="0"/>
+              <a:tileRect/>
+            </a:gradFill>
+          </a:ln>
+          <a:effectLst>
+            <a:innerShdw blurRad="57150" dist="38100" dir="10800000">
+              <a:srgbClr val="000000">
+                <a:alpha val="70000"/>
+              </a:srgbClr>
+            </a:innerShdw>
+          </a:effectLst>
+        </p:spPr>
+        <p:txBody>
+          <a:bodyPr anchor="t">
+            <a:normAutofit/>
+          </a:bodyPr>
+          <a:lstStyle>
+            <a:lvl1pPr marL="0" indent="0" algn="ctr">
+              <a:buNone/>
+              <a:defRPr sz="1200"/>
+            </a:lvl1pPr>
+            <a:lvl2pPr marL="342900" indent="0">
+              <a:buNone/>
+              <a:defRPr sz="1200"/>
+            </a:lvl2pPr>
+            <a:lvl3pPr marL="685800" indent="0">
+              <a:buNone/>
+              <a:defRPr sz="1200"/>
+            </a:lvl3pPr>
+            <a:lvl4pPr marL="1028700" indent="0">
+              <a:buNone/>
+              <a:defRPr sz="1200"/>
+            </a:lvl4pPr>
+            <a:lvl5pPr marL="1371600" indent="0">
+              <a:buNone/>
+              <a:defRPr sz="1200"/>
+            </a:lvl5pPr>
+            <a:lvl6pPr marL="1714500" indent="0">
+              <a:buNone/>
+              <a:defRPr sz="1200"/>
+            </a:lvl6pPr>
+            <a:lvl7pPr marL="2057400" indent="0">
+              <a:buNone/>
+              <a:defRPr sz="1200"/>
+            </a:lvl7pPr>
+            <a:lvl8pPr marL="2400300" indent="0">
+              <a:buNone/>
+              <a:defRPr sz="1200"/>
+            </a:lvl8pPr>
+            <a:lvl9pPr marL="2743200" indent="0">
+              <a:buNone/>
+              <a:defRPr sz="1200"/>
+            </a:lvl9pPr>
+          </a:lstStyle>
+          <a:p>
+            <a:endParaRPr lang="en-US" dirty="0"/>
+          </a:p>
+        </p:txBody>
+      </p:sp>
+      <p:sp>
+        <p:nvSpPr>
+          <p:cNvPr id="4" name="Text Placeholder 3"/>
+          <p:cNvSpPr>
+            <a:spLocks noGrp="1"/>
+          </p:cNvSpPr>
+          <p:nvPr>
+            <p:ph type="body" sz="half" idx="2"/>
+          </p:nvPr>
+        </p:nvSpPr>
+        <p:spPr>
+          <a:xfrm>
+            <a:off x="856059" y="2228850"/>
+            <a:ext cx="4000501" cy="1371600"/>
+          </a:xfrm>
+        </p:spPr>
+        <p:txBody>
+          <a:bodyPr>
+            <a:normAutofit/>
+          </a:bodyPr>
+          <a:lstStyle>
+            <a:lvl1pPr marL="0" indent="0">
+              <a:buNone/>
+              <a:defRPr sz="1350"/>
+            </a:lvl1pPr>
+            <a:lvl2pPr marL="342900" indent="0">
+              <a:buNone/>
+              <a:defRPr sz="900"/>
+            </a:lvl2pPr>
+            <a:lvl3pPr marL="685800" indent="0">
+              <a:buNone/>
+              <a:defRPr sz="750"/>
+            </a:lvl3pPr>
+            <a:lvl4pPr marL="1028700" indent="0">
+              <a:buNone/>
+              <a:defRPr sz="675"/>
+            </a:lvl4pPr>
+            <a:lvl5pPr marL="1371600" indent="0">
+              <a:buNone/>
+              <a:defRPr sz="675"/>
+            </a:lvl5pPr>
+            <a:lvl6pPr marL="1714500" indent="0">
+              <a:buNone/>
+              <a:defRPr sz="675"/>
+            </a:lvl6pPr>
+            <a:lvl7pPr marL="2057400" indent="0">
+              <a:buNone/>
+              <a:defRPr sz="675"/>
+            </a:lvl7pPr>
+            <a:lvl8pPr marL="2400300" indent="0">
+              <a:buNone/>
+              <a:defRPr sz="675"/>
+            </a:lvl8pPr>
+            <a:lvl9pPr marL="2743200" indent="0">
+              <a:buNone/>
+              <a:defRPr sz="675"/>
+            </a:lvl9pPr>
+          </a:lstStyle>
+          <a:p>
+            <a:pPr lvl="0"/>
+            <a:r>
+              <a:rPr lang="en-US"/>
+              <a:t>Click to edit Master text styles</a:t>
+            </a:r>
+          </a:p>
+        </p:txBody>
+      </p:sp>
+      <p:sp>
+        <p:nvSpPr>
+          <p:cNvPr id="5" name="Date Placeholder 4"/>
+          <p:cNvSpPr>
+            <a:spLocks noGrp="1"/>
+          </p:cNvSpPr>
+          <p:nvPr>
+            <p:ph type="dt" sz="half" idx="10"/>
+          </p:nvPr>
+        </p:nvSpPr>
+        <p:spPr>
+          <a:xfrm>
+            <a:off x="4799409" y="4412457"/>
+            <a:ext cx="685800" cy="273844"/>
+          </a:xfrm>
+        </p:spPr>
+        <p:txBody>
+          <a:bodyPr/>
+          <a:lstStyle/>
+          <a:p>
+            <a:fld id="{B61BEF0D-F0BB-DE4B-95CE-6DB70DBA9567}" type="datetimeFigureOut">
+              <a:rPr lang="en-US" dirty="0"/>
+              <a:pPr/>
+              <a:t>10/26/2026</a:t>
+            </a:fld>
+            <a:endParaRPr lang="en-US" dirty="0"/>
+          </a:p>
+        </p:txBody>
+      </p:sp>
+      <p:sp>
+        <p:nvSpPr>
+          <p:cNvPr id="6" name="Footer Placeholder 5"/>
+          <p:cNvSpPr>
+            <a:spLocks noGrp="1"/>
+          </p:cNvSpPr>
+          <p:nvPr>
+            <p:ph type="ftr" sz="quarter" idx="11"/>
+          </p:nvPr>
+        </p:nvSpPr>
+        <p:spPr>
+          <a:xfrm>
+            <a:off x="856059" y="4412457"/>
+            <a:ext cx="3829050" cy="273844"/>
+          </a:xfrm>
+        </p:spPr>
+        <p:txBody>
+          <a:bodyPr/>
+          <a:lstStyle/>
+          <a:p>
+            <a:endParaRPr lang="en-US" dirty="0"/>
+          </a:p>
+        </p:txBody>
+      </p:sp>
+      <p:sp>
+        <p:nvSpPr>
+          <p:cNvPr id="7" name="Slide Number Placeholder 6"/>
+          <p:cNvSpPr>
+            <a:spLocks noGrp="1"/>
+          </p:cNvSpPr>
+          <p:nvPr>
+            <p:ph type="sldNum" sz="quarter" idx="12"/>
+          </p:nvPr>
+        </p:nvSpPr>
+        <p:spPr>
+          <a:xfrm>
+            <a:off x="8056960" y="4412457"/>
+            <a:ext cx="241925" cy="273844"/>
+          </a:xfrm>
+        </p:spPr>
+        <p:txBody>
+          <a:bodyPr/>
+          <a:lstStyle/>
+          <a:p>
+            <a:pPr algn="r"/>
+            <a:fld id="{F7021451-1387-4CA6-816F-3879F97B5CBC}" type="slidenum">
+              <a:rPr lang="en-US" b="0" smtClean="0"/>
+              <a:t>‹#›</a:t>
+            </a:fld>
+            <a:endParaRPr lang="en-US"/>
+          </a:p>
+        </p:txBody>
+      </p:sp>
+    </p:spTree>
+    <p:extLst>
+      <p:ext uri="{BB962C8B-B14F-4D97-AF65-F5344CB8AC3E}">
+        <p14:creationId xmlns:p14="http://schemas.microsoft.com/office/powerpoint/2010/main" val="4067826036"/>
+      </p:ext>
+    </p:extLst>
+  </p:cSld>
+  <p:clrMapOvr>
+    <a:masterClrMapping/>
+  </p:clrMapOvr>
+  <p:hf sldNum="0" hdr="0" ftr="0" dt="0"/>
+</p:sldLayout>
+</file>
+
+<file path=ppt/slideLayouts/slideLayout13.xml><?xml version="1.0" encoding="utf-8"?>
+<p:sldLayout xmlns:a="http://schemas.openxmlformats.org/drawingml/2006/main" xmlns:r="http://schemas.openxmlformats.org/officeDocument/2006/relationships" xmlns:p="http://schemas.openxmlformats.org/presentationml/2006/main" preserve="1">
+  <p:cSld name="Panoramic Picture with Caption">
+    <p:spTree>
+      <p:nvGrpSpPr>
+        <p:cNvPr id="1" name=""/>
+        <p:cNvGrpSpPr/>
+        <p:nvPr/>
+      </p:nvGrpSpPr>
+      <p:grpSpPr>
+        <a:xfrm>
+          <a:off x="0" y="0"/>
+          <a:ext cx="0" cy="0"/>
+          <a:chOff x="0" y="0"/>
+          <a:chExt cx="0" cy="0"/>
+        </a:xfrm>
+      </p:grpSpPr>
+      <p:sp>
+        <p:nvSpPr>
+          <p:cNvPr id="2" name="Title 1"/>
+          <p:cNvSpPr>
+            <a:spLocks noGrp="1"/>
+          </p:cNvSpPr>
+          <p:nvPr>
+            <p:ph type="title"/>
+          </p:nvPr>
+        </p:nvSpPr>
+        <p:spPr>
+          <a:xfrm>
+            <a:off x="856060" y="3549649"/>
+            <a:ext cx="7429500" cy="425054"/>
+          </a:xfrm>
+        </p:spPr>
+        <p:txBody>
+          <a:bodyPr anchor="b">
+            <a:normAutofit/>
+          </a:bodyPr>
+          <a:lstStyle>
+            <a:lvl1pPr algn="l">
+              <a:defRPr sz="1800" b="0"/>
+            </a:lvl1pPr>
+          </a:lstStyle>
+          <a:p>
+            <a:r>
+              <a:rPr lang="en-US"/>
+              <a:t>Click to edit Master title style</a:t>
+            </a:r>
+            <a:endParaRPr lang="en-US" dirty="0"/>
+          </a:p>
+        </p:txBody>
+      </p:sp>
+      <p:sp>
+        <p:nvSpPr>
+          <p:cNvPr id="3" name="Picture Placeholder 2"/>
+          <p:cNvSpPr>
+            <a:spLocks noGrp="1" noChangeAspect="1"/>
+          </p:cNvSpPr>
+          <p:nvPr>
+            <p:ph type="pic" idx="1"/>
+          </p:nvPr>
+        </p:nvSpPr>
+        <p:spPr>
+          <a:xfrm>
+            <a:off x="1484709" y="699084"/>
+            <a:ext cx="6169458" cy="2373732"/>
+          </a:xfrm>
+          <a:prstGeom prst="roundRect">
+            <a:avLst>
+              <a:gd name="adj" fmla="val 4380"/>
+            </a:avLst>
+          </a:prstGeom>
+          <a:ln w="38100">
+            <a:gradFill flip="none" rotWithShape="1">
+              <a:gsLst>
+                <a:gs pos="0">
+                  <a:schemeClr val="bg2"/>
+                </a:gs>
+                <a:gs pos="100000">
+                  <a:schemeClr val="bg2">
+                    <a:lumMod val="75000"/>
+                  </a:schemeClr>
+                </a:gs>
+              </a:gsLst>
+              <a:lin ang="5400000" scaled="0"/>
+              <a:tileRect/>
+            </a:gradFill>
+          </a:ln>
+          <a:effectLst>
+            <a:innerShdw blurRad="57150" dist="38100" dir="14460000">
+              <a:srgbClr val="000000">
+                <a:alpha val="70000"/>
+              </a:srgbClr>
+            </a:innerShdw>
+          </a:effectLst>
+        </p:spPr>
+        <p:txBody>
+          <a:bodyPr anchor="t">
+            <a:normAutofit/>
+          </a:bodyPr>
+          <a:lstStyle>
+            <a:lvl1pPr marL="0" indent="0" algn="ctr">
+              <a:buNone/>
+              <a:defRPr sz="1200"/>
+            </a:lvl1pPr>
+            <a:lvl2pPr marL="342900" indent="0">
+              <a:buNone/>
+              <a:defRPr sz="1200"/>
+            </a:lvl2pPr>
+            <a:lvl3pPr marL="685800" indent="0">
+              <a:buNone/>
+              <a:defRPr sz="1200"/>
+            </a:lvl3pPr>
+            <a:lvl4pPr marL="1028700" indent="0">
+              <a:buNone/>
+              <a:defRPr sz="1200"/>
+            </a:lvl4pPr>
+            <a:lvl5pPr marL="1371600" indent="0">
+              <a:buNone/>
+              <a:defRPr sz="1200"/>
+            </a:lvl5pPr>
+            <a:lvl6pPr marL="1714500" indent="0">
+              <a:buNone/>
+              <a:defRPr sz="1200"/>
+            </a:lvl6pPr>
+            <a:lvl7pPr marL="2057400" indent="0">
+              <a:buNone/>
+              <a:defRPr sz="1200"/>
+            </a:lvl7pPr>
+            <a:lvl8pPr marL="2400300" indent="0">
+              <a:buNone/>
+              <a:defRPr sz="1200"/>
+            </a:lvl8pPr>
+            <a:lvl9pPr marL="2743200" indent="0">
+              <a:buNone/>
+              <a:defRPr sz="1200"/>
+            </a:lvl9pPr>
+          </a:lstStyle>
+          <a:p>
+            <a:endParaRPr lang="en-US" dirty="0"/>
+          </a:p>
+        </p:txBody>
+      </p:sp>
+      <p:sp>
+        <p:nvSpPr>
+          <p:cNvPr id="4" name="Text Placeholder 3"/>
+          <p:cNvSpPr>
+            <a:spLocks noGrp="1"/>
+          </p:cNvSpPr>
+          <p:nvPr>
+            <p:ph type="body" sz="half" idx="2"/>
+          </p:nvPr>
+        </p:nvSpPr>
+        <p:spPr>
+          <a:xfrm>
+            <a:off x="856060" y="3974702"/>
+            <a:ext cx="7429500" cy="370284"/>
+          </a:xfrm>
+        </p:spPr>
+        <p:txBody>
+          <a:bodyPr>
+            <a:normAutofit/>
+          </a:bodyPr>
+          <a:lstStyle>
+            <a:lvl1pPr marL="0" indent="0">
+              <a:buNone/>
+              <a:defRPr sz="1050"/>
+            </a:lvl1pPr>
+            <a:lvl2pPr marL="342900" indent="0">
+              <a:buNone/>
+              <a:defRPr sz="900"/>
+            </a:lvl2pPr>
+            <a:lvl3pPr marL="685800" indent="0">
+              <a:buNone/>
+              <a:defRPr sz="750"/>
+            </a:lvl3pPr>
+            <a:lvl4pPr marL="1028700" indent="0">
+              <a:buNone/>
+              <a:defRPr sz="675"/>
+            </a:lvl4pPr>
+            <a:lvl5pPr marL="1371600" indent="0">
+              <a:buNone/>
+              <a:defRPr sz="675"/>
+            </a:lvl5pPr>
+            <a:lvl6pPr marL="1714500" indent="0">
+              <a:buNone/>
+              <a:defRPr sz="675"/>
+            </a:lvl6pPr>
+            <a:lvl7pPr marL="2057400" indent="0">
+              <a:buNone/>
+              <a:defRPr sz="675"/>
+            </a:lvl7pPr>
+            <a:lvl8pPr marL="2400300" indent="0">
+              <a:buNone/>
+              <a:defRPr sz="675"/>
+            </a:lvl8pPr>
+            <a:lvl9pPr marL="2743200" indent="0">
+              <a:buNone/>
+              <a:defRPr sz="675"/>
+            </a:lvl9pPr>
+          </a:lstStyle>
+          <a:p>
+            <a:pPr lvl="0"/>
+            <a:r>
+              <a:rPr lang="en-US"/>
+              <a:t>Click to edit Master text styles</a:t>
+            </a:r>
+          </a:p>
+        </p:txBody>
+      </p:sp>
+      <p:sp>
+        <p:nvSpPr>
+          <p:cNvPr id="5" name="Date Placeholder 4"/>
+          <p:cNvSpPr>
+            <a:spLocks noGrp="1"/>
+          </p:cNvSpPr>
+          <p:nvPr>
+            <p:ph type="dt" sz="half" idx="10"/>
+          </p:nvPr>
+        </p:nvSpPr>
+        <p:spPr/>
+        <p:txBody>
+          <a:bodyPr/>
+          <a:lstStyle/>
+          <a:p>
+            <a:fld id="{B61BEF0D-F0BB-DE4B-95CE-6DB70DBA9567}" type="datetimeFigureOut">
+              <a:rPr lang="en-US" dirty="0"/>
+              <a:pPr/>
+              <a:t>10/26/2026</a:t>
+            </a:fld>
+            <a:endParaRPr lang="en-US" dirty="0"/>
+          </a:p>
+        </p:txBody>
+      </p:sp>
+      <p:sp>
+        <p:nvSpPr>
+          <p:cNvPr id="6" name="Footer Placeholder 5"/>
+          <p:cNvSpPr>
+            <a:spLocks noGrp="1"/>
+          </p:cNvSpPr>
+          <p:nvPr>
+            <p:ph type="ftr" sz="quarter" idx="11"/>
+          </p:nvPr>
+        </p:nvSpPr>
+        <p:spPr/>
+        <p:txBody>
+          <a:bodyPr/>
+          <a:lstStyle/>
+          <a:p>
+            <a:endParaRPr lang="en-US" dirty="0"/>
+          </a:p>
+        </p:txBody>
+      </p:sp>
+      <p:sp>
+        <p:nvSpPr>
+          <p:cNvPr id="7" name="Slide Number Placeholder 6"/>
+          <p:cNvSpPr>
+            <a:spLocks noGrp="1"/>
+          </p:cNvSpPr>
+          <p:nvPr>
+            <p:ph type="sldNum" sz="quarter" idx="12"/>
+          </p:nvPr>
+        </p:nvSpPr>
+        <p:spPr/>
+        <p:txBody>
+          <a:bodyPr/>
+          <a:lstStyle/>
+          <a:p>
+            <a:pPr algn="r"/>
+            <a:fld id="{F7021451-1387-4CA6-816F-3879F97B5CBC}" type="slidenum">
+              <a:rPr lang="en-US" b="0" smtClean="0"/>
+              <a:t>‹#›</a:t>
+            </a:fld>
+            <a:endParaRPr lang="en-US"/>
+          </a:p>
+        </p:txBody>
+      </p:sp>
+    </p:spTree>
+    <p:extLst>
+      <p:ext uri="{BB962C8B-B14F-4D97-AF65-F5344CB8AC3E}">
+        <p14:creationId xmlns:p14="http://schemas.microsoft.com/office/powerpoint/2010/main" val="1317235161"/>
+      </p:ext>
+    </p:extLst>
+  </p:cSld>
+  <p:clrMapOvr>
+    <a:masterClrMapping/>
+  </p:clrMapOvr>
+  <p:hf sldNum="0" hdr="0" ftr="0" dt="0"/>
+</p:sldLayout>
+</file>
+
+<file path=ppt/slideLayouts/slideLayout14.xml><?xml version="1.0" encoding="utf-8"?>
+<p:sldLayout xmlns:a="http://schemas.openxmlformats.org/drawingml/2006/main" xmlns:r="http://schemas.openxmlformats.org/officeDocument/2006/relationships" xmlns:p="http://schemas.openxmlformats.org/presentationml/2006/main" preserve="1">
+  <p:cSld name="Title and Caption">
+    <p:spTree>
+      <p:nvGrpSpPr>
+        <p:cNvPr id="1" name=""/>
+        <p:cNvGrpSpPr/>
+        <p:nvPr/>
+      </p:nvGrpSpPr>
+      <p:grpSpPr>
+        <a:xfrm>
+          <a:off x="0" y="0"/>
+          <a:ext cx="0" cy="0"/>
+          <a:chOff x="0" y="0"/>
+          <a:chExt cx="0" cy="0"/>
+        </a:xfrm>
+      </p:grpSpPr>
+      <p:sp>
+        <p:nvSpPr>
+          <p:cNvPr id="2" name="Title 1"/>
+          <p:cNvSpPr>
+            <a:spLocks noGrp="1"/>
+          </p:cNvSpPr>
+          <p:nvPr>
+            <p:ph type="title"/>
+          </p:nvPr>
+        </p:nvSpPr>
+        <p:spPr>
+          <a:xfrm>
+            <a:off x="856060" y="457201"/>
+            <a:ext cx="7429499" cy="2343149"/>
+          </a:xfrm>
+        </p:spPr>
+        <p:txBody>
+          <a:bodyPr anchor="ctr">
+            <a:normAutofit/>
+          </a:bodyPr>
+          <a:lstStyle>
+            <a:lvl1pPr algn="l">
+              <a:defRPr sz="2400" b="0" cap="all"/>
+            </a:lvl1pPr>
+          </a:lstStyle>
+          <a:p>
+            <a:r>
+              <a:rPr lang="en-US"/>
+              <a:t>Click to edit Master title style</a:t>
+            </a:r>
+            <a:endParaRPr lang="en-US" dirty="0"/>
+          </a:p>
+        </p:txBody>
+      </p:sp>
+      <p:sp>
+        <p:nvSpPr>
+          <p:cNvPr id="3" name="Text Placeholder 2"/>
+          <p:cNvSpPr>
+            <a:spLocks noGrp="1"/>
+          </p:cNvSpPr>
+          <p:nvPr>
+            <p:ph type="body" idx="1"/>
+          </p:nvPr>
+        </p:nvSpPr>
+        <p:spPr>
+          <a:xfrm>
+            <a:off x="856058" y="3257550"/>
+            <a:ext cx="7429500" cy="1085850"/>
+          </a:xfrm>
+        </p:spPr>
+        <p:txBody>
+          <a:bodyPr anchor="ctr">
+            <a:normAutofit/>
+          </a:bodyPr>
+          <a:lstStyle>
+            <a:lvl1pPr marL="0" indent="0" algn="l">
+              <a:buNone/>
+              <a:defRPr sz="1500">
+                <a:gradFill flip="none" rotWithShape="1">
+                  <a:gsLst>
+                    <a:gs pos="0">
+                      <a:schemeClr val="tx1"/>
+                    </a:gs>
+                    <a:gs pos="100000">
+                      <a:schemeClr val="tx1">
+                        <a:lumMod val="75000"/>
+                      </a:schemeClr>
+                    </a:gs>
+                  </a:gsLst>
+                  <a:lin ang="5400000" scaled="0"/>
+                  <a:tileRect/>
+                </a:gradFill>
+              </a:defRPr>
+            </a:lvl1pPr>
+            <a:lvl2pPr marL="342900" indent="0">
+              <a:buNone/>
+              <a:defRPr sz="1350">
+                <a:solidFill>
+                  <a:schemeClr val="tx1">
+                    <a:tint val="75000"/>
+                  </a:schemeClr>
+                </a:solidFill>
+              </a:defRPr>
+            </a:lvl2pPr>
+            <a:lvl3pPr marL="685800" indent="0">
+              <a:buNone/>
+              <a:defRPr sz="1200">
+                <a:solidFill>
+                  <a:schemeClr val="tx1">
+                    <a:tint val="75000"/>
+                  </a:schemeClr>
+                </a:solidFill>
+              </a:defRPr>
+            </a:lvl3pPr>
+            <a:lvl4pPr marL="1028700" indent="0">
+              <a:buNone/>
+              <a:defRPr sz="1050">
+                <a:solidFill>
+                  <a:schemeClr val="tx1">
+                    <a:tint val="75000"/>
+                  </a:schemeClr>
+                </a:solidFill>
+              </a:defRPr>
+            </a:lvl4pPr>
+            <a:lvl5pPr marL="1371600" indent="0">
+              <a:buNone/>
+              <a:defRPr sz="1050">
+                <a:solidFill>
+                  <a:schemeClr val="tx1">
+                    <a:tint val="75000"/>
+                  </a:schemeClr>
+                </a:solidFill>
+              </a:defRPr>
+            </a:lvl5pPr>
+            <a:lvl6pPr marL="1714500" indent="0">
+              <a:buNone/>
+              <a:defRPr sz="1050">
+                <a:solidFill>
+                  <a:schemeClr val="tx1">
+                    <a:tint val="75000"/>
+                  </a:schemeClr>
+                </a:solidFill>
+              </a:defRPr>
+            </a:lvl6pPr>
+            <a:lvl7pPr marL="2057400" indent="0">
+              <a:buNone/>
+              <a:defRPr sz="1050">
+                <a:solidFill>
+                  <a:schemeClr val="tx1">
+                    <a:tint val="75000"/>
+                  </a:schemeClr>
+                </a:solidFill>
+              </a:defRPr>
+            </a:lvl7pPr>
+            <a:lvl8pPr marL="2400300" indent="0">
+              <a:buNone/>
+              <a:defRPr sz="1050">
+                <a:solidFill>
+                  <a:schemeClr val="tx1">
+                    <a:tint val="75000"/>
+                  </a:schemeClr>
+                </a:solidFill>
+              </a:defRPr>
+            </a:lvl8pPr>
+            <a:lvl9pPr marL="2743200" indent="0">
+              <a:buNone/>
+              <a:defRPr sz="1050">
+                <a:solidFill>
+                  <a:schemeClr val="tx1">
+                    <a:tint val="75000"/>
+                  </a:schemeClr>
+                </a:solidFill>
+              </a:defRPr>
+            </a:lvl9pPr>
+          </a:lstStyle>
+          <a:p>
+            <a:pPr lvl="0"/>
+            <a:r>
+              <a:rPr lang="en-US"/>
+              <a:t>Click to edit Master text styles</a:t>
+            </a:r>
+          </a:p>
+        </p:txBody>
+      </p:sp>
+      <p:sp>
+        <p:nvSpPr>
+          <p:cNvPr id="4" name="Date Placeholder 3"/>
+          <p:cNvSpPr>
+            <a:spLocks noGrp="1"/>
+          </p:cNvSpPr>
+          <p:nvPr>
+            <p:ph type="dt" sz="half" idx="10"/>
+          </p:nvPr>
+        </p:nvSpPr>
+        <p:spPr/>
+        <p:txBody>
+          <a:bodyPr/>
+          <a:lstStyle/>
+          <a:p>
+            <a:fld id="{B61BEF0D-F0BB-DE4B-95CE-6DB70DBA9567}" type="datetimeFigureOut">
+              <a:rPr lang="en-US" dirty="0"/>
+              <a:pPr/>
+              <a:t>10/26/2026</a:t>
+            </a:fld>
+            <a:endParaRPr lang="en-US" dirty="0"/>
+          </a:p>
+        </p:txBody>
+      </p:sp>
+      <p:sp>
+        <p:nvSpPr>
+          <p:cNvPr id="5" name="Footer Placeholder 4"/>
+          <p:cNvSpPr>
+            <a:spLocks noGrp="1"/>
+          </p:cNvSpPr>
+          <p:nvPr>
+            <p:ph type="ftr" sz="quarter" idx="11"/>
+          </p:nvPr>
+        </p:nvSpPr>
+        <p:spPr/>
+        <p:txBody>
+          <a:bodyPr/>
+          <a:lstStyle/>
+          <a:p>
+            <a:endParaRPr lang="en-US" dirty="0"/>
+          </a:p>
+        </p:txBody>
+      </p:sp>
+      <p:sp>
+        <p:nvSpPr>
+          <p:cNvPr id="6" name="Slide Number Placeholder 5"/>
+          <p:cNvSpPr>
+            <a:spLocks noGrp="1"/>
+          </p:cNvSpPr>
+          <p:nvPr>
+            <p:ph type="sldNum" sz="quarter" idx="12"/>
+          </p:nvPr>
+        </p:nvSpPr>
+        <p:spPr/>
+        <p:txBody>
+          <a:bodyPr/>
+          <a:lstStyle/>
+          <a:p>
+            <a:pPr algn="r"/>
+            <a:fld id="{F7021451-1387-4CA6-816F-3879F97B5CBC}" type="slidenum">
+              <a:rPr lang="en-US" b="0" smtClean="0"/>
+              <a:t>‹#›</a:t>
+            </a:fld>
+            <a:endParaRPr lang="en-US"/>
+          </a:p>
+        </p:txBody>
+      </p:sp>
+    </p:spTree>
+    <p:extLst>
+      <p:ext uri="{BB962C8B-B14F-4D97-AF65-F5344CB8AC3E}">
+        <p14:creationId xmlns:p14="http://schemas.microsoft.com/office/powerpoint/2010/main" val="2383386318"/>
+      </p:ext>
+    </p:extLst>
+  </p:cSld>
+  <p:clrMapOvr>
+    <a:masterClrMapping/>
+  </p:clrMapOvr>
+  <p:hf sldNum="0" hdr="0" ftr="0" dt="0"/>
+</p:sldLayout>
+</file>
+
+<file path=ppt/slideLayouts/slideLayout15.xml><?xml version="1.0" encoding="utf-8"?>
+<p:sldLayout xmlns:a="http://schemas.openxmlformats.org/drawingml/2006/main" xmlns:r="http://schemas.openxmlformats.org/officeDocument/2006/relationships" xmlns:p="http://schemas.openxmlformats.org/presentationml/2006/main" preserve="1">
+  <p:cSld name="Quote with Caption">
+    <p:spTree>
+      <p:nvGrpSpPr>
+        <p:cNvPr id="1" name=""/>
+        <p:cNvGrpSpPr/>
+        <p:nvPr/>
+      </p:nvGrpSpPr>
+      <p:grpSpPr>
+        <a:xfrm>
+          <a:off x="0" y="0"/>
+          <a:ext cx="0" cy="0"/>
+          <a:chOff x="0" y="0"/>
+          <a:chExt cx="0" cy="0"/>
+        </a:xfrm>
+      </p:grpSpPr>
+      <p:sp>
+        <p:nvSpPr>
+          <p:cNvPr id="14" name="TextBox 13"/>
+          <p:cNvSpPr txBox="1"/>
+          <p:nvPr/>
+        </p:nvSpPr>
+        <p:spPr>
+          <a:xfrm>
+            <a:off x="627459" y="590118"/>
+            <a:ext cx="457200" cy="438582"/>
+          </a:xfrm>
+          <a:prstGeom prst="rect">
+            <a:avLst/>
+          </a:prstGeom>
+        </p:spPr>
+        <p:txBody>
+          <a:bodyPr vert="horz" lIns="68580" tIns="34290" rIns="68580" bIns="34290" rtlCol="0" anchor="ctr">
+            <a:noAutofit/>
+          </a:bodyPr>
+          <a:lstStyle>
+            <a:lvl1pPr>
+              <a:spcBef>
+                <a:spcPct val="0"/>
+              </a:spcBef>
+              <a:buNone/>
+              <a:defRPr sz="3200" b="0" cap="all">
+                <a:ln w="3175" cmpd="sng">
+                  <a:noFill/>
+                </a:ln>
+                <a:effectLst>
+                  <a:glow rad="38100">
+                    <a:schemeClr val="bg1">
+                      <a:lumMod val="65000"/>
+                      <a:lumOff val="35000"/>
+                      <a:alpha val="40000"/>
+                    </a:schemeClr>
+                  </a:glow>
+                  <a:outerShdw blurRad="28575" dist="38100" dir="14040000" algn="tl" rotWithShape="0">
+                    <a:srgbClr val="000000">
+                      <a:alpha val="25000"/>
+                    </a:srgbClr>
+                  </a:outerShdw>
+                </a:effectLst>
+              </a:defRPr>
+            </a:lvl1pPr>
+            <a:lvl2pPr>
+              <a:defRPr>
+                <a:solidFill>
+                  <a:schemeClr val="tx2"/>
+                </a:solidFill>
+              </a:defRPr>
+            </a:lvl2pPr>
+            <a:lvl3pPr>
+              <a:defRPr>
+                <a:solidFill>
+                  <a:schemeClr val="tx2"/>
+                </a:solidFill>
+              </a:defRPr>
+            </a:lvl3pPr>
+            <a:lvl4pPr>
+              <a:defRPr>
+                <a:solidFill>
+                  <a:schemeClr val="tx2"/>
+                </a:solidFill>
+              </a:defRPr>
+            </a:lvl4pPr>
+            <a:lvl5pPr>
+              <a:defRPr>
+                <a:solidFill>
+                  <a:schemeClr val="tx2"/>
+                </a:solidFill>
+              </a:defRPr>
+            </a:lvl5pPr>
+            <a:lvl6pPr>
+              <a:defRPr>
+                <a:solidFill>
+                  <a:schemeClr val="tx2"/>
+                </a:solidFill>
+              </a:defRPr>
+            </a:lvl6pPr>
+            <a:lvl7pPr>
+              <a:defRPr>
+                <a:solidFill>
+                  <a:schemeClr val="tx2"/>
+                </a:solidFill>
+              </a:defRPr>
+            </a:lvl7pPr>
+            <a:lvl8pPr>
+              <a:defRPr>
+                <a:solidFill>
+                  <a:schemeClr val="tx2"/>
+                </a:solidFill>
+              </a:defRPr>
+            </a:lvl8pPr>
+            <a:lvl9pPr>
+              <a:defRPr>
+                <a:solidFill>
+                  <a:schemeClr val="tx2"/>
+                </a:solidFill>
+              </a:defRPr>
+            </a:lvl9pPr>
+          </a:lstStyle>
+          <a:p>
+            <a:pPr lvl="0"/>
+            <a:r>
+              <a:rPr lang="en-US" sz="6000" dirty="0">
+                <a:solidFill>
+                  <a:schemeClr val="accent1"/>
+                </a:solidFill>
+              </a:rPr>
+              <a:t>“</a:t>
+            </a:r>
+          </a:p>
+        </p:txBody>
+      </p:sp>
+      <p:sp>
+        <p:nvSpPr>
+          <p:cNvPr id="15" name="TextBox 14"/>
+          <p:cNvSpPr txBox="1"/>
+          <p:nvPr/>
+        </p:nvSpPr>
+        <p:spPr>
+          <a:xfrm>
+            <a:off x="7828359" y="2057400"/>
+            <a:ext cx="457200" cy="438582"/>
+          </a:xfrm>
+          <a:prstGeom prst="rect">
+            <a:avLst/>
+          </a:prstGeom>
+        </p:spPr>
+        <p:txBody>
+          <a:bodyPr vert="horz" lIns="68580" tIns="34290" rIns="68580" bIns="34290" rtlCol="0" anchor="ctr">
+            <a:noAutofit/>
+          </a:bodyPr>
+          <a:lstStyle>
+            <a:lvl1pPr>
+              <a:spcBef>
+                <a:spcPct val="0"/>
+              </a:spcBef>
+              <a:buNone/>
+              <a:defRPr sz="3200" b="0" cap="all">
+                <a:ln w="3175" cmpd="sng">
+                  <a:noFill/>
+                </a:ln>
+                <a:effectLst>
+                  <a:glow rad="38100">
+                    <a:schemeClr val="bg1">
+                      <a:lumMod val="65000"/>
+                      <a:lumOff val="35000"/>
+                      <a:alpha val="40000"/>
+                    </a:schemeClr>
+                  </a:glow>
+                  <a:outerShdw blurRad="28575" dist="38100" dir="14040000" algn="tl" rotWithShape="0">
+                    <a:srgbClr val="000000">
+                      <a:alpha val="25000"/>
+                    </a:srgbClr>
+                  </a:outerShdw>
+                </a:effectLst>
+              </a:defRPr>
+            </a:lvl1pPr>
+            <a:lvl2pPr>
+              <a:defRPr>
+                <a:solidFill>
+                  <a:schemeClr val="tx2"/>
+                </a:solidFill>
+              </a:defRPr>
+            </a:lvl2pPr>
+            <a:lvl3pPr>
+              <a:defRPr>
+                <a:solidFill>
+                  <a:schemeClr val="tx2"/>
+                </a:solidFill>
+              </a:defRPr>
+            </a:lvl3pPr>
+            <a:lvl4pPr>
+              <a:defRPr>
+                <a:solidFill>
+                  <a:schemeClr val="tx2"/>
+                </a:solidFill>
+              </a:defRPr>
+            </a:lvl4pPr>
+            <a:lvl5pPr>
+              <a:defRPr>
+                <a:solidFill>
+                  <a:schemeClr val="tx2"/>
+                </a:solidFill>
+              </a:defRPr>
+            </a:lvl5pPr>
+            <a:lvl6pPr>
+              <a:defRPr>
+                <a:solidFill>
+                  <a:schemeClr val="tx2"/>
+                </a:solidFill>
+              </a:defRPr>
+            </a:lvl6pPr>
+            <a:lvl7pPr>
+              <a:defRPr>
+                <a:solidFill>
+                  <a:schemeClr val="tx2"/>
+                </a:solidFill>
+              </a:defRPr>
+            </a:lvl7pPr>
+            <a:lvl8pPr>
+              <a:defRPr>
+                <a:solidFill>
+                  <a:schemeClr val="tx2"/>
+                </a:solidFill>
+              </a:defRPr>
+            </a:lvl8pPr>
+            <a:lvl9pPr>
+              <a:defRPr>
+                <a:solidFill>
+                  <a:schemeClr val="tx2"/>
+                </a:solidFill>
+              </a:defRPr>
+            </a:lvl9pPr>
+          </a:lstStyle>
+          <a:p>
+            <a:pPr lvl="0" algn="r"/>
+            <a:r>
+              <a:rPr lang="en-US" sz="6000" dirty="0">
+                <a:solidFill>
+                  <a:schemeClr val="accent1"/>
+                </a:solidFill>
+              </a:rPr>
+              <a:t>”</a:t>
+            </a:r>
+          </a:p>
+        </p:txBody>
+      </p:sp>
+      <p:sp>
+        <p:nvSpPr>
+          <p:cNvPr id="2" name="Title 1"/>
+          <p:cNvSpPr>
+            <a:spLocks noGrp="1"/>
+          </p:cNvSpPr>
+          <p:nvPr>
+            <p:ph type="title"/>
+          </p:nvPr>
+        </p:nvSpPr>
+        <p:spPr>
+          <a:xfrm>
+            <a:off x="1084660" y="457201"/>
+            <a:ext cx="6972299" cy="2057399"/>
+          </a:xfrm>
+        </p:spPr>
+        <p:txBody>
+          <a:bodyPr anchor="ctr">
+            <a:normAutofit/>
+          </a:bodyPr>
+          <a:lstStyle>
+            <a:lvl1pPr algn="l">
+              <a:defRPr sz="2400" b="0" cap="all">
+                <a:solidFill>
+                  <a:schemeClr val="tx1"/>
+                </a:solidFill>
+              </a:defRPr>
+            </a:lvl1pPr>
+          </a:lstStyle>
+          <a:p>
+            <a:r>
+              <a:rPr lang="en-US"/>
+              <a:t>Click to edit Master title style</a:t>
+            </a:r>
+            <a:endParaRPr lang="en-US" dirty="0"/>
+          </a:p>
+        </p:txBody>
+      </p:sp>
+      <p:sp>
+        <p:nvSpPr>
+          <p:cNvPr id="10" name="Text Placeholder 9"/>
+          <p:cNvSpPr>
+            <a:spLocks noGrp="1"/>
+          </p:cNvSpPr>
+          <p:nvPr>
+            <p:ph type="body" sz="quarter" idx="13"/>
+          </p:nvPr>
+        </p:nvSpPr>
+        <p:spPr>
+          <a:xfrm>
+            <a:off x="1256109" y="2514600"/>
+            <a:ext cx="6629402" cy="285750"/>
+          </a:xfrm>
+        </p:spPr>
+        <p:txBody>
+          <a:bodyPr anchor="ctr"/>
+          <a:lstStyle>
+            <a:lvl1pPr marL="0" indent="0">
+              <a:buFontTx/>
+              <a:buNone/>
+              <a:defRPr/>
+            </a:lvl1pPr>
+            <a:lvl2pPr marL="342900" indent="0">
+              <a:buFontTx/>
+              <a:buNone/>
+              <a:defRPr/>
+            </a:lvl2pPr>
+            <a:lvl3pPr marL="685800" indent="0">
+              <a:buFontTx/>
+              <a:buNone/>
+              <a:defRPr/>
+            </a:lvl3pPr>
+            <a:lvl4pPr marL="1028700" indent="0">
+              <a:buFontTx/>
+              <a:buNone/>
+              <a:defRPr/>
+            </a:lvl4pPr>
+            <a:lvl5pPr marL="1371600" indent="0">
+              <a:buFontTx/>
+              <a:buNone/>
+              <a:defRPr/>
+            </a:lvl5pPr>
+          </a:lstStyle>
+          <a:p>
+            <a:pPr lvl="0"/>
+            <a:r>
+              <a:rPr lang="en-US"/>
+              <a:t>Click to edit Master text styles</a:t>
+            </a:r>
+          </a:p>
+        </p:txBody>
+      </p:sp>
+      <p:sp>
+        <p:nvSpPr>
+          <p:cNvPr id="3" name="Text Placeholder 2"/>
+          <p:cNvSpPr>
+            <a:spLocks noGrp="1"/>
+          </p:cNvSpPr>
+          <p:nvPr>
+            <p:ph type="body" idx="1"/>
+          </p:nvPr>
+        </p:nvSpPr>
+        <p:spPr>
+          <a:xfrm>
+            <a:off x="856058" y="3257550"/>
+            <a:ext cx="7429500" cy="1085850"/>
+          </a:xfrm>
+        </p:spPr>
+        <p:txBody>
+          <a:bodyPr vert="horz" lIns="91440" tIns="45720" rIns="91440" bIns="45720" rtlCol="0" anchor="ctr">
+            <a:normAutofit/>
+          </a:bodyPr>
+          <a:lstStyle>
+            <a:lvl1pPr>
+              <a:buNone/>
+              <a:defRPr lang="en-US" sz="1500">
+                <a:gradFill flip="none" rotWithShape="1">
+                  <a:gsLst>
+                    <a:gs pos="0">
+                      <a:schemeClr val="tx1"/>
+                    </a:gs>
+                    <a:gs pos="100000">
+                      <a:schemeClr val="tx1">
+                        <a:lumMod val="75000"/>
+                      </a:schemeClr>
+                    </a:gs>
+                  </a:gsLst>
+                  <a:lin ang="5400000" scaled="0"/>
+                  <a:tileRect/>
+                </a:gradFill>
+              </a:defRPr>
+            </a:lvl1pPr>
+          </a:lstStyle>
+          <a:p>
+            <a:pPr marL="0" lvl="0" indent="0">
+              <a:buNone/>
+            </a:pPr>
+            <a:r>
+              <a:rPr lang="en-US"/>
+              <a:t>Click to edit Master text styles</a:t>
+            </a:r>
+          </a:p>
+        </p:txBody>
+      </p:sp>
+      <p:sp>
+        <p:nvSpPr>
+          <p:cNvPr id="4" name="Date Placeholder 3"/>
+          <p:cNvSpPr>
+            <a:spLocks noGrp="1"/>
+          </p:cNvSpPr>
+          <p:nvPr>
+            <p:ph type="dt" sz="half" idx="10"/>
+          </p:nvPr>
+        </p:nvSpPr>
+        <p:spPr/>
+        <p:txBody>
+          <a:bodyPr/>
+          <a:lstStyle/>
+          <a:p>
+            <a:fld id="{B61BEF0D-F0BB-DE4B-95CE-6DB70DBA9567}" type="datetimeFigureOut">
+              <a:rPr lang="en-US" dirty="0"/>
+              <a:pPr/>
+              <a:t>10/26/2026</a:t>
+            </a:fld>
+            <a:endParaRPr lang="en-US" dirty="0"/>
+          </a:p>
+        </p:txBody>
+      </p:sp>
+      <p:sp>
+        <p:nvSpPr>
+          <p:cNvPr id="5" name="Footer Placeholder 4"/>
+          <p:cNvSpPr>
+            <a:spLocks noGrp="1"/>
+          </p:cNvSpPr>
+          <p:nvPr>
+            <p:ph type="ftr" sz="quarter" idx="11"/>
+          </p:nvPr>
+        </p:nvSpPr>
+        <p:spPr/>
+        <p:txBody>
+          <a:bodyPr/>
+          <a:lstStyle/>
+          <a:p>
+            <a:endParaRPr lang="en-US" dirty="0"/>
+          </a:p>
+        </p:txBody>
+      </p:sp>
+      <p:sp>
+        <p:nvSpPr>
+          <p:cNvPr id="6" name="Slide Number Placeholder 5"/>
+          <p:cNvSpPr>
+            <a:spLocks noGrp="1"/>
+          </p:cNvSpPr>
+          <p:nvPr>
+            <p:ph type="sldNum" sz="quarter" idx="12"/>
+          </p:nvPr>
+        </p:nvSpPr>
+        <p:spPr/>
+        <p:txBody>
+          <a:bodyPr/>
+          <a:lstStyle/>
+          <a:p>
+            <a:pPr algn="r"/>
+            <a:fld id="{F7021451-1387-4CA6-816F-3879F97B5CBC}" type="slidenum">
+              <a:rPr lang="en-US" b="0" smtClean="0"/>
+              <a:t>‹#›</a:t>
+            </a:fld>
+            <a:endParaRPr lang="en-US"/>
+          </a:p>
+        </p:txBody>
+      </p:sp>
+    </p:spTree>
+    <p:extLst>
+      <p:ext uri="{BB962C8B-B14F-4D97-AF65-F5344CB8AC3E}">
+        <p14:creationId xmlns:p14="http://schemas.microsoft.com/office/powerpoint/2010/main" val="1476964926"/>
+      </p:ext>
+    </p:extLst>
+  </p:cSld>
+  <p:clrMapOvr>
+    <a:masterClrMapping/>
+  </p:clrMapOvr>
+  <p:hf sldNum="0" hdr="0" ftr="0" dt="0"/>
+</p:sldLayout>
+</file>
+
+<file path=ppt/slideLayouts/slideLayout16.xml><?xml version="1.0" encoding="utf-8"?>
+<p:sldLayout xmlns:a="http://schemas.openxmlformats.org/drawingml/2006/main" xmlns:r="http://schemas.openxmlformats.org/officeDocument/2006/relationships" xmlns:p="http://schemas.openxmlformats.org/presentationml/2006/main" preserve="1">
+  <p:cSld name="Name Card">
+    <p:spTree>
+      <p:nvGrpSpPr>
+        <p:cNvPr id="1" name=""/>
+        <p:cNvGrpSpPr/>
+        <p:nvPr/>
+      </p:nvGrpSpPr>
+      <p:grpSpPr>
+        <a:xfrm>
+          <a:off x="0" y="0"/>
+          <a:ext cx="0" cy="0"/>
+          <a:chOff x="0" y="0"/>
+          <a:chExt cx="0" cy="0"/>
+        </a:xfrm>
+      </p:grpSpPr>
+      <p:sp>
+        <p:nvSpPr>
+          <p:cNvPr id="2" name="Title 1"/>
+          <p:cNvSpPr>
+            <a:spLocks noGrp="1"/>
+          </p:cNvSpPr>
+          <p:nvPr>
+            <p:ph type="title"/>
+          </p:nvPr>
+        </p:nvSpPr>
+        <p:spPr>
+          <a:xfrm>
+            <a:off x="856059" y="2481436"/>
+            <a:ext cx="7429500" cy="1101600"/>
+          </a:xfrm>
+        </p:spPr>
+        <p:txBody>
+          <a:bodyPr anchor="b">
+            <a:normAutofit/>
+          </a:bodyPr>
+          <a:lstStyle>
+            <a:lvl1pPr algn="l">
+              <a:defRPr sz="2400" b="0" cap="all"/>
+            </a:lvl1pPr>
+          </a:lstStyle>
+          <a:p>
+            <a:r>
+              <a:rPr lang="en-US"/>
+              <a:t>Click to edit Master title style</a:t>
+            </a:r>
+            <a:endParaRPr lang="en-US" dirty="0"/>
+          </a:p>
+        </p:txBody>
+      </p:sp>
+      <p:sp>
+        <p:nvSpPr>
+          <p:cNvPr id="3" name="Text Placeholder 2"/>
+          <p:cNvSpPr>
+            <a:spLocks noGrp="1"/>
+          </p:cNvSpPr>
+          <p:nvPr>
+            <p:ph type="body" idx="1"/>
+          </p:nvPr>
+        </p:nvSpPr>
+        <p:spPr>
+          <a:xfrm>
+            <a:off x="856058" y="3583036"/>
+            <a:ext cx="7429501" cy="645300"/>
+          </a:xfrm>
+        </p:spPr>
+        <p:txBody>
+          <a:bodyPr vert="horz" lIns="91440" tIns="45720" rIns="91440" bIns="45720" rtlCol="0" anchor="t">
+            <a:normAutofit/>
+          </a:bodyPr>
+          <a:lstStyle>
+            <a:lvl1pPr>
+              <a:defRPr lang="en-US" sz="1500">
+                <a:gradFill flip="none" rotWithShape="1">
+                  <a:gsLst>
+                    <a:gs pos="0">
+                      <a:schemeClr val="tx1"/>
+                    </a:gs>
+                    <a:gs pos="100000">
+                      <a:schemeClr val="tx1">
+                        <a:lumMod val="75000"/>
+                      </a:schemeClr>
+                    </a:gs>
+                  </a:gsLst>
+                  <a:lin ang="5400000" scaled="0"/>
+                  <a:tileRect/>
+                </a:gradFill>
+              </a:defRPr>
+            </a:lvl1pPr>
+          </a:lstStyle>
+          <a:p>
+            <a:pPr marL="0" lvl="0" indent="0">
+              <a:buNone/>
+            </a:pPr>
+            <a:r>
+              <a:rPr lang="en-US"/>
+              <a:t>Click to edit Master text styles</a:t>
+            </a:r>
+          </a:p>
+        </p:txBody>
+      </p:sp>
+      <p:sp>
+        <p:nvSpPr>
+          <p:cNvPr id="4" name="Date Placeholder 3"/>
+          <p:cNvSpPr>
+            <a:spLocks noGrp="1"/>
+          </p:cNvSpPr>
+          <p:nvPr>
+            <p:ph type="dt" sz="half" idx="10"/>
+          </p:nvPr>
+        </p:nvSpPr>
+        <p:spPr/>
+        <p:txBody>
+          <a:bodyPr/>
+          <a:lstStyle/>
+          <a:p>
+            <a:fld id="{B61BEF0D-F0BB-DE4B-95CE-6DB70DBA9567}" type="datetimeFigureOut">
+              <a:rPr lang="en-US" dirty="0"/>
+              <a:pPr/>
+              <a:t>10/26/2026</a:t>
+            </a:fld>
+            <a:endParaRPr lang="en-US" dirty="0"/>
+          </a:p>
+        </p:txBody>
+      </p:sp>
+      <p:sp>
+        <p:nvSpPr>
+          <p:cNvPr id="5" name="Footer Placeholder 4"/>
+          <p:cNvSpPr>
+            <a:spLocks noGrp="1"/>
+          </p:cNvSpPr>
+          <p:nvPr>
+            <p:ph type="ftr" sz="quarter" idx="11"/>
+          </p:nvPr>
+        </p:nvSpPr>
+        <p:spPr/>
+        <p:txBody>
+          <a:bodyPr/>
+          <a:lstStyle/>
+          <a:p>
+            <a:endParaRPr lang="en-US" dirty="0"/>
+          </a:p>
+        </p:txBody>
+      </p:sp>
+      <p:sp>
+        <p:nvSpPr>
+          <p:cNvPr id="6" name="Slide Number Placeholder 5"/>
+          <p:cNvSpPr>
+            <a:spLocks noGrp="1"/>
+          </p:cNvSpPr>
+          <p:nvPr>
+            <p:ph type="sldNum" sz="quarter" idx="12"/>
+          </p:nvPr>
+        </p:nvSpPr>
+        <p:spPr/>
+        <p:txBody>
+          <a:bodyPr/>
+          <a:lstStyle/>
+          <a:p>
+            <a:pPr algn="r"/>
+            <a:fld id="{F7021451-1387-4CA6-816F-3879F97B5CBC}" type="slidenum">
+              <a:rPr lang="en-US" b="0" smtClean="0"/>
+              <a:t>‹#›</a:t>
+            </a:fld>
+            <a:endParaRPr lang="en-US"/>
+          </a:p>
+        </p:txBody>
+      </p:sp>
+    </p:spTree>
+    <p:extLst>
+      <p:ext uri="{BB962C8B-B14F-4D97-AF65-F5344CB8AC3E}">
+        <p14:creationId xmlns:p14="http://schemas.microsoft.com/office/powerpoint/2010/main" val="2389973525"/>
+      </p:ext>
+    </p:extLst>
+  </p:cSld>
+  <p:clrMapOvr>
+    <a:masterClrMapping/>
+  </p:clrMapOvr>
+  <p:hf sldNum="0" hdr="0" ftr="0" dt="0"/>
+</p:sldLayout>
+</file>
+
+<file path=ppt/slideLayouts/slideLayout17.xml><?xml version="1.0" encoding="utf-8"?>
+<p:sldLayout xmlns:a="http://schemas.openxmlformats.org/drawingml/2006/main" xmlns:r="http://schemas.openxmlformats.org/officeDocument/2006/relationships" xmlns:p="http://schemas.openxmlformats.org/presentationml/2006/main" preserve="1">
+  <p:cSld name="Quote Name Card">
+    <p:spTree>
+      <p:nvGrpSpPr>
+        <p:cNvPr id="1" name=""/>
+        <p:cNvGrpSpPr/>
+        <p:nvPr/>
+      </p:nvGrpSpPr>
+      <p:grpSpPr>
+        <a:xfrm>
+          <a:off x="0" y="0"/>
+          <a:ext cx="0" cy="0"/>
+          <a:chOff x="0" y="0"/>
+          <a:chExt cx="0" cy="0"/>
+        </a:xfrm>
+      </p:grpSpPr>
+      <p:sp>
+        <p:nvSpPr>
+          <p:cNvPr id="14" name="TextBox 13"/>
+          <p:cNvSpPr txBox="1"/>
+          <p:nvPr/>
+        </p:nvSpPr>
+        <p:spPr>
+          <a:xfrm>
+            <a:off x="627459" y="590118"/>
+            <a:ext cx="457200" cy="438582"/>
+          </a:xfrm>
+          <a:prstGeom prst="rect">
+            <a:avLst/>
+          </a:prstGeom>
+        </p:spPr>
+        <p:txBody>
+          <a:bodyPr vert="horz" lIns="68580" tIns="34290" rIns="68580" bIns="34290" rtlCol="0" anchor="ctr">
+            <a:noAutofit/>
+          </a:bodyPr>
+          <a:lstStyle>
+            <a:lvl1pPr>
+              <a:spcBef>
+                <a:spcPct val="0"/>
+              </a:spcBef>
+              <a:buNone/>
+              <a:defRPr sz="3200" b="0" cap="all">
+                <a:ln w="3175" cmpd="sng">
+                  <a:noFill/>
+                </a:ln>
+                <a:effectLst>
+                  <a:glow rad="38100">
+                    <a:schemeClr val="bg1">
+                      <a:lumMod val="65000"/>
+                      <a:lumOff val="35000"/>
+                      <a:alpha val="40000"/>
+                    </a:schemeClr>
+                  </a:glow>
+                  <a:outerShdw blurRad="28575" dist="38100" dir="14040000" algn="tl" rotWithShape="0">
+                    <a:srgbClr val="000000">
+                      <a:alpha val="25000"/>
+                    </a:srgbClr>
+                  </a:outerShdw>
+                </a:effectLst>
+              </a:defRPr>
+            </a:lvl1pPr>
+            <a:lvl2pPr>
+              <a:defRPr>
+                <a:solidFill>
+                  <a:schemeClr val="tx2"/>
+                </a:solidFill>
+              </a:defRPr>
+            </a:lvl2pPr>
+            <a:lvl3pPr>
+              <a:defRPr>
+                <a:solidFill>
+                  <a:schemeClr val="tx2"/>
+                </a:solidFill>
+              </a:defRPr>
+            </a:lvl3pPr>
+            <a:lvl4pPr>
+              <a:defRPr>
+                <a:solidFill>
+                  <a:schemeClr val="tx2"/>
+                </a:solidFill>
+              </a:defRPr>
+            </a:lvl4pPr>
+            <a:lvl5pPr>
+              <a:defRPr>
+                <a:solidFill>
+                  <a:schemeClr val="tx2"/>
+                </a:solidFill>
+              </a:defRPr>
+            </a:lvl5pPr>
+            <a:lvl6pPr>
+              <a:defRPr>
+                <a:solidFill>
+                  <a:schemeClr val="tx2"/>
+                </a:solidFill>
+              </a:defRPr>
+            </a:lvl6pPr>
+            <a:lvl7pPr>
+              <a:defRPr>
+                <a:solidFill>
+                  <a:schemeClr val="tx2"/>
+                </a:solidFill>
+              </a:defRPr>
+            </a:lvl7pPr>
+            <a:lvl8pPr>
+              <a:defRPr>
+                <a:solidFill>
+                  <a:schemeClr val="tx2"/>
+                </a:solidFill>
+              </a:defRPr>
+            </a:lvl8pPr>
+            <a:lvl9pPr>
+              <a:defRPr>
+                <a:solidFill>
+                  <a:schemeClr val="tx2"/>
+                </a:solidFill>
+              </a:defRPr>
+            </a:lvl9pPr>
+          </a:lstStyle>
+          <a:p>
+            <a:pPr lvl="0"/>
+            <a:r>
+              <a:rPr lang="en-US" sz="6000" dirty="0">
+                <a:solidFill>
+                  <a:schemeClr val="accent1"/>
+                </a:solidFill>
+              </a:rPr>
+              <a:t>“</a:t>
+            </a:r>
+          </a:p>
+        </p:txBody>
+      </p:sp>
+      <p:sp>
+        <p:nvSpPr>
+          <p:cNvPr id="15" name="TextBox 14"/>
+          <p:cNvSpPr txBox="1"/>
+          <p:nvPr/>
+        </p:nvSpPr>
+        <p:spPr>
+          <a:xfrm>
+            <a:off x="7828359" y="2057400"/>
+            <a:ext cx="457200" cy="438582"/>
+          </a:xfrm>
+          <a:prstGeom prst="rect">
+            <a:avLst/>
+          </a:prstGeom>
+        </p:spPr>
+        <p:txBody>
+          <a:bodyPr vert="horz" lIns="68580" tIns="34290" rIns="68580" bIns="34290" rtlCol="0" anchor="ctr">
+            <a:noAutofit/>
+          </a:bodyPr>
+          <a:lstStyle>
+            <a:lvl1pPr>
+              <a:spcBef>
+                <a:spcPct val="0"/>
+              </a:spcBef>
+              <a:buNone/>
+              <a:defRPr sz="3200" b="0" cap="all">
+                <a:ln w="3175" cmpd="sng">
+                  <a:noFill/>
+                </a:ln>
+                <a:effectLst>
+                  <a:glow rad="38100">
+                    <a:schemeClr val="bg1">
+                      <a:lumMod val="65000"/>
+                      <a:lumOff val="35000"/>
+                      <a:alpha val="40000"/>
+                    </a:schemeClr>
+                  </a:glow>
+                  <a:outerShdw blurRad="28575" dist="38100" dir="14040000" algn="tl" rotWithShape="0">
+                    <a:srgbClr val="000000">
+                      <a:alpha val="25000"/>
+                    </a:srgbClr>
+                  </a:outerShdw>
+                </a:effectLst>
+              </a:defRPr>
+            </a:lvl1pPr>
+            <a:lvl2pPr>
+              <a:defRPr>
+                <a:solidFill>
+                  <a:schemeClr val="tx2"/>
+                </a:solidFill>
+              </a:defRPr>
+            </a:lvl2pPr>
+            <a:lvl3pPr>
+              <a:defRPr>
+                <a:solidFill>
+                  <a:schemeClr val="tx2"/>
+                </a:solidFill>
+              </a:defRPr>
+            </a:lvl3pPr>
+            <a:lvl4pPr>
+              <a:defRPr>
+                <a:solidFill>
+                  <a:schemeClr val="tx2"/>
+                </a:solidFill>
+              </a:defRPr>
+            </a:lvl4pPr>
+            <a:lvl5pPr>
+              <a:defRPr>
+                <a:solidFill>
+                  <a:schemeClr val="tx2"/>
+                </a:solidFill>
+              </a:defRPr>
+            </a:lvl5pPr>
+            <a:lvl6pPr>
+              <a:defRPr>
+                <a:solidFill>
+                  <a:schemeClr val="tx2"/>
+                </a:solidFill>
+              </a:defRPr>
+            </a:lvl6pPr>
+            <a:lvl7pPr>
+              <a:defRPr>
+                <a:solidFill>
+                  <a:schemeClr val="tx2"/>
+                </a:solidFill>
+              </a:defRPr>
+            </a:lvl7pPr>
+            <a:lvl8pPr>
+              <a:defRPr>
+                <a:solidFill>
+                  <a:schemeClr val="tx2"/>
+                </a:solidFill>
+              </a:defRPr>
+            </a:lvl8pPr>
+            <a:lvl9pPr>
+              <a:defRPr>
+                <a:solidFill>
+                  <a:schemeClr val="tx2"/>
+                </a:solidFill>
+              </a:defRPr>
+            </a:lvl9pPr>
+          </a:lstStyle>
+          <a:p>
+            <a:pPr lvl="0" algn="r"/>
+            <a:r>
+              <a:rPr lang="en-US" sz="6000" dirty="0">
+                <a:solidFill>
+                  <a:schemeClr val="accent1"/>
+                </a:solidFill>
+              </a:rPr>
+              <a:t>”</a:t>
+            </a:r>
+          </a:p>
+        </p:txBody>
+      </p:sp>
+      <p:sp>
+        <p:nvSpPr>
+          <p:cNvPr id="2" name="Title 1"/>
+          <p:cNvSpPr>
+            <a:spLocks noGrp="1"/>
+          </p:cNvSpPr>
+          <p:nvPr>
+            <p:ph type="title"/>
+          </p:nvPr>
+        </p:nvSpPr>
+        <p:spPr>
+          <a:xfrm>
+            <a:off x="1084660" y="457201"/>
+            <a:ext cx="6972299" cy="2057399"/>
+          </a:xfrm>
+        </p:spPr>
+        <p:txBody>
+          <a:bodyPr anchor="ctr">
+            <a:normAutofit/>
+          </a:bodyPr>
+          <a:lstStyle>
+            <a:lvl1pPr algn="l">
+              <a:defRPr sz="2400" b="0" cap="all">
+                <a:gradFill flip="none" rotWithShape="1">
+                  <a:gsLst>
+                    <a:gs pos="0">
+                      <a:schemeClr val="tx1"/>
+                    </a:gs>
+                    <a:gs pos="100000">
+                      <a:schemeClr val="tx1">
+                        <a:lumMod val="75000"/>
+                      </a:schemeClr>
+                    </a:gs>
+                  </a:gsLst>
+                  <a:lin ang="5400000" scaled="0"/>
+                  <a:tileRect/>
+                </a:gradFill>
+              </a:defRPr>
+            </a:lvl1pPr>
+          </a:lstStyle>
+          <a:p>
+            <a:r>
+              <a:rPr lang="en-US"/>
+              <a:t>Click to edit Master title style</a:t>
+            </a:r>
+            <a:endParaRPr lang="en-US" dirty="0"/>
+          </a:p>
+        </p:txBody>
+      </p:sp>
+      <p:sp>
+        <p:nvSpPr>
+          <p:cNvPr id="10" name="Text Placeholder 9"/>
+          <p:cNvSpPr>
+            <a:spLocks noGrp="1"/>
+          </p:cNvSpPr>
+          <p:nvPr>
+            <p:ph type="body" sz="quarter" idx="13"/>
+          </p:nvPr>
+        </p:nvSpPr>
+        <p:spPr>
+          <a:xfrm>
+            <a:off x="856059" y="2914650"/>
+            <a:ext cx="7429500" cy="666750"/>
+          </a:xfrm>
+        </p:spPr>
+        <p:txBody>
+          <a:bodyPr vert="horz" lIns="91440" tIns="45720" rIns="91440" bIns="45720" rtlCol="0" anchor="b">
+            <a:normAutofit/>
+          </a:bodyPr>
+          <a:lstStyle>
+            <a:lvl1pPr>
+              <a:buNone/>
+              <a:defRPr lang="en-US" sz="1800" b="0" cap="all" dirty="0">
+                <a:ln w="3175" cmpd="sng">
+                  <a:noFill/>
+                </a:ln>
+                <a:gradFill flip="none" rotWithShape="1">
+                  <a:gsLst>
+                    <a:gs pos="0">
+                      <a:schemeClr val="tx1"/>
+                    </a:gs>
+                    <a:gs pos="100000">
+                      <a:schemeClr val="tx1">
+                        <a:lumMod val="75000"/>
+                      </a:schemeClr>
+                    </a:gs>
+                  </a:gsLst>
+                  <a:lin ang="5400000" scaled="0"/>
+                  <a:tileRect/>
+                </a:gradFill>
+                <a:effectLst>
+                  <a:glow rad="38100">
+                    <a:schemeClr val="bg1">
+                      <a:lumMod val="65000"/>
+                      <a:lumOff val="35000"/>
+                      <a:alpha val="40000"/>
+                    </a:schemeClr>
+                  </a:glow>
+                  <a:outerShdw blurRad="28575" dist="38100" dir="14040000" algn="tl" rotWithShape="0">
+                    <a:srgbClr val="000000">
+                      <a:alpha val="25000"/>
+                    </a:srgbClr>
+                  </a:outerShdw>
+                </a:effectLst>
+              </a:defRPr>
+            </a:lvl1pPr>
+          </a:lstStyle>
+          <a:p>
+            <a:pPr marL="0" lvl="0">
+              <a:spcBef>
+                <a:spcPct val="0"/>
+              </a:spcBef>
+              <a:buNone/>
+            </a:pPr>
+            <a:r>
+              <a:rPr lang="en-US"/>
+              <a:t>Click to edit Master text styles</a:t>
+            </a:r>
+          </a:p>
+        </p:txBody>
+      </p:sp>
+      <p:sp>
+        <p:nvSpPr>
+          <p:cNvPr id="3" name="Text Placeholder 2"/>
+          <p:cNvSpPr>
+            <a:spLocks noGrp="1"/>
+          </p:cNvSpPr>
+          <p:nvPr>
+            <p:ph type="body" idx="1"/>
+          </p:nvPr>
+        </p:nvSpPr>
+        <p:spPr>
+          <a:xfrm>
+            <a:off x="856058" y="3581400"/>
+            <a:ext cx="7429500" cy="762000"/>
+          </a:xfrm>
+        </p:spPr>
+        <p:txBody>
+          <a:bodyPr anchor="t">
+            <a:normAutofit/>
+          </a:bodyPr>
+          <a:lstStyle>
+            <a:lvl1pPr marL="0" indent="0" algn="l">
+              <a:buNone/>
+              <a:defRPr sz="1350">
+                <a:gradFill flip="none" rotWithShape="1">
+                  <a:gsLst>
+                    <a:gs pos="0">
+                      <a:schemeClr val="tx1"/>
+                    </a:gs>
+                    <a:gs pos="100000">
+                      <a:schemeClr val="tx1">
+                        <a:lumMod val="75000"/>
+                      </a:schemeClr>
+                    </a:gs>
+                  </a:gsLst>
+                  <a:lin ang="5400000" scaled="0"/>
+                  <a:tileRect/>
+                </a:gradFill>
+              </a:defRPr>
+            </a:lvl1pPr>
+            <a:lvl2pPr marL="342900" indent="0">
+              <a:buNone/>
+              <a:defRPr sz="1350">
+                <a:solidFill>
+                  <a:schemeClr val="tx1">
+                    <a:tint val="75000"/>
+                  </a:schemeClr>
+                </a:solidFill>
+              </a:defRPr>
+            </a:lvl2pPr>
+            <a:lvl3pPr marL="685800" indent="0">
+              <a:buNone/>
+              <a:defRPr sz="1200">
+                <a:solidFill>
+                  <a:schemeClr val="tx1">
+                    <a:tint val="75000"/>
+                  </a:schemeClr>
+                </a:solidFill>
+              </a:defRPr>
+            </a:lvl3pPr>
+            <a:lvl4pPr marL="1028700" indent="0">
+              <a:buNone/>
+              <a:defRPr sz="1050">
+                <a:solidFill>
+                  <a:schemeClr val="tx1">
+                    <a:tint val="75000"/>
+                  </a:schemeClr>
+                </a:solidFill>
+              </a:defRPr>
+            </a:lvl4pPr>
+            <a:lvl5pPr marL="1371600" indent="0">
+              <a:buNone/>
+              <a:defRPr sz="1050">
+                <a:solidFill>
+                  <a:schemeClr val="tx1">
+                    <a:tint val="75000"/>
+                  </a:schemeClr>
+                </a:solidFill>
+              </a:defRPr>
+            </a:lvl5pPr>
+            <a:lvl6pPr marL="1714500" indent="0">
+              <a:buNone/>
+              <a:defRPr sz="1050">
+                <a:solidFill>
+                  <a:schemeClr val="tx1">
+                    <a:tint val="75000"/>
+                  </a:schemeClr>
+                </a:solidFill>
+              </a:defRPr>
+            </a:lvl6pPr>
+            <a:lvl7pPr marL="2057400" indent="0">
+              <a:buNone/>
+              <a:defRPr sz="1050">
+                <a:solidFill>
+                  <a:schemeClr val="tx1">
+                    <a:tint val="75000"/>
+                  </a:schemeClr>
+                </a:solidFill>
+              </a:defRPr>
+            </a:lvl7pPr>
+            <a:lvl8pPr marL="2400300" indent="0">
+              <a:buNone/>
+              <a:defRPr sz="1050">
+                <a:solidFill>
+                  <a:schemeClr val="tx1">
+                    <a:tint val="75000"/>
+                  </a:schemeClr>
+                </a:solidFill>
+              </a:defRPr>
+            </a:lvl8pPr>
+            <a:lvl9pPr marL="2743200" indent="0">
+              <a:buNone/>
+              <a:defRPr sz="1050">
+                <a:solidFill>
+                  <a:schemeClr val="tx1">
+                    <a:tint val="75000"/>
+                  </a:schemeClr>
+                </a:solidFill>
+              </a:defRPr>
+            </a:lvl9pPr>
+          </a:lstStyle>
+          <a:p>
+            <a:pPr lvl="0"/>
+            <a:r>
+              <a:rPr lang="en-US"/>
+              <a:t>Click to edit Master text styles</a:t>
+            </a:r>
+          </a:p>
+        </p:txBody>
+      </p:sp>
+      <p:sp>
+        <p:nvSpPr>
+          <p:cNvPr id="4" name="Date Placeholder 3"/>
+          <p:cNvSpPr>
+            <a:spLocks noGrp="1"/>
+          </p:cNvSpPr>
+          <p:nvPr>
+            <p:ph type="dt" sz="half" idx="10"/>
+          </p:nvPr>
+        </p:nvSpPr>
+        <p:spPr/>
+        <p:txBody>
+          <a:bodyPr/>
+          <a:lstStyle/>
+          <a:p>
+            <a:fld id="{B61BEF0D-F0BB-DE4B-95CE-6DB70DBA9567}" type="datetimeFigureOut">
+              <a:rPr lang="en-US" dirty="0"/>
+              <a:pPr/>
+              <a:t>10/26/2026</a:t>
+            </a:fld>
+            <a:endParaRPr lang="en-US" dirty="0"/>
+          </a:p>
+        </p:txBody>
+      </p:sp>
+      <p:sp>
+        <p:nvSpPr>
+          <p:cNvPr id="5" name="Footer Placeholder 4"/>
+          <p:cNvSpPr>
+            <a:spLocks noGrp="1"/>
+          </p:cNvSpPr>
+          <p:nvPr>
+            <p:ph type="ftr" sz="quarter" idx="11"/>
+          </p:nvPr>
+        </p:nvSpPr>
+        <p:spPr/>
+        <p:txBody>
+          <a:bodyPr/>
+          <a:lstStyle/>
+          <a:p>
+            <a:endParaRPr lang="en-US" dirty="0"/>
+          </a:p>
+        </p:txBody>
+      </p:sp>
+      <p:sp>
+        <p:nvSpPr>
+          <p:cNvPr id="6" name="Slide Number Placeholder 5"/>
+          <p:cNvSpPr>
+            <a:spLocks noGrp="1"/>
+          </p:cNvSpPr>
+          <p:nvPr>
+            <p:ph type="sldNum" sz="quarter" idx="12"/>
+          </p:nvPr>
+        </p:nvSpPr>
+        <p:spPr/>
+        <p:txBody>
+          <a:bodyPr/>
+          <a:lstStyle/>
+          <a:p>
+            <a:pPr algn="r"/>
+            <a:fld id="{F7021451-1387-4CA6-816F-3879F97B5CBC}" type="slidenum">
+              <a:rPr lang="en-US" b="0" smtClean="0"/>
+              <a:t>‹#›</a:t>
+            </a:fld>
+            <a:endParaRPr lang="en-US"/>
+          </a:p>
+        </p:txBody>
+      </p:sp>
+    </p:spTree>
+    <p:extLst>
+      <p:ext uri="{BB962C8B-B14F-4D97-AF65-F5344CB8AC3E}">
+        <p14:creationId xmlns:p14="http://schemas.microsoft.com/office/powerpoint/2010/main" val="947816654"/>
+      </p:ext>
+    </p:extLst>
+  </p:cSld>
+  <p:clrMapOvr>
+    <a:masterClrMapping/>
+  </p:clrMapOvr>
+  <p:hf sldNum="0" hdr="0" ftr="0" dt="0"/>
+</p:sldLayout>
+</file>
+
+<file path=ppt/slideLayouts/slideLayout18.xml><?xml version="1.0" encoding="utf-8"?>
+<p:sldLayout xmlns:a="http://schemas.openxmlformats.org/drawingml/2006/main" xmlns:r="http://schemas.openxmlformats.org/officeDocument/2006/relationships" xmlns:p="http://schemas.openxmlformats.org/presentationml/2006/main" preserve="1">
+  <p:cSld name="True or False">
+    <p:spTree>
+      <p:nvGrpSpPr>
+        <p:cNvPr id="1" name=""/>
+        <p:cNvGrpSpPr/>
+        <p:nvPr/>
+      </p:nvGrpSpPr>
+      <p:grpSpPr>
+        <a:xfrm>
+          <a:off x="0" y="0"/>
+          <a:ext cx="0" cy="0"/>
+          <a:chOff x="0" y="0"/>
+          <a:chExt cx="0" cy="0"/>
+        </a:xfrm>
+      </p:grpSpPr>
+      <p:sp>
+        <p:nvSpPr>
+          <p:cNvPr id="2" name="Title 1"/>
+          <p:cNvSpPr>
+            <a:spLocks noGrp="1"/>
+          </p:cNvSpPr>
+          <p:nvPr>
+            <p:ph type="title"/>
+          </p:nvPr>
+        </p:nvSpPr>
+        <p:spPr>
+          <a:xfrm>
+            <a:off x="856060" y="457201"/>
+            <a:ext cx="7429499" cy="2057399"/>
+          </a:xfrm>
+        </p:spPr>
+        <p:txBody>
+          <a:bodyPr vert="horz" lIns="91440" tIns="45720" rIns="91440" bIns="45720" rtlCol="0" anchor="ctr">
+            <a:normAutofit/>
+          </a:bodyPr>
+          <a:lstStyle>
+            <a:lvl1pPr>
+              <a:defRPr lang="en-US" b="0" dirty="0"/>
+            </a:lvl1pPr>
+          </a:lstStyle>
+          <a:p>
+            <a:pPr marL="0" lvl="0"/>
+            <a:r>
+              <a:rPr lang="en-US"/>
+              <a:t>Click to edit Master title style</a:t>
+            </a:r>
+            <a:endParaRPr lang="en-US" dirty="0"/>
+          </a:p>
+        </p:txBody>
+      </p:sp>
+      <p:sp>
+        <p:nvSpPr>
+          <p:cNvPr id="10" name="Text Placeholder 9"/>
+          <p:cNvSpPr>
+            <a:spLocks noGrp="1"/>
+          </p:cNvSpPr>
+          <p:nvPr>
+            <p:ph type="body" sz="quarter" idx="13"/>
+          </p:nvPr>
+        </p:nvSpPr>
+        <p:spPr>
+          <a:xfrm>
+            <a:off x="856059" y="2628900"/>
+            <a:ext cx="7429500" cy="628650"/>
+          </a:xfrm>
+        </p:spPr>
+        <p:txBody>
+          <a:bodyPr vert="horz" lIns="91440" tIns="45720" rIns="91440" bIns="45720" rtlCol="0" anchor="b">
+            <a:normAutofit/>
+          </a:bodyPr>
+          <a:lstStyle>
+            <a:lvl1pPr>
+              <a:buNone/>
+              <a:defRPr lang="en-US" sz="2100" b="0" cap="all" dirty="0">
+                <a:ln w="3175" cmpd="sng">
+                  <a:noFill/>
+                </a:ln>
+                <a:gradFill flip="none" rotWithShape="1">
+                  <a:gsLst>
+                    <a:gs pos="0">
+                      <a:schemeClr val="tx1"/>
+                    </a:gs>
+                    <a:gs pos="100000">
+                      <a:schemeClr val="tx1">
+                        <a:lumMod val="75000"/>
+                      </a:schemeClr>
+                    </a:gs>
+                  </a:gsLst>
+                  <a:lin ang="5400000" scaled="0"/>
+                  <a:tileRect/>
+                </a:gradFill>
+                <a:effectLst>
+                  <a:glow rad="38100">
+                    <a:schemeClr val="bg1">
+                      <a:lumMod val="65000"/>
+                      <a:lumOff val="35000"/>
+                      <a:alpha val="40000"/>
+                    </a:schemeClr>
+                  </a:glow>
+                  <a:outerShdw blurRad="28575" dist="38100" dir="14040000" algn="tl" rotWithShape="0">
+                    <a:srgbClr val="000000">
+                      <a:alpha val="25000"/>
+                    </a:srgbClr>
+                  </a:outerShdw>
+                </a:effectLst>
+              </a:defRPr>
+            </a:lvl1pPr>
+          </a:lstStyle>
+          <a:p>
+            <a:pPr marL="0" lvl="0">
+              <a:spcBef>
+                <a:spcPct val="0"/>
+              </a:spcBef>
+              <a:buNone/>
+            </a:pPr>
+            <a:r>
+              <a:rPr lang="en-US"/>
+              <a:t>Click to edit Master text styles</a:t>
+            </a:r>
+          </a:p>
+        </p:txBody>
+      </p:sp>
+      <p:sp>
+        <p:nvSpPr>
+          <p:cNvPr id="3" name="Text Placeholder 2"/>
+          <p:cNvSpPr>
+            <a:spLocks noGrp="1"/>
+          </p:cNvSpPr>
+          <p:nvPr>
+            <p:ph type="body" idx="1"/>
+          </p:nvPr>
+        </p:nvSpPr>
+        <p:spPr>
+          <a:xfrm>
+            <a:off x="856058" y="3257550"/>
+            <a:ext cx="7429500" cy="1085850"/>
+          </a:xfrm>
+        </p:spPr>
+        <p:txBody>
+          <a:bodyPr anchor="t">
+            <a:normAutofit/>
+          </a:bodyPr>
+          <a:lstStyle>
+            <a:lvl1pPr marL="0" indent="0" algn="l">
+              <a:buNone/>
+              <a:defRPr sz="1350">
+                <a:gradFill flip="none" rotWithShape="1">
+                  <a:gsLst>
+                    <a:gs pos="0">
+                      <a:schemeClr val="tx1"/>
+                    </a:gs>
+                    <a:gs pos="100000">
+                      <a:schemeClr val="tx1">
+                        <a:lumMod val="75000"/>
+                      </a:schemeClr>
+                    </a:gs>
+                  </a:gsLst>
+                  <a:lin ang="5400000" scaled="0"/>
+                  <a:tileRect/>
+                </a:gradFill>
+              </a:defRPr>
+            </a:lvl1pPr>
+            <a:lvl2pPr marL="342900" indent="0">
+              <a:buNone/>
+              <a:defRPr sz="1350">
+                <a:solidFill>
+                  <a:schemeClr val="tx1">
+                    <a:tint val="75000"/>
+                  </a:schemeClr>
+                </a:solidFill>
+              </a:defRPr>
+            </a:lvl2pPr>
+            <a:lvl3pPr marL="685800" indent="0">
+              <a:buNone/>
+              <a:defRPr sz="1200">
+                <a:solidFill>
+                  <a:schemeClr val="tx1">
+                    <a:tint val="75000"/>
+                  </a:schemeClr>
+                </a:solidFill>
+              </a:defRPr>
+            </a:lvl3pPr>
+            <a:lvl4pPr marL="1028700" indent="0">
+              <a:buNone/>
+              <a:defRPr sz="1050">
+                <a:solidFill>
+                  <a:schemeClr val="tx1">
+                    <a:tint val="75000"/>
+                  </a:schemeClr>
+                </a:solidFill>
+              </a:defRPr>
+            </a:lvl4pPr>
+            <a:lvl5pPr marL="1371600" indent="0">
+              <a:buNone/>
+              <a:defRPr sz="1050">
+                <a:solidFill>
+                  <a:schemeClr val="tx1">
+                    <a:tint val="75000"/>
+                  </a:schemeClr>
+                </a:solidFill>
+              </a:defRPr>
+            </a:lvl5pPr>
+            <a:lvl6pPr marL="1714500" indent="0">
+              <a:buNone/>
+              <a:defRPr sz="1050">
+                <a:solidFill>
+                  <a:schemeClr val="tx1">
+                    <a:tint val="75000"/>
+                  </a:schemeClr>
+                </a:solidFill>
+              </a:defRPr>
+            </a:lvl6pPr>
+            <a:lvl7pPr marL="2057400" indent="0">
+              <a:buNone/>
+              <a:defRPr sz="1050">
+                <a:solidFill>
+                  <a:schemeClr val="tx1">
+                    <a:tint val="75000"/>
+                  </a:schemeClr>
+                </a:solidFill>
+              </a:defRPr>
+            </a:lvl7pPr>
+            <a:lvl8pPr marL="2400300" indent="0">
+              <a:buNone/>
+              <a:defRPr sz="1050">
+                <a:solidFill>
+                  <a:schemeClr val="tx1">
+                    <a:tint val="75000"/>
+                  </a:schemeClr>
+                </a:solidFill>
+              </a:defRPr>
+            </a:lvl8pPr>
+            <a:lvl9pPr marL="2743200" indent="0">
+              <a:buNone/>
+              <a:defRPr sz="1050">
+                <a:solidFill>
+                  <a:schemeClr val="tx1">
+                    <a:tint val="75000"/>
+                  </a:schemeClr>
+                </a:solidFill>
+              </a:defRPr>
+            </a:lvl9pPr>
+          </a:lstStyle>
+          <a:p>
+            <a:pPr lvl="0"/>
+            <a:r>
+              <a:rPr lang="en-US"/>
+              <a:t>Click to edit Master text styles</a:t>
+            </a:r>
+          </a:p>
+        </p:txBody>
+      </p:sp>
+      <p:sp>
+        <p:nvSpPr>
+          <p:cNvPr id="4" name="Date Placeholder 3"/>
+          <p:cNvSpPr>
+            <a:spLocks noGrp="1"/>
+          </p:cNvSpPr>
+          <p:nvPr>
+            <p:ph type="dt" sz="half" idx="10"/>
+          </p:nvPr>
+        </p:nvSpPr>
+        <p:spPr/>
+        <p:txBody>
+          <a:bodyPr/>
+          <a:lstStyle/>
+          <a:p>
+            <a:fld id="{B61BEF0D-F0BB-DE4B-95CE-6DB70DBA9567}" type="datetimeFigureOut">
+              <a:rPr lang="en-US" dirty="0"/>
+              <a:pPr/>
+              <a:t>10/26/2026</a:t>
+            </a:fld>
+            <a:endParaRPr lang="en-US" dirty="0"/>
+          </a:p>
+        </p:txBody>
+      </p:sp>
+      <p:sp>
+        <p:nvSpPr>
+          <p:cNvPr id="5" name="Footer Placeholder 4"/>
+          <p:cNvSpPr>
+            <a:spLocks noGrp="1"/>
+          </p:cNvSpPr>
+          <p:nvPr>
+            <p:ph type="ftr" sz="quarter" idx="11"/>
+          </p:nvPr>
+        </p:nvSpPr>
+        <p:spPr/>
+        <p:txBody>
+          <a:bodyPr/>
+          <a:lstStyle/>
+          <a:p>
+            <a:endParaRPr lang="en-US" dirty="0"/>
+          </a:p>
+        </p:txBody>
+      </p:sp>
+      <p:sp>
+        <p:nvSpPr>
+          <p:cNvPr id="6" name="Slide Number Placeholder 5"/>
+          <p:cNvSpPr>
+            <a:spLocks noGrp="1"/>
+          </p:cNvSpPr>
+          <p:nvPr>
+            <p:ph type="sldNum" sz="quarter" idx="12"/>
+          </p:nvPr>
+        </p:nvSpPr>
+        <p:spPr/>
+        <p:txBody>
+          <a:bodyPr/>
+          <a:lstStyle/>
+          <a:p>
+            <a:pPr algn="r"/>
+            <a:fld id="{F7021451-1387-4CA6-816F-3879F97B5CBC}" type="slidenum">
+              <a:rPr lang="en-US" b="0" smtClean="0"/>
+              <a:t>‹#›</a:t>
+            </a:fld>
+            <a:endParaRPr lang="en-US"/>
+          </a:p>
+        </p:txBody>
+      </p:sp>
+    </p:spTree>
+    <p:extLst>
+      <p:ext uri="{BB962C8B-B14F-4D97-AF65-F5344CB8AC3E}">
+        <p14:creationId xmlns:p14="http://schemas.microsoft.com/office/powerpoint/2010/main" val="2580680375"/>
+      </p:ext>
+    </p:extLst>
+  </p:cSld>
+  <p:clrMapOvr>
+    <a:masterClrMapping/>
+  </p:clrMapOvr>
+  <p:hf sldNum="0" hdr="0" ftr="0" dt="0"/>
+</p:sldLayout>
+</file>
+
+<file path=ppt/slideLayouts/slideLayout19.xml><?xml version="1.0" encoding="utf-8"?>
+<p:sldLayout xmlns:a="http://schemas.openxmlformats.org/drawingml/2006/main" xmlns:r="http://schemas.openxmlformats.org/officeDocument/2006/relationships" xmlns:p="http://schemas.openxmlformats.org/presentationml/2006/main" type="vertTx" preserve="1">
+  <p:cSld name="Title and Vertical Text">
+    <p:spTree>
+      <p:nvGrpSpPr>
+        <p:cNvPr id="1" name=""/>
+        <p:cNvGrpSpPr/>
+        <p:nvPr/>
+      </p:nvGrpSpPr>
+      <p:grpSpPr>
+        <a:xfrm>
+          <a:off x="0" y="0"/>
+          <a:ext cx="0" cy="0"/>
+          <a:chOff x="0" y="0"/>
+          <a:chExt cx="0" cy="0"/>
+        </a:xfrm>
+      </p:grpSpPr>
+      <p:sp>
+        <p:nvSpPr>
+          <p:cNvPr id="7" name="Title 1"/>
+          <p:cNvSpPr>
+            <a:spLocks noGrp="1"/>
+          </p:cNvSpPr>
+          <p:nvPr>
+            <p:ph type="title"/>
+          </p:nvPr>
+        </p:nvSpPr>
+        <p:spPr>
+          <a:xfrm>
+            <a:off x="856060" y="457200"/>
+            <a:ext cx="7429499" cy="1428750"/>
+          </a:xfrm>
+        </p:spPr>
+        <p:txBody>
+          <a:bodyPr/>
+          <a:lstStyle/>
+          <a:p>
+            <a:r>
+              <a:rPr lang="en-US"/>
+              <a:t>Click to edit Master title style</a:t>
+            </a:r>
+            <a:endParaRPr lang="en-US" dirty="0"/>
+          </a:p>
+        </p:txBody>
+      </p:sp>
+      <p:sp>
+        <p:nvSpPr>
+          <p:cNvPr id="3" name="Vertical Text Placeholder 2"/>
+          <p:cNvSpPr>
+            <a:spLocks noGrp="1"/>
+          </p:cNvSpPr>
+          <p:nvPr>
+            <p:ph type="body" orient="vert" idx="1"/>
+          </p:nvPr>
+        </p:nvSpPr>
+        <p:spPr/>
+        <p:txBody>
+          <a:bodyPr vert="eaVert" anchor="t"/>
+          <a:lstStyle/>
+          <a:p>
+            <a:pPr lvl="0"/>
+            <a:r>
+              <a:rPr lang="en-US"/>
+              <a:t>Click to edit Master text styles</a:t>
+            </a:r>
+          </a:p>
+          <a:p>
+            <a:pPr lvl="1"/>
+            <a:r>
+              <a:rPr lang="en-US"/>
+              <a:t>Second level</a:t>
+            </a:r>
+          </a:p>
+          <a:p>
+            <a:pPr lvl="2"/>
+            <a:r>
+              <a:rPr lang="en-US"/>
+              <a:t>Third level</a:t>
+            </a:r>
+          </a:p>
+          <a:p>
+            <a:pPr lvl="3"/>
+            <a:r>
+              <a:rPr lang="en-US"/>
+              <a:t>Fourth level</a:t>
+            </a:r>
+          </a:p>
+          <a:p>
+            <a:pPr lvl="4"/>
+            <a:r>
+              <a:rPr lang="en-US"/>
+              <a:t>Fifth level</a:t>
+            </a:r>
+            <a:endParaRPr lang="en-US" dirty="0"/>
+          </a:p>
+        </p:txBody>
+      </p:sp>
+      <p:sp>
+        <p:nvSpPr>
+          <p:cNvPr id="4" name="Date Placeholder 3"/>
+          <p:cNvSpPr>
+            <a:spLocks noGrp="1"/>
+          </p:cNvSpPr>
+          <p:nvPr>
+            <p:ph type="dt" sz="half" idx="10"/>
+          </p:nvPr>
+        </p:nvSpPr>
+        <p:spPr/>
+        <p:txBody>
+          <a:bodyPr/>
+          <a:lstStyle/>
+          <a:p>
+            <a:fld id="{B61BEF0D-F0BB-DE4B-95CE-6DB70DBA9567}" type="datetimeFigureOut">
+              <a:rPr lang="en-US" dirty="0"/>
+              <a:pPr/>
+              <a:t>10/26/2026</a:t>
+            </a:fld>
+            <a:endParaRPr lang="en-US" dirty="0"/>
+          </a:p>
+        </p:txBody>
+      </p:sp>
+      <p:sp>
+        <p:nvSpPr>
+          <p:cNvPr id="5" name="Footer Placeholder 4"/>
+          <p:cNvSpPr>
+            <a:spLocks noGrp="1"/>
+          </p:cNvSpPr>
+          <p:nvPr>
+            <p:ph type="ftr" sz="quarter" idx="11"/>
+          </p:nvPr>
+        </p:nvSpPr>
+        <p:spPr/>
+        <p:txBody>
+          <a:bodyPr/>
+          <a:lstStyle/>
+          <a:p>
+            <a:endParaRPr lang="en-US" dirty="0"/>
+          </a:p>
+        </p:txBody>
+      </p:sp>
+      <p:sp>
+        <p:nvSpPr>
+          <p:cNvPr id="6" name="Slide Number Placeholder 5"/>
+          <p:cNvSpPr>
+            <a:spLocks noGrp="1"/>
+          </p:cNvSpPr>
+          <p:nvPr>
+            <p:ph type="sldNum" sz="quarter" idx="12"/>
+          </p:nvPr>
+        </p:nvSpPr>
+        <p:spPr/>
+        <p:txBody>
+          <a:bodyPr/>
+          <a:lstStyle/>
+          <a:p>
+            <a:pPr algn="r"/>
+            <a:fld id="{F7021451-1387-4CA6-816F-3879F97B5CBC}" type="slidenum">
+              <a:rPr lang="en-US" b="0" smtClean="0"/>
+              <a:t>‹#›</a:t>
+            </a:fld>
+            <a:endParaRPr lang="en-US"/>
+          </a:p>
+        </p:txBody>
+      </p:sp>
+    </p:spTree>
+    <p:extLst>
+      <p:ext uri="{BB962C8B-B14F-4D97-AF65-F5344CB8AC3E}">
+        <p14:creationId xmlns:p14="http://schemas.microsoft.com/office/powerpoint/2010/main" val="728818130"/>
+      </p:ext>
+    </p:extLst>
+  </p:cSld>
+  <p:clrMapOvr>
+    <a:masterClrMapping/>
+  </p:clrMapOvr>
+  <p:hf sldNum="0" hdr="0" ftr="0" dt="0"/>
+</p:sldLayout>
+</file>
+
 <file path=ppt/slideLayouts/slideLayout2.xml><?xml version="1.0" encoding="utf-8"?>
 <p:sldLayout xmlns:a="http://schemas.openxmlformats.org/drawingml/2006/main" xmlns:r="http://schemas.openxmlformats.org/officeDocument/2006/relationships" xmlns:p="http://schemas.openxmlformats.org/presentationml/2006/main" preserve="1">
   <p:cSld name="TITLE">
@@ -1017,6 +4114,309 @@
         </p:txBody>
       </p:sp>
     </p:spTree>
+  </p:cSld>
+  <p:clrMapOvr>
+    <a:masterClrMapping/>
+  </p:clrMapOvr>
+</p:sldLayout>
+</file>
+
+<file path=ppt/slideLayouts/slideLayout20.xml><?xml version="1.0" encoding="utf-8"?>
+<p:sldLayout xmlns:a="http://schemas.openxmlformats.org/drawingml/2006/main" xmlns:r="http://schemas.openxmlformats.org/officeDocument/2006/relationships" xmlns:p="http://schemas.openxmlformats.org/presentationml/2006/main" type="vertTitleAndTx" preserve="1">
+  <p:cSld name="Vertical Title and Text">
+    <p:spTree>
+      <p:nvGrpSpPr>
+        <p:cNvPr id="1" name=""/>
+        <p:cNvGrpSpPr/>
+        <p:nvPr/>
+      </p:nvGrpSpPr>
+      <p:grpSpPr>
+        <a:xfrm>
+          <a:off x="0" y="0"/>
+          <a:ext cx="0" cy="0"/>
+          <a:chOff x="0" y="0"/>
+          <a:chExt cx="0" cy="0"/>
+        </a:xfrm>
+      </p:grpSpPr>
+      <p:sp>
+        <p:nvSpPr>
+          <p:cNvPr id="2" name="Vertical Title 1"/>
+          <p:cNvSpPr>
+            <a:spLocks noGrp="1"/>
+          </p:cNvSpPr>
+          <p:nvPr>
+            <p:ph type="title" orient="vert"/>
+          </p:nvPr>
+        </p:nvSpPr>
+        <p:spPr>
+          <a:xfrm>
+            <a:off x="6627673" y="457200"/>
+            <a:ext cx="1657886" cy="3886201"/>
+          </a:xfrm>
+        </p:spPr>
+        <p:txBody>
+          <a:bodyPr vert="eaVert"/>
+          <a:lstStyle/>
+          <a:p>
+            <a:r>
+              <a:rPr lang="en-US"/>
+              <a:t>Click to edit Master title style</a:t>
+            </a:r>
+            <a:endParaRPr lang="en-US" dirty="0"/>
+          </a:p>
+        </p:txBody>
+      </p:sp>
+      <p:sp>
+        <p:nvSpPr>
+          <p:cNvPr id="3" name="Vertical Text Placeholder 2"/>
+          <p:cNvSpPr>
+            <a:spLocks noGrp="1"/>
+          </p:cNvSpPr>
+          <p:nvPr>
+            <p:ph type="body" orient="vert" idx="1"/>
+          </p:nvPr>
+        </p:nvSpPr>
+        <p:spPr>
+          <a:xfrm>
+            <a:off x="856059" y="457200"/>
+            <a:ext cx="5657850" cy="3886200"/>
+          </a:xfrm>
+        </p:spPr>
+        <p:txBody>
+          <a:bodyPr vert="eaVert" anchor="t"/>
+          <a:lstStyle/>
+          <a:p>
+            <a:pPr lvl="0"/>
+            <a:r>
+              <a:rPr lang="en-US"/>
+              <a:t>Click to edit Master text styles</a:t>
+            </a:r>
+          </a:p>
+          <a:p>
+            <a:pPr lvl="1"/>
+            <a:r>
+              <a:rPr lang="en-US"/>
+              <a:t>Second level</a:t>
+            </a:r>
+          </a:p>
+          <a:p>
+            <a:pPr lvl="2"/>
+            <a:r>
+              <a:rPr lang="en-US"/>
+              <a:t>Third level</a:t>
+            </a:r>
+          </a:p>
+          <a:p>
+            <a:pPr lvl="3"/>
+            <a:r>
+              <a:rPr lang="en-US"/>
+              <a:t>Fourth level</a:t>
+            </a:r>
+          </a:p>
+          <a:p>
+            <a:pPr lvl="4"/>
+            <a:r>
+              <a:rPr lang="en-US"/>
+              <a:t>Fifth level</a:t>
+            </a:r>
+            <a:endParaRPr lang="en-US" dirty="0"/>
+          </a:p>
+        </p:txBody>
+      </p:sp>
+      <p:sp>
+        <p:nvSpPr>
+          <p:cNvPr id="4" name="Date Placeholder 3"/>
+          <p:cNvSpPr>
+            <a:spLocks noGrp="1"/>
+          </p:cNvSpPr>
+          <p:nvPr>
+            <p:ph type="dt" sz="half" idx="10"/>
+          </p:nvPr>
+        </p:nvSpPr>
+        <p:spPr/>
+        <p:txBody>
+          <a:bodyPr/>
+          <a:lstStyle/>
+          <a:p>
+            <a:fld id="{B61BEF0D-F0BB-DE4B-95CE-6DB70DBA9567}" type="datetimeFigureOut">
+              <a:rPr lang="en-US" dirty="0"/>
+              <a:pPr/>
+              <a:t>10/26/2026</a:t>
+            </a:fld>
+            <a:endParaRPr lang="en-US" dirty="0"/>
+          </a:p>
+        </p:txBody>
+      </p:sp>
+      <p:sp>
+        <p:nvSpPr>
+          <p:cNvPr id="5" name="Footer Placeholder 4"/>
+          <p:cNvSpPr>
+            <a:spLocks noGrp="1"/>
+          </p:cNvSpPr>
+          <p:nvPr>
+            <p:ph type="ftr" sz="quarter" idx="11"/>
+          </p:nvPr>
+        </p:nvSpPr>
+        <p:spPr/>
+        <p:txBody>
+          <a:bodyPr/>
+          <a:lstStyle/>
+          <a:p>
+            <a:endParaRPr lang="en-US" dirty="0"/>
+          </a:p>
+        </p:txBody>
+      </p:sp>
+      <p:sp>
+        <p:nvSpPr>
+          <p:cNvPr id="6" name="Slide Number Placeholder 5"/>
+          <p:cNvSpPr>
+            <a:spLocks noGrp="1"/>
+          </p:cNvSpPr>
+          <p:nvPr>
+            <p:ph type="sldNum" sz="quarter" idx="12"/>
+          </p:nvPr>
+        </p:nvSpPr>
+        <p:spPr/>
+        <p:txBody>
+          <a:bodyPr/>
+          <a:lstStyle/>
+          <a:p>
+            <a:pPr algn="r"/>
+            <a:fld id="{F7021451-1387-4CA6-816F-3879F97B5CBC}" type="slidenum">
+              <a:rPr lang="en-US" b="0" smtClean="0"/>
+              <a:t>‹#›</a:t>
+            </a:fld>
+            <a:endParaRPr lang="en-US"/>
+          </a:p>
+        </p:txBody>
+      </p:sp>
+    </p:spTree>
+    <p:extLst>
+      <p:ext uri="{BB962C8B-B14F-4D97-AF65-F5344CB8AC3E}">
+        <p14:creationId xmlns:p14="http://schemas.microsoft.com/office/powerpoint/2010/main" val="2489471353"/>
+      </p:ext>
+    </p:extLst>
+  </p:cSld>
+  <p:clrMapOvr>
+    <a:masterClrMapping/>
+  </p:clrMapOvr>
+  <p:hf sldNum="0" hdr="0" ftr="0" dt="0"/>
+</p:sldLayout>
+</file>
+
+<file path=ppt/slideLayouts/slideLayout21.xml><?xml version="1.0" encoding="utf-8"?>
+<p:sldLayout xmlns:a="http://schemas.openxmlformats.org/drawingml/2006/main" xmlns:r="http://schemas.openxmlformats.org/officeDocument/2006/relationships" xmlns:p="http://schemas.openxmlformats.org/presentationml/2006/main">
+  <p:cSld name="TITLE">
+    <p:bg>
+      <p:bgPr>
+        <a:solidFill>
+          <a:schemeClr val="bg1"/>
+        </a:solidFill>
+        <a:effectLst/>
+      </p:bgPr>
+    </p:bg>
+    <p:spTree>
+      <p:nvGrpSpPr>
+        <p:cNvPr id="1" name=""/>
+        <p:cNvGrpSpPr/>
+        <p:nvPr/>
+      </p:nvGrpSpPr>
+      <p:grpSpPr>
+        <a:xfrm>
+          <a:off x="0" y="0"/>
+          <a:ext cx="0" cy="0"/>
+          <a:chOff x="0" y="0"/>
+          <a:chExt cx="0" cy="0"/>
+        </a:xfrm>
+      </p:grpSpPr>
+      <p:sp>
+        <p:nvSpPr>
+          <p:cNvPr id="2" name="Text 0"/>
+          <p:cNvSpPr>
+            <a:spLocks noGrp="1"/>
+          </p:cNvSpPr>
+          <p:nvPr>
+            <p:ph type="title" idx="100" hasCustomPrompt="1"/>
+          </p:nvPr>
+        </p:nvSpPr>
+        <p:spPr>
+          <a:xfrm>
+            <a:off x="548640" y="1097280"/>
+            <a:ext cx="4937760" cy="1463040"/>
+          </a:xfrm>
+          <a:prstGeom prst="rect">
+            <a:avLst/>
+          </a:prstGeom>
+          <a:noFill/>
+          <a:ln/>
+        </p:spPr>
+        <p:txBody>
+          <a:bodyPr wrap="square" rtlCol="0"/>
+          <a:lstStyle>
+            <a:lvl1pPr marL="0" indent="0" algn="l">
+              <a:buNone/>
+              <a:defRPr lang="en-US" sz="3800" b="1" dirty="0">
+                <a:solidFill>
+                  <a:schemeClr val="tx1"/>
+                </a:solidFill>
+              </a:defRPr>
+            </a:lvl1pPr>
+          </a:lstStyle>
+          <a:p>
+            <a:pPr marL="0" indent="0" algn="l">
+              <a:buNone/>
+            </a:pPr>
+            <a:endParaRPr lang="en-US" sz="3800" dirty="0"/>
+          </a:p>
+        </p:txBody>
+      </p:sp>
+      <p:sp>
+        <p:nvSpPr>
+          <p:cNvPr id="3" name="Text 0"/>
+          <p:cNvSpPr>
+            <a:spLocks noGrp="1"/>
+          </p:cNvSpPr>
+          <p:nvPr>
+            <p:ph type="body" idx="101" hasCustomPrompt="1"/>
+          </p:nvPr>
+        </p:nvSpPr>
+        <p:spPr>
+          <a:xfrm>
+            <a:off x="548640" y="2743200"/>
+            <a:ext cx="4937760" cy="1828800"/>
+          </a:xfrm>
+          <a:prstGeom prst="rect">
+            <a:avLst/>
+          </a:prstGeom>
+          <a:noFill/>
+          <a:ln/>
+        </p:spPr>
+        <p:txBody>
+          <a:bodyPr wrap="square" rtlCol="0"/>
+          <a:lstStyle>
+            <a:lvl1pPr marL="0" indent="0" algn="l">
+              <a:buNone/>
+              <a:defRPr lang="en-US" sz="1600" dirty="0">
+                <a:solidFill>
+                  <a:schemeClr val="tx2"/>
+                </a:solidFill>
+              </a:defRPr>
+            </a:lvl1pPr>
+          </a:lstStyle>
+          <a:p>
+            <a:pPr marL="0" indent="0" algn="l">
+              <a:buNone/>
+            </a:pPr>
+            <a:endParaRPr lang="en-US" sz="1600" dirty="0"/>
+          </a:p>
+        </p:txBody>
+      </p:sp>
+    </p:spTree>
+    <p:extLst>
+      <p:ext uri="{BB962C8B-B14F-4D97-AF65-F5344CB8AC3E}">
+        <p14:creationId xmlns:p14="http://schemas.microsoft.com/office/powerpoint/2010/main" val="702291181"/>
+      </p:ext>
+    </p:extLst>
   </p:cSld>
   <p:clrMapOvr>
     <a:masterClrMapping/>
@@ -1176,6 +4576,1565 @@
   <p:clrMapOvr>
     <a:masterClrMapping/>
   </p:clrMapOvr>
+</p:sldLayout>
+</file>
+
+<file path=ppt/slideLayouts/slideLayout4.xml><?xml version="1.0" encoding="utf-8"?>
+<p:sldLayout xmlns:a="http://schemas.openxmlformats.org/drawingml/2006/main" xmlns:r="http://schemas.openxmlformats.org/officeDocument/2006/relationships" xmlns:p="http://schemas.openxmlformats.org/presentationml/2006/main" type="title" preserve="1">
+  <p:cSld name="Title Slide">
+    <p:spTree>
+      <p:nvGrpSpPr>
+        <p:cNvPr id="1" name=""/>
+        <p:cNvGrpSpPr/>
+        <p:nvPr/>
+      </p:nvGrpSpPr>
+      <p:grpSpPr>
+        <a:xfrm>
+          <a:off x="0" y="0"/>
+          <a:ext cx="0" cy="0"/>
+          <a:chOff x="0" y="0"/>
+          <a:chExt cx="0" cy="0"/>
+        </a:xfrm>
+      </p:grpSpPr>
+      <p:sp>
+        <p:nvSpPr>
+          <p:cNvPr id="2" name="Title 1"/>
+          <p:cNvSpPr>
+            <a:spLocks noGrp="1"/>
+          </p:cNvSpPr>
+          <p:nvPr>
+            <p:ph type="ctrTitle"/>
+          </p:nvPr>
+        </p:nvSpPr>
+        <p:spPr>
+          <a:xfrm>
+            <a:off x="1313259" y="457201"/>
+            <a:ext cx="6507167" cy="2400300"/>
+          </a:xfrm>
+        </p:spPr>
+        <p:txBody>
+          <a:bodyPr anchor="b">
+            <a:normAutofit/>
+          </a:bodyPr>
+          <a:lstStyle>
+            <a:lvl1pPr algn="ctr">
+              <a:defRPr sz="3600">
+                <a:effectLst>
+                  <a:glow rad="38100">
+                    <a:schemeClr val="bg1">
+                      <a:lumMod val="65000"/>
+                      <a:lumOff val="35000"/>
+                      <a:alpha val="50000"/>
+                    </a:schemeClr>
+                  </a:glow>
+                  <a:outerShdw blurRad="28575" dist="31750" dir="13200000" algn="tl" rotWithShape="0">
+                    <a:srgbClr val="000000">
+                      <a:alpha val="25000"/>
+                    </a:srgbClr>
+                  </a:outerShdw>
+                </a:effectLst>
+              </a:defRPr>
+            </a:lvl1pPr>
+          </a:lstStyle>
+          <a:p>
+            <a:r>
+              <a:rPr lang="en-US"/>
+              <a:t>Click to edit Master title style</a:t>
+            </a:r>
+            <a:endParaRPr lang="en-US" dirty="0"/>
+          </a:p>
+        </p:txBody>
+      </p:sp>
+      <p:sp>
+        <p:nvSpPr>
+          <p:cNvPr id="3" name="Subtitle 2"/>
+          <p:cNvSpPr>
+            <a:spLocks noGrp="1"/>
+          </p:cNvSpPr>
+          <p:nvPr>
+            <p:ph type="subTitle" idx="1"/>
+          </p:nvPr>
+        </p:nvSpPr>
+        <p:spPr>
+          <a:xfrm>
+            <a:off x="1313259" y="2914650"/>
+            <a:ext cx="6507167" cy="1428750"/>
+          </a:xfrm>
+        </p:spPr>
+        <p:txBody>
+          <a:bodyPr anchor="t">
+            <a:normAutofit/>
+          </a:bodyPr>
+          <a:lstStyle>
+            <a:lvl1pPr marL="0" indent="0" algn="ctr">
+              <a:buNone/>
+              <a:defRPr sz="1575">
+                <a:gradFill flip="none" rotWithShape="1">
+                  <a:gsLst>
+                    <a:gs pos="0">
+                      <a:schemeClr val="tx1"/>
+                    </a:gs>
+                    <a:gs pos="100000">
+                      <a:schemeClr val="tx1">
+                        <a:lumMod val="75000"/>
+                      </a:schemeClr>
+                    </a:gs>
+                  </a:gsLst>
+                  <a:lin ang="5400000" scaled="0"/>
+                  <a:tileRect/>
+                </a:gradFill>
+              </a:defRPr>
+            </a:lvl1pPr>
+            <a:lvl2pPr marL="342900" indent="0" algn="ctr">
+              <a:buNone/>
+              <a:defRPr>
+                <a:solidFill>
+                  <a:schemeClr val="tx1">
+                    <a:tint val="75000"/>
+                  </a:schemeClr>
+                </a:solidFill>
+              </a:defRPr>
+            </a:lvl2pPr>
+            <a:lvl3pPr marL="685800" indent="0" algn="ctr">
+              <a:buNone/>
+              <a:defRPr>
+                <a:solidFill>
+                  <a:schemeClr val="tx1">
+                    <a:tint val="75000"/>
+                  </a:schemeClr>
+                </a:solidFill>
+              </a:defRPr>
+            </a:lvl3pPr>
+            <a:lvl4pPr marL="1028700" indent="0" algn="ctr">
+              <a:buNone/>
+              <a:defRPr>
+                <a:solidFill>
+                  <a:schemeClr val="tx1">
+                    <a:tint val="75000"/>
+                  </a:schemeClr>
+                </a:solidFill>
+              </a:defRPr>
+            </a:lvl4pPr>
+            <a:lvl5pPr marL="1371600" indent="0" algn="ctr">
+              <a:buNone/>
+              <a:defRPr>
+                <a:solidFill>
+                  <a:schemeClr val="tx1">
+                    <a:tint val="75000"/>
+                  </a:schemeClr>
+                </a:solidFill>
+              </a:defRPr>
+            </a:lvl5pPr>
+            <a:lvl6pPr marL="1714500" indent="0" algn="ctr">
+              <a:buNone/>
+              <a:defRPr>
+                <a:solidFill>
+                  <a:schemeClr val="tx1">
+                    <a:tint val="75000"/>
+                  </a:schemeClr>
+                </a:solidFill>
+              </a:defRPr>
+            </a:lvl6pPr>
+            <a:lvl7pPr marL="2057400" indent="0" algn="ctr">
+              <a:buNone/>
+              <a:defRPr>
+                <a:solidFill>
+                  <a:schemeClr val="tx1">
+                    <a:tint val="75000"/>
+                  </a:schemeClr>
+                </a:solidFill>
+              </a:defRPr>
+            </a:lvl7pPr>
+            <a:lvl8pPr marL="2400300" indent="0" algn="ctr">
+              <a:buNone/>
+              <a:defRPr>
+                <a:solidFill>
+                  <a:schemeClr val="tx1">
+                    <a:tint val="75000"/>
+                  </a:schemeClr>
+                </a:solidFill>
+              </a:defRPr>
+            </a:lvl8pPr>
+            <a:lvl9pPr marL="2743200" indent="0" algn="ctr">
+              <a:buNone/>
+              <a:defRPr>
+                <a:solidFill>
+                  <a:schemeClr val="tx1">
+                    <a:tint val="75000"/>
+                  </a:schemeClr>
+                </a:solidFill>
+              </a:defRPr>
+            </a:lvl9pPr>
+          </a:lstStyle>
+          <a:p>
+            <a:r>
+              <a:rPr lang="en-US"/>
+              <a:t>Click to edit Master subtitle style</a:t>
+            </a:r>
+            <a:endParaRPr lang="en-US" dirty="0"/>
+          </a:p>
+        </p:txBody>
+      </p:sp>
+      <p:sp>
+        <p:nvSpPr>
+          <p:cNvPr id="4" name="Date Placeholder 3"/>
+          <p:cNvSpPr>
+            <a:spLocks noGrp="1"/>
+          </p:cNvSpPr>
+          <p:nvPr>
+            <p:ph type="dt" sz="half" idx="10"/>
+          </p:nvPr>
+        </p:nvSpPr>
+        <p:spPr/>
+        <p:txBody>
+          <a:bodyPr/>
+          <a:lstStyle/>
+          <a:p>
+            <a:fld id="{B61BEF0D-F0BB-DE4B-95CE-6DB70DBA9567}" type="datetimeFigureOut">
+              <a:rPr lang="en-US" dirty="0"/>
+              <a:pPr/>
+              <a:t>10/26/2026</a:t>
+            </a:fld>
+            <a:endParaRPr lang="en-US" dirty="0"/>
+          </a:p>
+        </p:txBody>
+      </p:sp>
+      <p:sp>
+        <p:nvSpPr>
+          <p:cNvPr id="5" name="Footer Placeholder 4"/>
+          <p:cNvSpPr>
+            <a:spLocks noGrp="1"/>
+          </p:cNvSpPr>
+          <p:nvPr>
+            <p:ph type="ftr" sz="quarter" idx="11"/>
+          </p:nvPr>
+        </p:nvSpPr>
+        <p:spPr/>
+        <p:txBody>
+          <a:bodyPr/>
+          <a:lstStyle/>
+          <a:p>
+            <a:endParaRPr lang="en-US" dirty="0"/>
+          </a:p>
+        </p:txBody>
+      </p:sp>
+      <p:sp>
+        <p:nvSpPr>
+          <p:cNvPr id="6" name="Slide Number Placeholder 5"/>
+          <p:cNvSpPr>
+            <a:spLocks noGrp="1"/>
+          </p:cNvSpPr>
+          <p:nvPr>
+            <p:ph type="sldNum" sz="quarter" idx="12"/>
+          </p:nvPr>
+        </p:nvSpPr>
+        <p:spPr/>
+        <p:txBody>
+          <a:bodyPr/>
+          <a:lstStyle/>
+          <a:p>
+            <a:pPr algn="r"/>
+            <a:fld id="{F7021451-1387-4CA6-816F-3879F97B5CBC}" type="slidenum">
+              <a:rPr lang="en-US" b="0" smtClean="0"/>
+              <a:t>‹#›</a:t>
+            </a:fld>
+            <a:endParaRPr lang="en-US"/>
+          </a:p>
+        </p:txBody>
+      </p:sp>
+    </p:spTree>
+    <p:extLst>
+      <p:ext uri="{BB962C8B-B14F-4D97-AF65-F5344CB8AC3E}">
+        <p14:creationId xmlns:p14="http://schemas.microsoft.com/office/powerpoint/2010/main" val="733757931"/>
+      </p:ext>
+    </p:extLst>
+  </p:cSld>
+  <p:clrMapOvr>
+    <a:masterClrMapping/>
+  </p:clrMapOvr>
+  <p:hf sldNum="0" hdr="0" ftr="0" dt="0"/>
+</p:sldLayout>
+</file>
+
+<file path=ppt/slideLayouts/slideLayout5.xml><?xml version="1.0" encoding="utf-8"?>
+<p:sldLayout xmlns:a="http://schemas.openxmlformats.org/drawingml/2006/main" xmlns:r="http://schemas.openxmlformats.org/officeDocument/2006/relationships" xmlns:p="http://schemas.openxmlformats.org/presentationml/2006/main" type="obj" preserve="1">
+  <p:cSld name="Title and Content">
+    <p:spTree>
+      <p:nvGrpSpPr>
+        <p:cNvPr id="1" name=""/>
+        <p:cNvGrpSpPr/>
+        <p:nvPr/>
+      </p:nvGrpSpPr>
+      <p:grpSpPr>
+        <a:xfrm>
+          <a:off x="0" y="0"/>
+          <a:ext cx="0" cy="0"/>
+          <a:chOff x="0" y="0"/>
+          <a:chExt cx="0" cy="0"/>
+        </a:xfrm>
+      </p:grpSpPr>
+      <p:sp>
+        <p:nvSpPr>
+          <p:cNvPr id="2" name="Title 1"/>
+          <p:cNvSpPr>
+            <a:spLocks noGrp="1"/>
+          </p:cNvSpPr>
+          <p:nvPr>
+            <p:ph type="title"/>
+          </p:nvPr>
+        </p:nvSpPr>
+        <p:spPr/>
+        <p:txBody>
+          <a:bodyPr/>
+          <a:lstStyle/>
+          <a:p>
+            <a:r>
+              <a:rPr lang="en-US"/>
+              <a:t>Click to edit Master title style</a:t>
+            </a:r>
+            <a:endParaRPr lang="en-US" dirty="0"/>
+          </a:p>
+        </p:txBody>
+      </p:sp>
+      <p:sp>
+        <p:nvSpPr>
+          <p:cNvPr id="3" name="Content Placeholder 2"/>
+          <p:cNvSpPr>
+            <a:spLocks noGrp="1"/>
+          </p:cNvSpPr>
+          <p:nvPr>
+            <p:ph idx="1"/>
+          </p:nvPr>
+        </p:nvSpPr>
+        <p:spPr/>
+        <p:txBody>
+          <a:bodyPr anchor="ctr"/>
+          <a:lstStyle/>
+          <a:p>
+            <a:pPr lvl="0"/>
+            <a:r>
+              <a:rPr lang="en-US"/>
+              <a:t>Click to edit Master text styles</a:t>
+            </a:r>
+          </a:p>
+          <a:p>
+            <a:pPr lvl="1"/>
+            <a:r>
+              <a:rPr lang="en-US"/>
+              <a:t>Second level</a:t>
+            </a:r>
+          </a:p>
+          <a:p>
+            <a:pPr lvl="2"/>
+            <a:r>
+              <a:rPr lang="en-US"/>
+              <a:t>Third level</a:t>
+            </a:r>
+          </a:p>
+          <a:p>
+            <a:pPr lvl="3"/>
+            <a:r>
+              <a:rPr lang="en-US"/>
+              <a:t>Fourth level</a:t>
+            </a:r>
+          </a:p>
+          <a:p>
+            <a:pPr lvl="4"/>
+            <a:r>
+              <a:rPr lang="en-US"/>
+              <a:t>Fifth level</a:t>
+            </a:r>
+            <a:endParaRPr lang="en-US" dirty="0"/>
+          </a:p>
+        </p:txBody>
+      </p:sp>
+      <p:sp>
+        <p:nvSpPr>
+          <p:cNvPr id="4" name="Date Placeholder 3"/>
+          <p:cNvSpPr>
+            <a:spLocks noGrp="1"/>
+          </p:cNvSpPr>
+          <p:nvPr>
+            <p:ph type="dt" sz="half" idx="10"/>
+          </p:nvPr>
+        </p:nvSpPr>
+        <p:spPr/>
+        <p:txBody>
+          <a:bodyPr/>
+          <a:lstStyle/>
+          <a:p>
+            <a:fld id="{B61BEF0D-F0BB-DE4B-95CE-6DB70DBA9567}" type="datetimeFigureOut">
+              <a:rPr lang="en-US" dirty="0"/>
+              <a:pPr/>
+              <a:t>10/26/2026</a:t>
+            </a:fld>
+            <a:endParaRPr lang="en-US" dirty="0"/>
+          </a:p>
+        </p:txBody>
+      </p:sp>
+      <p:sp>
+        <p:nvSpPr>
+          <p:cNvPr id="5" name="Footer Placeholder 4"/>
+          <p:cNvSpPr>
+            <a:spLocks noGrp="1"/>
+          </p:cNvSpPr>
+          <p:nvPr>
+            <p:ph type="ftr" sz="quarter" idx="11"/>
+          </p:nvPr>
+        </p:nvSpPr>
+        <p:spPr/>
+        <p:txBody>
+          <a:bodyPr/>
+          <a:lstStyle/>
+          <a:p>
+            <a:endParaRPr lang="en-US" dirty="0"/>
+          </a:p>
+        </p:txBody>
+      </p:sp>
+      <p:sp>
+        <p:nvSpPr>
+          <p:cNvPr id="6" name="Slide Number Placeholder 5"/>
+          <p:cNvSpPr>
+            <a:spLocks noGrp="1"/>
+          </p:cNvSpPr>
+          <p:nvPr>
+            <p:ph type="sldNum" sz="quarter" idx="12"/>
+          </p:nvPr>
+        </p:nvSpPr>
+        <p:spPr/>
+        <p:txBody>
+          <a:bodyPr/>
+          <a:lstStyle/>
+          <a:p>
+            <a:pPr algn="r"/>
+            <a:fld id="{F7021451-1387-4CA6-816F-3879F97B5CBC}" type="slidenum">
+              <a:rPr lang="en-US" b="0" smtClean="0"/>
+              <a:t>‹#›</a:t>
+            </a:fld>
+            <a:endParaRPr lang="en-US"/>
+          </a:p>
+        </p:txBody>
+      </p:sp>
+    </p:spTree>
+    <p:extLst>
+      <p:ext uri="{BB962C8B-B14F-4D97-AF65-F5344CB8AC3E}">
+        <p14:creationId xmlns:p14="http://schemas.microsoft.com/office/powerpoint/2010/main" val="3178072061"/>
+      </p:ext>
+    </p:extLst>
+  </p:cSld>
+  <p:clrMapOvr>
+    <a:masterClrMapping/>
+  </p:clrMapOvr>
+  <p:hf sldNum="0" hdr="0" ftr="0" dt="0"/>
+</p:sldLayout>
+</file>
+
+<file path=ppt/slideLayouts/slideLayout6.xml><?xml version="1.0" encoding="utf-8"?>
+<p:sldLayout xmlns:a="http://schemas.openxmlformats.org/drawingml/2006/main" xmlns:r="http://schemas.openxmlformats.org/officeDocument/2006/relationships" xmlns:p="http://schemas.openxmlformats.org/presentationml/2006/main" type="secHead" preserve="1">
+  <p:cSld name="Section Header">
+    <p:spTree>
+      <p:nvGrpSpPr>
+        <p:cNvPr id="1" name=""/>
+        <p:cNvGrpSpPr/>
+        <p:nvPr/>
+      </p:nvGrpSpPr>
+      <p:grpSpPr>
+        <a:xfrm>
+          <a:off x="0" y="0"/>
+          <a:ext cx="0" cy="0"/>
+          <a:chOff x="0" y="0"/>
+          <a:chExt cx="0" cy="0"/>
+        </a:xfrm>
+      </p:grpSpPr>
+      <p:sp>
+        <p:nvSpPr>
+          <p:cNvPr id="2" name="Title 1"/>
+          <p:cNvSpPr>
+            <a:spLocks noGrp="1"/>
+          </p:cNvSpPr>
+          <p:nvPr>
+            <p:ph type="title"/>
+          </p:nvPr>
+        </p:nvSpPr>
+        <p:spPr>
+          <a:xfrm>
+            <a:off x="1313260" y="2481436"/>
+            <a:ext cx="6515100" cy="1101600"/>
+          </a:xfrm>
+        </p:spPr>
+        <p:txBody>
+          <a:bodyPr anchor="b"/>
+          <a:lstStyle>
+            <a:lvl1pPr algn="r">
+              <a:defRPr sz="3000" b="0" cap="all"/>
+            </a:lvl1pPr>
+          </a:lstStyle>
+          <a:p>
+            <a:r>
+              <a:rPr lang="en-US"/>
+              <a:t>Click to edit Master title style</a:t>
+            </a:r>
+            <a:endParaRPr lang="en-US" dirty="0"/>
+          </a:p>
+        </p:txBody>
+      </p:sp>
+      <p:sp>
+        <p:nvSpPr>
+          <p:cNvPr id="3" name="Text Placeholder 2"/>
+          <p:cNvSpPr>
+            <a:spLocks noGrp="1"/>
+          </p:cNvSpPr>
+          <p:nvPr>
+            <p:ph type="body" idx="1"/>
+          </p:nvPr>
+        </p:nvSpPr>
+        <p:spPr>
+          <a:xfrm>
+            <a:off x="1313259" y="3583036"/>
+            <a:ext cx="6515101" cy="645300"/>
+          </a:xfrm>
+        </p:spPr>
+        <p:txBody>
+          <a:bodyPr anchor="t">
+            <a:normAutofit/>
+          </a:bodyPr>
+          <a:lstStyle>
+            <a:lvl1pPr marL="0" indent="0" algn="r">
+              <a:buNone/>
+              <a:defRPr sz="1500">
+                <a:gradFill flip="none" rotWithShape="1">
+                  <a:gsLst>
+                    <a:gs pos="0">
+                      <a:schemeClr val="tx1"/>
+                    </a:gs>
+                    <a:gs pos="100000">
+                      <a:schemeClr val="tx1">
+                        <a:lumMod val="75000"/>
+                      </a:schemeClr>
+                    </a:gs>
+                  </a:gsLst>
+                  <a:lin ang="5400000" scaled="0"/>
+                  <a:tileRect/>
+                </a:gradFill>
+              </a:defRPr>
+            </a:lvl1pPr>
+            <a:lvl2pPr marL="342900" indent="0">
+              <a:buNone/>
+              <a:defRPr sz="1350">
+                <a:solidFill>
+                  <a:schemeClr val="tx1">
+                    <a:tint val="75000"/>
+                  </a:schemeClr>
+                </a:solidFill>
+              </a:defRPr>
+            </a:lvl2pPr>
+            <a:lvl3pPr marL="685800" indent="0">
+              <a:buNone/>
+              <a:defRPr sz="1200">
+                <a:solidFill>
+                  <a:schemeClr val="tx1">
+                    <a:tint val="75000"/>
+                  </a:schemeClr>
+                </a:solidFill>
+              </a:defRPr>
+            </a:lvl3pPr>
+            <a:lvl4pPr marL="1028700" indent="0">
+              <a:buNone/>
+              <a:defRPr sz="1050">
+                <a:solidFill>
+                  <a:schemeClr val="tx1">
+                    <a:tint val="75000"/>
+                  </a:schemeClr>
+                </a:solidFill>
+              </a:defRPr>
+            </a:lvl4pPr>
+            <a:lvl5pPr marL="1371600" indent="0">
+              <a:buNone/>
+              <a:defRPr sz="1050">
+                <a:solidFill>
+                  <a:schemeClr val="tx1">
+                    <a:tint val="75000"/>
+                  </a:schemeClr>
+                </a:solidFill>
+              </a:defRPr>
+            </a:lvl5pPr>
+            <a:lvl6pPr marL="1714500" indent="0">
+              <a:buNone/>
+              <a:defRPr sz="1050">
+                <a:solidFill>
+                  <a:schemeClr val="tx1">
+                    <a:tint val="75000"/>
+                  </a:schemeClr>
+                </a:solidFill>
+              </a:defRPr>
+            </a:lvl6pPr>
+            <a:lvl7pPr marL="2057400" indent="0">
+              <a:buNone/>
+              <a:defRPr sz="1050">
+                <a:solidFill>
+                  <a:schemeClr val="tx1">
+                    <a:tint val="75000"/>
+                  </a:schemeClr>
+                </a:solidFill>
+              </a:defRPr>
+            </a:lvl7pPr>
+            <a:lvl8pPr marL="2400300" indent="0">
+              <a:buNone/>
+              <a:defRPr sz="1050">
+                <a:solidFill>
+                  <a:schemeClr val="tx1">
+                    <a:tint val="75000"/>
+                  </a:schemeClr>
+                </a:solidFill>
+              </a:defRPr>
+            </a:lvl8pPr>
+            <a:lvl9pPr marL="2743200" indent="0">
+              <a:buNone/>
+              <a:defRPr sz="1050">
+                <a:solidFill>
+                  <a:schemeClr val="tx1">
+                    <a:tint val="75000"/>
+                  </a:schemeClr>
+                </a:solidFill>
+              </a:defRPr>
+            </a:lvl9pPr>
+          </a:lstStyle>
+          <a:p>
+            <a:pPr lvl="0"/>
+            <a:r>
+              <a:rPr lang="en-US"/>
+              <a:t>Click to edit Master text styles</a:t>
+            </a:r>
+          </a:p>
+        </p:txBody>
+      </p:sp>
+      <p:sp>
+        <p:nvSpPr>
+          <p:cNvPr id="4" name="Date Placeholder 3"/>
+          <p:cNvSpPr>
+            <a:spLocks noGrp="1"/>
+          </p:cNvSpPr>
+          <p:nvPr>
+            <p:ph type="dt" sz="half" idx="10"/>
+          </p:nvPr>
+        </p:nvSpPr>
+        <p:spPr/>
+        <p:txBody>
+          <a:bodyPr/>
+          <a:lstStyle/>
+          <a:p>
+            <a:fld id="{B61BEF0D-F0BB-DE4B-95CE-6DB70DBA9567}" type="datetimeFigureOut">
+              <a:rPr lang="en-US" dirty="0"/>
+              <a:pPr/>
+              <a:t>10/26/2026</a:t>
+            </a:fld>
+            <a:endParaRPr lang="en-US" dirty="0"/>
+          </a:p>
+        </p:txBody>
+      </p:sp>
+      <p:sp>
+        <p:nvSpPr>
+          <p:cNvPr id="5" name="Footer Placeholder 4"/>
+          <p:cNvSpPr>
+            <a:spLocks noGrp="1"/>
+          </p:cNvSpPr>
+          <p:nvPr>
+            <p:ph type="ftr" sz="quarter" idx="11"/>
+          </p:nvPr>
+        </p:nvSpPr>
+        <p:spPr/>
+        <p:txBody>
+          <a:bodyPr/>
+          <a:lstStyle/>
+          <a:p>
+            <a:endParaRPr lang="en-US" dirty="0"/>
+          </a:p>
+        </p:txBody>
+      </p:sp>
+      <p:sp>
+        <p:nvSpPr>
+          <p:cNvPr id="6" name="Slide Number Placeholder 5"/>
+          <p:cNvSpPr>
+            <a:spLocks noGrp="1"/>
+          </p:cNvSpPr>
+          <p:nvPr>
+            <p:ph type="sldNum" sz="quarter" idx="12"/>
+          </p:nvPr>
+        </p:nvSpPr>
+        <p:spPr/>
+        <p:txBody>
+          <a:bodyPr/>
+          <a:lstStyle/>
+          <a:p>
+            <a:pPr algn="r"/>
+            <a:fld id="{F7021451-1387-4CA6-816F-3879F97B5CBC}" type="slidenum">
+              <a:rPr lang="en-US" b="0" smtClean="0"/>
+              <a:t>‹#›</a:t>
+            </a:fld>
+            <a:endParaRPr lang="en-US"/>
+          </a:p>
+        </p:txBody>
+      </p:sp>
+    </p:spTree>
+    <p:extLst>
+      <p:ext uri="{BB962C8B-B14F-4D97-AF65-F5344CB8AC3E}">
+        <p14:creationId xmlns:p14="http://schemas.microsoft.com/office/powerpoint/2010/main" val="769654710"/>
+      </p:ext>
+    </p:extLst>
+  </p:cSld>
+  <p:clrMapOvr>
+    <a:masterClrMapping/>
+  </p:clrMapOvr>
+  <p:hf sldNum="0" hdr="0" ftr="0" dt="0"/>
+</p:sldLayout>
+</file>
+
+<file path=ppt/slideLayouts/slideLayout7.xml><?xml version="1.0" encoding="utf-8"?>
+<p:sldLayout xmlns:a="http://schemas.openxmlformats.org/drawingml/2006/main" xmlns:r="http://schemas.openxmlformats.org/officeDocument/2006/relationships" xmlns:p="http://schemas.openxmlformats.org/presentationml/2006/main" type="twoObj" preserve="1">
+  <p:cSld name="Two Content">
+    <p:spTree>
+      <p:nvGrpSpPr>
+        <p:cNvPr id="1" name=""/>
+        <p:cNvGrpSpPr/>
+        <p:nvPr/>
+      </p:nvGrpSpPr>
+      <p:grpSpPr>
+        <a:xfrm>
+          <a:off x="0" y="0"/>
+          <a:ext cx="0" cy="0"/>
+          <a:chOff x="0" y="0"/>
+          <a:chExt cx="0" cy="0"/>
+        </a:xfrm>
+      </p:grpSpPr>
+      <p:sp>
+        <p:nvSpPr>
+          <p:cNvPr id="2" name="Title 1"/>
+          <p:cNvSpPr>
+            <a:spLocks noGrp="1"/>
+          </p:cNvSpPr>
+          <p:nvPr>
+            <p:ph type="title"/>
+          </p:nvPr>
+        </p:nvSpPr>
+        <p:spPr/>
+        <p:txBody>
+          <a:bodyPr/>
+          <a:lstStyle/>
+          <a:p>
+            <a:r>
+              <a:rPr lang="en-US"/>
+              <a:t>Click to edit Master title style</a:t>
+            </a:r>
+            <a:endParaRPr lang="en-US" dirty="0"/>
+          </a:p>
+        </p:txBody>
+      </p:sp>
+      <p:sp>
+        <p:nvSpPr>
+          <p:cNvPr id="3" name="Content Placeholder 2"/>
+          <p:cNvSpPr>
+            <a:spLocks noGrp="1"/>
+          </p:cNvSpPr>
+          <p:nvPr>
+            <p:ph sz="half" idx="1"/>
+          </p:nvPr>
+        </p:nvSpPr>
+        <p:spPr>
+          <a:xfrm>
+            <a:off x="856059" y="2000250"/>
+            <a:ext cx="3657600" cy="2343151"/>
+          </a:xfrm>
+        </p:spPr>
+        <p:txBody>
+          <a:bodyPr>
+            <a:normAutofit/>
+          </a:bodyPr>
+          <a:lstStyle>
+            <a:lvl1pPr>
+              <a:defRPr sz="1350"/>
+            </a:lvl1pPr>
+            <a:lvl2pPr>
+              <a:defRPr sz="1200"/>
+            </a:lvl2pPr>
+            <a:lvl3pPr>
+              <a:defRPr sz="1050"/>
+            </a:lvl3pPr>
+            <a:lvl4pPr>
+              <a:defRPr sz="900"/>
+            </a:lvl4pPr>
+            <a:lvl5pPr>
+              <a:defRPr sz="900"/>
+            </a:lvl5pPr>
+            <a:lvl6pPr>
+              <a:defRPr sz="900"/>
+            </a:lvl6pPr>
+            <a:lvl7pPr>
+              <a:defRPr sz="900"/>
+            </a:lvl7pPr>
+            <a:lvl8pPr>
+              <a:defRPr sz="900"/>
+            </a:lvl8pPr>
+            <a:lvl9pPr>
+              <a:defRPr sz="900"/>
+            </a:lvl9pPr>
+          </a:lstStyle>
+          <a:p>
+            <a:pPr lvl="0"/>
+            <a:r>
+              <a:rPr lang="en-US"/>
+              <a:t>Click to edit Master text styles</a:t>
+            </a:r>
+          </a:p>
+          <a:p>
+            <a:pPr lvl="1"/>
+            <a:r>
+              <a:rPr lang="en-US"/>
+              <a:t>Second level</a:t>
+            </a:r>
+          </a:p>
+          <a:p>
+            <a:pPr lvl="2"/>
+            <a:r>
+              <a:rPr lang="en-US"/>
+              <a:t>Third level</a:t>
+            </a:r>
+          </a:p>
+          <a:p>
+            <a:pPr lvl="3"/>
+            <a:r>
+              <a:rPr lang="en-US"/>
+              <a:t>Fourth level</a:t>
+            </a:r>
+          </a:p>
+          <a:p>
+            <a:pPr lvl="4"/>
+            <a:r>
+              <a:rPr lang="en-US"/>
+              <a:t>Fifth level</a:t>
+            </a:r>
+            <a:endParaRPr lang="en-US" dirty="0"/>
+          </a:p>
+        </p:txBody>
+      </p:sp>
+      <p:sp>
+        <p:nvSpPr>
+          <p:cNvPr id="4" name="Content Placeholder 3"/>
+          <p:cNvSpPr>
+            <a:spLocks noGrp="1"/>
+          </p:cNvSpPr>
+          <p:nvPr>
+            <p:ph sz="half" idx="2"/>
+          </p:nvPr>
+        </p:nvSpPr>
+        <p:spPr>
+          <a:xfrm>
+            <a:off x="4627959" y="2000250"/>
+            <a:ext cx="3657600" cy="2343150"/>
+          </a:xfrm>
+        </p:spPr>
+        <p:txBody>
+          <a:bodyPr>
+            <a:normAutofit/>
+          </a:bodyPr>
+          <a:lstStyle>
+            <a:lvl1pPr>
+              <a:defRPr sz="1350"/>
+            </a:lvl1pPr>
+            <a:lvl2pPr>
+              <a:defRPr sz="1200"/>
+            </a:lvl2pPr>
+            <a:lvl3pPr>
+              <a:defRPr sz="1050"/>
+            </a:lvl3pPr>
+            <a:lvl4pPr>
+              <a:defRPr sz="900"/>
+            </a:lvl4pPr>
+            <a:lvl5pPr>
+              <a:defRPr sz="900"/>
+            </a:lvl5pPr>
+            <a:lvl6pPr>
+              <a:defRPr sz="900"/>
+            </a:lvl6pPr>
+            <a:lvl7pPr>
+              <a:defRPr sz="900"/>
+            </a:lvl7pPr>
+            <a:lvl8pPr>
+              <a:defRPr sz="900"/>
+            </a:lvl8pPr>
+            <a:lvl9pPr>
+              <a:defRPr sz="900"/>
+            </a:lvl9pPr>
+          </a:lstStyle>
+          <a:p>
+            <a:pPr lvl="0"/>
+            <a:r>
+              <a:rPr lang="en-US"/>
+              <a:t>Click to edit Master text styles</a:t>
+            </a:r>
+          </a:p>
+          <a:p>
+            <a:pPr lvl="1"/>
+            <a:r>
+              <a:rPr lang="en-US"/>
+              <a:t>Second level</a:t>
+            </a:r>
+          </a:p>
+          <a:p>
+            <a:pPr lvl="2"/>
+            <a:r>
+              <a:rPr lang="en-US"/>
+              <a:t>Third level</a:t>
+            </a:r>
+          </a:p>
+          <a:p>
+            <a:pPr lvl="3"/>
+            <a:r>
+              <a:rPr lang="en-US"/>
+              <a:t>Fourth level</a:t>
+            </a:r>
+          </a:p>
+          <a:p>
+            <a:pPr lvl="4"/>
+            <a:r>
+              <a:rPr lang="en-US"/>
+              <a:t>Fifth level</a:t>
+            </a:r>
+            <a:endParaRPr lang="en-US" dirty="0"/>
+          </a:p>
+        </p:txBody>
+      </p:sp>
+      <p:sp>
+        <p:nvSpPr>
+          <p:cNvPr id="5" name="Date Placeholder 4"/>
+          <p:cNvSpPr>
+            <a:spLocks noGrp="1"/>
+          </p:cNvSpPr>
+          <p:nvPr>
+            <p:ph type="dt" sz="half" idx="10"/>
+          </p:nvPr>
+        </p:nvSpPr>
+        <p:spPr/>
+        <p:txBody>
+          <a:bodyPr/>
+          <a:lstStyle/>
+          <a:p>
+            <a:fld id="{B61BEF0D-F0BB-DE4B-95CE-6DB70DBA9567}" type="datetimeFigureOut">
+              <a:rPr lang="en-US" dirty="0"/>
+              <a:pPr/>
+              <a:t>10/26/2026</a:t>
+            </a:fld>
+            <a:endParaRPr lang="en-US" dirty="0"/>
+          </a:p>
+        </p:txBody>
+      </p:sp>
+      <p:sp>
+        <p:nvSpPr>
+          <p:cNvPr id="6" name="Footer Placeholder 5"/>
+          <p:cNvSpPr>
+            <a:spLocks noGrp="1"/>
+          </p:cNvSpPr>
+          <p:nvPr>
+            <p:ph type="ftr" sz="quarter" idx="11"/>
+          </p:nvPr>
+        </p:nvSpPr>
+        <p:spPr/>
+        <p:txBody>
+          <a:bodyPr/>
+          <a:lstStyle/>
+          <a:p>
+            <a:endParaRPr lang="en-US" dirty="0"/>
+          </a:p>
+        </p:txBody>
+      </p:sp>
+      <p:sp>
+        <p:nvSpPr>
+          <p:cNvPr id="7" name="Slide Number Placeholder 6"/>
+          <p:cNvSpPr>
+            <a:spLocks noGrp="1"/>
+          </p:cNvSpPr>
+          <p:nvPr>
+            <p:ph type="sldNum" sz="quarter" idx="12"/>
+          </p:nvPr>
+        </p:nvSpPr>
+        <p:spPr/>
+        <p:txBody>
+          <a:bodyPr/>
+          <a:lstStyle/>
+          <a:p>
+            <a:pPr algn="r"/>
+            <a:fld id="{F7021451-1387-4CA6-816F-3879F97B5CBC}" type="slidenum">
+              <a:rPr lang="en-US" b="0" smtClean="0"/>
+              <a:t>‹#›</a:t>
+            </a:fld>
+            <a:endParaRPr lang="en-US"/>
+          </a:p>
+        </p:txBody>
+      </p:sp>
+    </p:spTree>
+    <p:extLst>
+      <p:ext uri="{BB962C8B-B14F-4D97-AF65-F5344CB8AC3E}">
+        <p14:creationId xmlns:p14="http://schemas.microsoft.com/office/powerpoint/2010/main" val="3499571146"/>
+      </p:ext>
+    </p:extLst>
+  </p:cSld>
+  <p:clrMapOvr>
+    <a:masterClrMapping/>
+  </p:clrMapOvr>
+  <p:hf sldNum="0" hdr="0" ftr="0" dt="0"/>
+</p:sldLayout>
+</file>
+
+<file path=ppt/slideLayouts/slideLayout8.xml><?xml version="1.0" encoding="utf-8"?>
+<p:sldLayout xmlns:a="http://schemas.openxmlformats.org/drawingml/2006/main" xmlns:r="http://schemas.openxmlformats.org/officeDocument/2006/relationships" xmlns:p="http://schemas.openxmlformats.org/presentationml/2006/main" type="twoTxTwoObj" preserve="1">
+  <p:cSld name="Comparison">
+    <p:spTree>
+      <p:nvGrpSpPr>
+        <p:cNvPr id="1" name=""/>
+        <p:cNvGrpSpPr/>
+        <p:nvPr/>
+      </p:nvGrpSpPr>
+      <p:grpSpPr>
+        <a:xfrm>
+          <a:off x="0" y="0"/>
+          <a:ext cx="0" cy="0"/>
+          <a:chOff x="0" y="0"/>
+          <a:chExt cx="0" cy="0"/>
+        </a:xfrm>
+      </p:grpSpPr>
+      <p:sp>
+        <p:nvSpPr>
+          <p:cNvPr id="2" name="Title 1"/>
+          <p:cNvSpPr>
+            <a:spLocks noGrp="1"/>
+          </p:cNvSpPr>
+          <p:nvPr>
+            <p:ph type="title"/>
+          </p:nvPr>
+        </p:nvSpPr>
+        <p:spPr/>
+        <p:txBody>
+          <a:bodyPr/>
+          <a:lstStyle>
+            <a:lvl1pPr>
+              <a:defRPr/>
+            </a:lvl1pPr>
+          </a:lstStyle>
+          <a:p>
+            <a:r>
+              <a:rPr lang="en-US"/>
+              <a:t>Click to edit Master title style</a:t>
+            </a:r>
+            <a:endParaRPr lang="en-US" dirty="0"/>
+          </a:p>
+        </p:txBody>
+      </p:sp>
+      <p:sp>
+        <p:nvSpPr>
+          <p:cNvPr id="3" name="Text Placeholder 2"/>
+          <p:cNvSpPr>
+            <a:spLocks noGrp="1"/>
+          </p:cNvSpPr>
+          <p:nvPr>
+            <p:ph type="body" idx="1"/>
+          </p:nvPr>
+        </p:nvSpPr>
+        <p:spPr>
+          <a:xfrm>
+            <a:off x="1071961" y="1993900"/>
+            <a:ext cx="3441698" cy="432197"/>
+          </a:xfrm>
+        </p:spPr>
+        <p:txBody>
+          <a:bodyPr anchor="b">
+            <a:noAutofit/>
+          </a:bodyPr>
+          <a:lstStyle>
+            <a:lvl1pPr marL="0" indent="0">
+              <a:buNone/>
+              <a:defRPr sz="2100" b="0"/>
+            </a:lvl1pPr>
+            <a:lvl2pPr marL="342900" indent="0">
+              <a:buNone/>
+              <a:defRPr sz="1500" b="1"/>
+            </a:lvl2pPr>
+            <a:lvl3pPr marL="685800" indent="0">
+              <a:buNone/>
+              <a:defRPr sz="1350" b="1"/>
+            </a:lvl3pPr>
+            <a:lvl4pPr marL="1028700" indent="0">
+              <a:buNone/>
+              <a:defRPr sz="1200" b="1"/>
+            </a:lvl4pPr>
+            <a:lvl5pPr marL="1371600" indent="0">
+              <a:buNone/>
+              <a:defRPr sz="1200" b="1"/>
+            </a:lvl5pPr>
+            <a:lvl6pPr marL="1714500" indent="0">
+              <a:buNone/>
+              <a:defRPr sz="1200" b="1"/>
+            </a:lvl6pPr>
+            <a:lvl7pPr marL="2057400" indent="0">
+              <a:buNone/>
+              <a:defRPr sz="1200" b="1"/>
+            </a:lvl7pPr>
+            <a:lvl8pPr marL="2400300" indent="0">
+              <a:buNone/>
+              <a:defRPr sz="1200" b="1"/>
+            </a:lvl8pPr>
+            <a:lvl9pPr marL="2743200" indent="0">
+              <a:buNone/>
+              <a:defRPr sz="1200" b="1"/>
+            </a:lvl9pPr>
+          </a:lstStyle>
+          <a:p>
+            <a:pPr lvl="0"/>
+            <a:r>
+              <a:rPr lang="en-US"/>
+              <a:t>Click to edit Master text styles</a:t>
+            </a:r>
+          </a:p>
+        </p:txBody>
+      </p:sp>
+      <p:sp>
+        <p:nvSpPr>
+          <p:cNvPr id="4" name="Content Placeholder 3"/>
+          <p:cNvSpPr>
+            <a:spLocks noGrp="1"/>
+          </p:cNvSpPr>
+          <p:nvPr>
+            <p:ph sz="half" idx="2"/>
+          </p:nvPr>
+        </p:nvSpPr>
+        <p:spPr>
+          <a:xfrm>
+            <a:off x="856059" y="2432447"/>
+            <a:ext cx="3657600" cy="1910953"/>
+          </a:xfrm>
+        </p:spPr>
+        <p:txBody>
+          <a:bodyPr anchor="t">
+            <a:normAutofit/>
+          </a:bodyPr>
+          <a:lstStyle>
+            <a:lvl1pPr>
+              <a:defRPr sz="1350"/>
+            </a:lvl1pPr>
+            <a:lvl2pPr>
+              <a:defRPr sz="1200"/>
+            </a:lvl2pPr>
+            <a:lvl3pPr>
+              <a:defRPr sz="1050"/>
+            </a:lvl3pPr>
+            <a:lvl4pPr>
+              <a:defRPr sz="900"/>
+            </a:lvl4pPr>
+            <a:lvl5pPr>
+              <a:defRPr sz="900"/>
+            </a:lvl5pPr>
+            <a:lvl6pPr>
+              <a:defRPr sz="900"/>
+            </a:lvl6pPr>
+            <a:lvl7pPr>
+              <a:defRPr sz="900"/>
+            </a:lvl7pPr>
+            <a:lvl8pPr>
+              <a:defRPr sz="900"/>
+            </a:lvl8pPr>
+            <a:lvl9pPr>
+              <a:defRPr sz="900"/>
+            </a:lvl9pPr>
+          </a:lstStyle>
+          <a:p>
+            <a:pPr lvl="0"/>
+            <a:r>
+              <a:rPr lang="en-US"/>
+              <a:t>Click to edit Master text styles</a:t>
+            </a:r>
+          </a:p>
+          <a:p>
+            <a:pPr lvl="1"/>
+            <a:r>
+              <a:rPr lang="en-US"/>
+              <a:t>Second level</a:t>
+            </a:r>
+          </a:p>
+          <a:p>
+            <a:pPr lvl="2"/>
+            <a:r>
+              <a:rPr lang="en-US"/>
+              <a:t>Third level</a:t>
+            </a:r>
+          </a:p>
+          <a:p>
+            <a:pPr lvl="3"/>
+            <a:r>
+              <a:rPr lang="en-US"/>
+              <a:t>Fourth level</a:t>
+            </a:r>
+          </a:p>
+          <a:p>
+            <a:pPr lvl="4"/>
+            <a:r>
+              <a:rPr lang="en-US"/>
+              <a:t>Fifth level</a:t>
+            </a:r>
+            <a:endParaRPr lang="en-US" dirty="0"/>
+          </a:p>
+        </p:txBody>
+      </p:sp>
+      <p:sp>
+        <p:nvSpPr>
+          <p:cNvPr id="5" name="Text Placeholder 4"/>
+          <p:cNvSpPr>
+            <a:spLocks noGrp="1"/>
+          </p:cNvSpPr>
+          <p:nvPr>
+            <p:ph type="body" sz="quarter" idx="3"/>
+          </p:nvPr>
+        </p:nvSpPr>
+        <p:spPr>
+          <a:xfrm>
+            <a:off x="4832350" y="2000250"/>
+            <a:ext cx="3453210" cy="432197"/>
+          </a:xfrm>
+        </p:spPr>
+        <p:txBody>
+          <a:bodyPr anchor="b">
+            <a:noAutofit/>
+          </a:bodyPr>
+          <a:lstStyle>
+            <a:lvl1pPr marL="0" indent="0">
+              <a:buNone/>
+              <a:defRPr sz="2100" b="0"/>
+            </a:lvl1pPr>
+            <a:lvl2pPr marL="342900" indent="0">
+              <a:buNone/>
+              <a:defRPr sz="1500" b="1"/>
+            </a:lvl2pPr>
+            <a:lvl3pPr marL="685800" indent="0">
+              <a:buNone/>
+              <a:defRPr sz="1350" b="1"/>
+            </a:lvl3pPr>
+            <a:lvl4pPr marL="1028700" indent="0">
+              <a:buNone/>
+              <a:defRPr sz="1200" b="1"/>
+            </a:lvl4pPr>
+            <a:lvl5pPr marL="1371600" indent="0">
+              <a:buNone/>
+              <a:defRPr sz="1200" b="1"/>
+            </a:lvl5pPr>
+            <a:lvl6pPr marL="1714500" indent="0">
+              <a:buNone/>
+              <a:defRPr sz="1200" b="1"/>
+            </a:lvl6pPr>
+            <a:lvl7pPr marL="2057400" indent="0">
+              <a:buNone/>
+              <a:defRPr sz="1200" b="1"/>
+            </a:lvl7pPr>
+            <a:lvl8pPr marL="2400300" indent="0">
+              <a:buNone/>
+              <a:defRPr sz="1200" b="1"/>
+            </a:lvl8pPr>
+            <a:lvl9pPr marL="2743200" indent="0">
+              <a:buNone/>
+              <a:defRPr sz="1200" b="1"/>
+            </a:lvl9pPr>
+          </a:lstStyle>
+          <a:p>
+            <a:pPr lvl="0"/>
+            <a:r>
+              <a:rPr lang="en-US"/>
+              <a:t>Click to edit Master text styles</a:t>
+            </a:r>
+          </a:p>
+        </p:txBody>
+      </p:sp>
+      <p:sp>
+        <p:nvSpPr>
+          <p:cNvPr id="6" name="Content Placeholder 5"/>
+          <p:cNvSpPr>
+            <a:spLocks noGrp="1"/>
+          </p:cNvSpPr>
+          <p:nvPr>
+            <p:ph sz="quarter" idx="4"/>
+          </p:nvPr>
+        </p:nvSpPr>
+        <p:spPr>
+          <a:xfrm>
+            <a:off x="4627959" y="2432447"/>
+            <a:ext cx="3657601" cy="1910953"/>
+          </a:xfrm>
+        </p:spPr>
+        <p:txBody>
+          <a:bodyPr anchor="t">
+            <a:normAutofit/>
+          </a:bodyPr>
+          <a:lstStyle>
+            <a:lvl1pPr>
+              <a:defRPr sz="1350"/>
+            </a:lvl1pPr>
+            <a:lvl2pPr>
+              <a:defRPr sz="1200"/>
+            </a:lvl2pPr>
+            <a:lvl3pPr>
+              <a:defRPr sz="1050"/>
+            </a:lvl3pPr>
+            <a:lvl4pPr>
+              <a:defRPr sz="900"/>
+            </a:lvl4pPr>
+            <a:lvl5pPr>
+              <a:defRPr sz="900"/>
+            </a:lvl5pPr>
+            <a:lvl6pPr>
+              <a:defRPr sz="900"/>
+            </a:lvl6pPr>
+            <a:lvl7pPr>
+              <a:defRPr sz="900"/>
+            </a:lvl7pPr>
+            <a:lvl8pPr>
+              <a:defRPr sz="900"/>
+            </a:lvl8pPr>
+            <a:lvl9pPr>
+              <a:defRPr sz="900"/>
+            </a:lvl9pPr>
+          </a:lstStyle>
+          <a:p>
+            <a:pPr lvl="0"/>
+            <a:r>
+              <a:rPr lang="en-US"/>
+              <a:t>Click to edit Master text styles</a:t>
+            </a:r>
+          </a:p>
+          <a:p>
+            <a:pPr lvl="1"/>
+            <a:r>
+              <a:rPr lang="en-US"/>
+              <a:t>Second level</a:t>
+            </a:r>
+          </a:p>
+          <a:p>
+            <a:pPr lvl="2"/>
+            <a:r>
+              <a:rPr lang="en-US"/>
+              <a:t>Third level</a:t>
+            </a:r>
+          </a:p>
+          <a:p>
+            <a:pPr lvl="3"/>
+            <a:r>
+              <a:rPr lang="en-US"/>
+              <a:t>Fourth level</a:t>
+            </a:r>
+          </a:p>
+          <a:p>
+            <a:pPr lvl="4"/>
+            <a:r>
+              <a:rPr lang="en-US"/>
+              <a:t>Fifth level</a:t>
+            </a:r>
+            <a:endParaRPr lang="en-US" dirty="0"/>
+          </a:p>
+        </p:txBody>
+      </p:sp>
+      <p:sp>
+        <p:nvSpPr>
+          <p:cNvPr id="7" name="Date Placeholder 6"/>
+          <p:cNvSpPr>
+            <a:spLocks noGrp="1"/>
+          </p:cNvSpPr>
+          <p:nvPr>
+            <p:ph type="dt" sz="half" idx="10"/>
+          </p:nvPr>
+        </p:nvSpPr>
+        <p:spPr/>
+        <p:txBody>
+          <a:bodyPr/>
+          <a:lstStyle/>
+          <a:p>
+            <a:fld id="{B61BEF0D-F0BB-DE4B-95CE-6DB70DBA9567}" type="datetimeFigureOut">
+              <a:rPr lang="en-US" dirty="0"/>
+              <a:pPr/>
+              <a:t>10/26/2026</a:t>
+            </a:fld>
+            <a:endParaRPr lang="en-US" dirty="0"/>
+          </a:p>
+        </p:txBody>
+      </p:sp>
+      <p:sp>
+        <p:nvSpPr>
+          <p:cNvPr id="8" name="Footer Placeholder 7"/>
+          <p:cNvSpPr>
+            <a:spLocks noGrp="1"/>
+          </p:cNvSpPr>
+          <p:nvPr>
+            <p:ph type="ftr" sz="quarter" idx="11"/>
+          </p:nvPr>
+        </p:nvSpPr>
+        <p:spPr/>
+        <p:txBody>
+          <a:bodyPr/>
+          <a:lstStyle/>
+          <a:p>
+            <a:endParaRPr lang="en-US" dirty="0"/>
+          </a:p>
+        </p:txBody>
+      </p:sp>
+      <p:sp>
+        <p:nvSpPr>
+          <p:cNvPr id="9" name="Slide Number Placeholder 8"/>
+          <p:cNvSpPr>
+            <a:spLocks noGrp="1"/>
+          </p:cNvSpPr>
+          <p:nvPr>
+            <p:ph type="sldNum" sz="quarter" idx="12"/>
+          </p:nvPr>
+        </p:nvSpPr>
+        <p:spPr/>
+        <p:txBody>
+          <a:bodyPr/>
+          <a:lstStyle/>
+          <a:p>
+            <a:pPr algn="r"/>
+            <a:fld id="{F7021451-1387-4CA6-816F-3879F97B5CBC}" type="slidenum">
+              <a:rPr lang="en-US" b="0" smtClean="0"/>
+              <a:t>‹#›</a:t>
+            </a:fld>
+            <a:endParaRPr lang="en-US"/>
+          </a:p>
+        </p:txBody>
+      </p:sp>
+    </p:spTree>
+    <p:extLst>
+      <p:ext uri="{BB962C8B-B14F-4D97-AF65-F5344CB8AC3E}">
+        <p14:creationId xmlns:p14="http://schemas.microsoft.com/office/powerpoint/2010/main" val="25381762"/>
+      </p:ext>
+    </p:extLst>
+  </p:cSld>
+  <p:clrMapOvr>
+    <a:masterClrMapping/>
+  </p:clrMapOvr>
+  <p:hf sldNum="0" hdr="0" ftr="0" dt="0"/>
+</p:sldLayout>
+</file>
+
+<file path=ppt/slideLayouts/slideLayout9.xml><?xml version="1.0" encoding="utf-8"?>
+<p:sldLayout xmlns:a="http://schemas.openxmlformats.org/drawingml/2006/main" xmlns:r="http://schemas.openxmlformats.org/officeDocument/2006/relationships" xmlns:p="http://schemas.openxmlformats.org/presentationml/2006/main" type="titleOnly" preserve="1">
+  <p:cSld name="Title Only">
+    <p:spTree>
+      <p:nvGrpSpPr>
+        <p:cNvPr id="1" name=""/>
+        <p:cNvGrpSpPr/>
+        <p:nvPr/>
+      </p:nvGrpSpPr>
+      <p:grpSpPr>
+        <a:xfrm>
+          <a:off x="0" y="0"/>
+          <a:ext cx="0" cy="0"/>
+          <a:chOff x="0" y="0"/>
+          <a:chExt cx="0" cy="0"/>
+        </a:xfrm>
+      </p:grpSpPr>
+      <p:sp>
+        <p:nvSpPr>
+          <p:cNvPr id="2" name="Title 1"/>
+          <p:cNvSpPr>
+            <a:spLocks noGrp="1"/>
+          </p:cNvSpPr>
+          <p:nvPr>
+            <p:ph type="title"/>
+          </p:nvPr>
+        </p:nvSpPr>
+        <p:spPr/>
+        <p:txBody>
+          <a:bodyPr/>
+          <a:lstStyle/>
+          <a:p>
+            <a:r>
+              <a:rPr lang="en-US"/>
+              <a:t>Click to edit Master title style</a:t>
+            </a:r>
+            <a:endParaRPr lang="en-US" dirty="0"/>
+          </a:p>
+        </p:txBody>
+      </p:sp>
+      <p:sp>
+        <p:nvSpPr>
+          <p:cNvPr id="3" name="Date Placeholder 2"/>
+          <p:cNvSpPr>
+            <a:spLocks noGrp="1"/>
+          </p:cNvSpPr>
+          <p:nvPr>
+            <p:ph type="dt" sz="half" idx="10"/>
+          </p:nvPr>
+        </p:nvSpPr>
+        <p:spPr/>
+        <p:txBody>
+          <a:bodyPr/>
+          <a:lstStyle/>
+          <a:p>
+            <a:fld id="{B61BEF0D-F0BB-DE4B-95CE-6DB70DBA9567}" type="datetimeFigureOut">
+              <a:rPr lang="en-US" dirty="0"/>
+              <a:pPr/>
+              <a:t>10/26/2026</a:t>
+            </a:fld>
+            <a:endParaRPr lang="en-US" dirty="0"/>
+          </a:p>
+        </p:txBody>
+      </p:sp>
+      <p:sp>
+        <p:nvSpPr>
+          <p:cNvPr id="4" name="Footer Placeholder 3"/>
+          <p:cNvSpPr>
+            <a:spLocks noGrp="1"/>
+          </p:cNvSpPr>
+          <p:nvPr>
+            <p:ph type="ftr" sz="quarter" idx="11"/>
+          </p:nvPr>
+        </p:nvSpPr>
+        <p:spPr/>
+        <p:txBody>
+          <a:bodyPr/>
+          <a:lstStyle/>
+          <a:p>
+            <a:endParaRPr lang="en-US" dirty="0"/>
+          </a:p>
+        </p:txBody>
+      </p:sp>
+      <p:sp>
+        <p:nvSpPr>
+          <p:cNvPr id="5" name="Slide Number Placeholder 4"/>
+          <p:cNvSpPr>
+            <a:spLocks noGrp="1"/>
+          </p:cNvSpPr>
+          <p:nvPr>
+            <p:ph type="sldNum" sz="quarter" idx="12"/>
+          </p:nvPr>
+        </p:nvSpPr>
+        <p:spPr/>
+        <p:txBody>
+          <a:bodyPr/>
+          <a:lstStyle/>
+          <a:p>
+            <a:pPr algn="r"/>
+            <a:fld id="{F7021451-1387-4CA6-816F-3879F97B5CBC}" type="slidenum">
+              <a:rPr lang="en-US" b="0" smtClean="0"/>
+              <a:t>‹#›</a:t>
+            </a:fld>
+            <a:endParaRPr lang="en-US"/>
+          </a:p>
+        </p:txBody>
+      </p:sp>
+    </p:spTree>
+    <p:extLst>
+      <p:ext uri="{BB962C8B-B14F-4D97-AF65-F5344CB8AC3E}">
+        <p14:creationId xmlns:p14="http://schemas.microsoft.com/office/powerpoint/2010/main" val="2662647425"/>
+      </p:ext>
+    </p:extLst>
+  </p:cSld>
+  <p:clrMapOvr>
+    <a:masterClrMapping/>
+  </p:clrMapOvr>
+  <p:hf sldNum="0" hdr="0" ftr="0" dt="0"/>
 </p:sldLayout>
 </file>
 
@@ -1508,6 +6467,922 @@
 </p:sldMaster>
 </file>
 
+<file path=ppt/slideMasters/slideMaster2.xml><?xml version="1.0" encoding="utf-8"?>
+<p:sldMaster xmlns:a="http://schemas.openxmlformats.org/drawingml/2006/main" xmlns:r="http://schemas.openxmlformats.org/officeDocument/2006/relationships" xmlns:p="http://schemas.openxmlformats.org/presentationml/2006/main">
+  <p:cSld>
+    <p:bg>
+      <p:bgRef idx="1003">
+        <a:schemeClr val="bg2"/>
+      </p:bgRef>
+    </p:bg>
+    <p:spTree>
+      <p:nvGrpSpPr>
+        <p:cNvPr id="1" name=""/>
+        <p:cNvGrpSpPr/>
+        <p:nvPr/>
+      </p:nvGrpSpPr>
+      <p:grpSpPr>
+        <a:xfrm>
+          <a:off x="0" y="0"/>
+          <a:ext cx="0" cy="0"/>
+          <a:chOff x="0" y="0"/>
+          <a:chExt cx="0" cy="0"/>
+        </a:xfrm>
+      </p:grpSpPr>
+      <p:sp>
+        <p:nvSpPr>
+          <p:cNvPr id="2" name="Title Placeholder 1"/>
+          <p:cNvSpPr>
+            <a:spLocks noGrp="1"/>
+          </p:cNvSpPr>
+          <p:nvPr>
+            <p:ph type="title"/>
+          </p:nvPr>
+        </p:nvSpPr>
+        <p:spPr>
+          <a:xfrm>
+            <a:off x="856060" y="457200"/>
+            <a:ext cx="7429499" cy="1428750"/>
+          </a:xfrm>
+          <a:prstGeom prst="rect">
+            <a:avLst/>
+          </a:prstGeom>
+        </p:spPr>
+        <p:txBody>
+          <a:bodyPr vert="horz" lIns="91440" tIns="45720" rIns="91440" bIns="45720" rtlCol="0" anchor="ctr">
+            <a:normAutofit/>
+          </a:bodyPr>
+          <a:lstStyle/>
+          <a:p>
+            <a:r>
+              <a:rPr lang="en-US"/>
+              <a:t>Click to edit Master title style</a:t>
+            </a:r>
+            <a:endParaRPr lang="en-US" dirty="0"/>
+          </a:p>
+        </p:txBody>
+      </p:sp>
+      <p:sp>
+        <p:nvSpPr>
+          <p:cNvPr id="3" name="Text Placeholder 2"/>
+          <p:cNvSpPr>
+            <a:spLocks noGrp="1"/>
+          </p:cNvSpPr>
+          <p:nvPr>
+            <p:ph type="body" idx="1"/>
+          </p:nvPr>
+        </p:nvSpPr>
+        <p:spPr>
+          <a:xfrm>
+            <a:off x="856060" y="2000250"/>
+            <a:ext cx="7429499" cy="2343151"/>
+          </a:xfrm>
+          <a:prstGeom prst="rect">
+            <a:avLst/>
+          </a:prstGeom>
+        </p:spPr>
+        <p:txBody>
+          <a:bodyPr vert="horz" lIns="91440" tIns="45720" rIns="91440" bIns="45720" rtlCol="0" anchor="ctr">
+            <a:normAutofit/>
+          </a:bodyPr>
+          <a:lstStyle/>
+          <a:p>
+            <a:pPr lvl="0"/>
+            <a:r>
+              <a:rPr lang="en-US"/>
+              <a:t>Click to edit Master text styles</a:t>
+            </a:r>
+          </a:p>
+          <a:p>
+            <a:pPr lvl="1"/>
+            <a:r>
+              <a:rPr lang="en-US"/>
+              <a:t>Second level</a:t>
+            </a:r>
+          </a:p>
+          <a:p>
+            <a:pPr lvl="2"/>
+            <a:r>
+              <a:rPr lang="en-US"/>
+              <a:t>Third level</a:t>
+            </a:r>
+          </a:p>
+          <a:p>
+            <a:pPr lvl="3"/>
+            <a:r>
+              <a:rPr lang="en-US"/>
+              <a:t>Fourth level</a:t>
+            </a:r>
+          </a:p>
+          <a:p>
+            <a:pPr lvl="4"/>
+            <a:r>
+              <a:rPr lang="en-US"/>
+              <a:t>Fifth level</a:t>
+            </a:r>
+            <a:endParaRPr lang="en-US" dirty="0"/>
+          </a:p>
+        </p:txBody>
+      </p:sp>
+      <p:sp>
+        <p:nvSpPr>
+          <p:cNvPr id="4" name="Date Placeholder 3"/>
+          <p:cNvSpPr>
+            <a:spLocks noGrp="1"/>
+          </p:cNvSpPr>
+          <p:nvPr>
+            <p:ph type="dt" sz="half" idx="2"/>
+          </p:nvPr>
+        </p:nvSpPr>
+        <p:spPr>
+          <a:xfrm>
+            <a:off x="6628209" y="4412457"/>
+            <a:ext cx="1200150" cy="273844"/>
+          </a:xfrm>
+          <a:prstGeom prst="rect">
+            <a:avLst/>
+          </a:prstGeom>
+        </p:spPr>
+        <p:txBody>
+          <a:bodyPr vert="horz" lIns="91440" tIns="45720" rIns="91440" bIns="45720" rtlCol="0" anchor="ctr"/>
+          <a:lstStyle>
+            <a:lvl1pPr algn="r">
+              <a:defRPr sz="675" b="1" i="0">
+                <a:solidFill>
+                  <a:schemeClr val="tx1">
+                    <a:lumMod val="75000"/>
+                  </a:schemeClr>
+                </a:solidFill>
+                <a:effectLst>
+                  <a:outerShdw blurRad="50800" dist="38100" dir="2700000" algn="tl" rotWithShape="0">
+                    <a:srgbClr val="000000">
+                      <a:alpha val="43000"/>
+                    </a:srgbClr>
+                  </a:outerShdw>
+                </a:effectLst>
+                <a:latin typeface="+mn-lt"/>
+              </a:defRPr>
+            </a:lvl1pPr>
+          </a:lstStyle>
+          <a:p>
+            <a:fld id="{B61BEF0D-F0BB-DE4B-95CE-6DB70DBA9567}" type="datetimeFigureOut">
+              <a:rPr lang="en-US" dirty="0"/>
+              <a:pPr/>
+              <a:t>10/26/2026</a:t>
+            </a:fld>
+            <a:endParaRPr lang="en-US" dirty="0"/>
+          </a:p>
+        </p:txBody>
+      </p:sp>
+      <p:sp>
+        <p:nvSpPr>
+          <p:cNvPr id="5" name="Footer Placeholder 4"/>
+          <p:cNvSpPr>
+            <a:spLocks noGrp="1"/>
+          </p:cNvSpPr>
+          <p:nvPr>
+            <p:ph type="ftr" sz="quarter" idx="3"/>
+          </p:nvPr>
+        </p:nvSpPr>
+        <p:spPr>
+          <a:xfrm>
+            <a:off x="856059" y="4412457"/>
+            <a:ext cx="5657850" cy="273844"/>
+          </a:xfrm>
+          <a:prstGeom prst="rect">
+            <a:avLst/>
+          </a:prstGeom>
+        </p:spPr>
+        <p:txBody>
+          <a:bodyPr vert="horz" lIns="91440" tIns="45720" rIns="91440" bIns="45720" rtlCol="0" anchor="ctr"/>
+          <a:lstStyle>
+            <a:lvl1pPr algn="l">
+              <a:defRPr sz="675" b="1" i="0">
+                <a:solidFill>
+                  <a:schemeClr val="tx1">
+                    <a:lumMod val="75000"/>
+                  </a:schemeClr>
+                </a:solidFill>
+                <a:effectLst>
+                  <a:outerShdw blurRad="50800" dist="38100" dir="2700000" algn="tl" rotWithShape="0">
+                    <a:srgbClr val="000000">
+                      <a:alpha val="43000"/>
+                    </a:srgbClr>
+                  </a:outerShdw>
+                </a:effectLst>
+                <a:latin typeface="+mn-lt"/>
+              </a:defRPr>
+            </a:lvl1pPr>
+          </a:lstStyle>
+          <a:p>
+            <a:endParaRPr lang="en-US" dirty="0"/>
+          </a:p>
+        </p:txBody>
+      </p:sp>
+      <p:sp>
+        <p:nvSpPr>
+          <p:cNvPr id="6" name="Slide Number Placeholder 5"/>
+          <p:cNvSpPr>
+            <a:spLocks noGrp="1"/>
+          </p:cNvSpPr>
+          <p:nvPr>
+            <p:ph type="sldNum" sz="quarter" idx="4"/>
+          </p:nvPr>
+        </p:nvSpPr>
+        <p:spPr>
+          <a:xfrm>
+            <a:off x="7885510" y="4412457"/>
+            <a:ext cx="413375" cy="273844"/>
+          </a:xfrm>
+          <a:prstGeom prst="rect">
+            <a:avLst/>
+          </a:prstGeom>
+        </p:spPr>
+        <p:txBody>
+          <a:bodyPr vert="horz" lIns="91440" tIns="45720" rIns="91440" bIns="45720" rtlCol="0" anchor="ctr"/>
+          <a:lstStyle>
+            <a:lvl1pPr algn="r">
+              <a:defRPr sz="675" b="1" i="0">
+                <a:solidFill>
+                  <a:schemeClr val="tx1">
+                    <a:lumMod val="75000"/>
+                  </a:schemeClr>
+                </a:solidFill>
+                <a:effectLst>
+                  <a:outerShdw blurRad="50800" dist="38100" dir="2700000" algn="tl" rotWithShape="0">
+                    <a:srgbClr val="000000">
+                      <a:alpha val="43000"/>
+                    </a:srgbClr>
+                  </a:outerShdw>
+                </a:effectLst>
+                <a:latin typeface="+mn-lt"/>
+              </a:defRPr>
+            </a:lvl1pPr>
+          </a:lstStyle>
+          <a:p>
+            <a:pPr algn="r"/>
+            <a:fld id="{F7021451-1387-4CA6-816F-3879F97B5CBC}" type="slidenum">
+              <a:rPr lang="en-US" b="0" smtClean="0"/>
+              <a:t>‹#›</a:t>
+            </a:fld>
+            <a:endParaRPr lang="en-US"/>
+          </a:p>
+        </p:txBody>
+      </p:sp>
+    </p:spTree>
+    <p:extLst>
+      <p:ext uri="{BB962C8B-B14F-4D97-AF65-F5344CB8AC3E}">
+        <p14:creationId xmlns:p14="http://schemas.microsoft.com/office/powerpoint/2010/main" val="4188108114"/>
+      </p:ext>
+    </p:extLst>
+  </p:cSld>
+  <p:clrMap bg1="dk1" tx1="lt1" bg2="dk2" tx2="lt2" accent1="accent1" accent2="accent2" accent3="accent3" accent4="accent4" accent5="accent5" accent6="accent6" hlink="hlink" folHlink="folHlink"/>
+  <p:sldLayoutIdLst>
+    <p:sldLayoutId id="2147483653" r:id="rId1"/>
+    <p:sldLayoutId id="2147483654" r:id="rId2"/>
+    <p:sldLayoutId id="2147483655" r:id="rId3"/>
+    <p:sldLayoutId id="2147483656" r:id="rId4"/>
+    <p:sldLayoutId id="2147483657" r:id="rId5"/>
+    <p:sldLayoutId id="2147483658" r:id="rId6"/>
+    <p:sldLayoutId id="2147483659" r:id="rId7"/>
+    <p:sldLayoutId id="2147483660" r:id="rId8"/>
+    <p:sldLayoutId id="2147483661" r:id="rId9"/>
+    <p:sldLayoutId id="2147483662" r:id="rId10"/>
+    <p:sldLayoutId id="2147483663" r:id="rId11"/>
+    <p:sldLayoutId id="2147483664" r:id="rId12"/>
+    <p:sldLayoutId id="2147483665" r:id="rId13"/>
+    <p:sldLayoutId id="2147483666" r:id="rId14"/>
+    <p:sldLayoutId id="2147483667" r:id="rId15"/>
+    <p:sldLayoutId id="2147483668" r:id="rId16"/>
+    <p:sldLayoutId id="2147483669" r:id="rId17"/>
+    <p:sldLayoutId id="2147483670" r:id="rId18"/>
+  </p:sldLayoutIdLst>
+  <p:hf sldNum="0" hdr="0" ftr="0" dt="0"/>
+  <p:txStyles>
+    <p:titleStyle>
+      <a:lvl1pPr algn="l" defTabSz="342900" rtl="0" eaLnBrk="1" latinLnBrk="0" hangingPunct="1">
+        <a:spcBef>
+          <a:spcPct val="0"/>
+        </a:spcBef>
+        <a:buNone/>
+        <a:defRPr sz="2400" kern="1200" cap="all">
+          <a:ln w="3175" cmpd="sng">
+            <a:noFill/>
+          </a:ln>
+          <a:gradFill flip="none" rotWithShape="1">
+            <a:gsLst>
+              <a:gs pos="0">
+                <a:schemeClr val="tx1"/>
+              </a:gs>
+              <a:gs pos="100000">
+                <a:schemeClr val="tx1">
+                  <a:lumMod val="65000"/>
+                </a:schemeClr>
+              </a:gs>
+            </a:gsLst>
+            <a:lin ang="5580000" scaled="0"/>
+            <a:tileRect/>
+          </a:gradFill>
+          <a:effectLst>
+            <a:glow rad="38100">
+              <a:schemeClr val="bg1">
+                <a:lumMod val="65000"/>
+                <a:lumOff val="35000"/>
+                <a:alpha val="40000"/>
+              </a:schemeClr>
+            </a:glow>
+            <a:outerShdw blurRad="28575" dist="38100" dir="14040000" algn="tl" rotWithShape="0">
+              <a:srgbClr val="000000">
+                <a:alpha val="25000"/>
+              </a:srgbClr>
+            </a:outerShdw>
+          </a:effectLst>
+          <a:latin typeface="+mj-lt"/>
+          <a:ea typeface="+mj-ea"/>
+          <a:cs typeface="+mj-cs"/>
+        </a:defRPr>
+      </a:lvl1pPr>
+      <a:lvl2pPr eaLnBrk="1" hangingPunct="1">
+        <a:defRPr>
+          <a:solidFill>
+            <a:schemeClr val="tx2"/>
+          </a:solidFill>
+        </a:defRPr>
+      </a:lvl2pPr>
+      <a:lvl3pPr eaLnBrk="1" hangingPunct="1">
+        <a:defRPr>
+          <a:solidFill>
+            <a:schemeClr val="tx2"/>
+          </a:solidFill>
+        </a:defRPr>
+      </a:lvl3pPr>
+      <a:lvl4pPr eaLnBrk="1" hangingPunct="1">
+        <a:defRPr>
+          <a:solidFill>
+            <a:schemeClr val="tx2"/>
+          </a:solidFill>
+        </a:defRPr>
+      </a:lvl4pPr>
+      <a:lvl5pPr eaLnBrk="1" hangingPunct="1">
+        <a:defRPr>
+          <a:solidFill>
+            <a:schemeClr val="tx2"/>
+          </a:solidFill>
+        </a:defRPr>
+      </a:lvl5pPr>
+      <a:lvl6pPr eaLnBrk="1" hangingPunct="1">
+        <a:defRPr>
+          <a:solidFill>
+            <a:schemeClr val="tx2"/>
+          </a:solidFill>
+        </a:defRPr>
+      </a:lvl6pPr>
+      <a:lvl7pPr eaLnBrk="1" hangingPunct="1">
+        <a:defRPr>
+          <a:solidFill>
+            <a:schemeClr val="tx2"/>
+          </a:solidFill>
+        </a:defRPr>
+      </a:lvl7pPr>
+      <a:lvl8pPr eaLnBrk="1" hangingPunct="1">
+        <a:defRPr>
+          <a:solidFill>
+            <a:schemeClr val="tx2"/>
+          </a:solidFill>
+        </a:defRPr>
+      </a:lvl8pPr>
+      <a:lvl9pPr eaLnBrk="1" hangingPunct="1">
+        <a:defRPr>
+          <a:solidFill>
+            <a:schemeClr val="tx2"/>
+          </a:solidFill>
+        </a:defRPr>
+      </a:lvl9pPr>
+    </p:titleStyle>
+    <p:bodyStyle>
+      <a:lvl1pPr marL="214313" indent="-214313" algn="l" defTabSz="342900" rtl="0" eaLnBrk="1" latinLnBrk="0" hangingPunct="1">
+        <a:spcBef>
+          <a:spcPct val="20000"/>
+        </a:spcBef>
+        <a:spcAft>
+          <a:spcPts val="450"/>
+        </a:spcAft>
+        <a:buClr>
+          <a:schemeClr val="tx1"/>
+        </a:buClr>
+        <a:buSzPct val="100000"/>
+        <a:buFont typeface="Arial"/>
+        <a:buChar char="•"/>
+        <a:defRPr sz="1500" kern="1200" cap="small">
+          <a:gradFill flip="none" rotWithShape="1">
+            <a:gsLst>
+              <a:gs pos="0">
+                <a:schemeClr val="tx1"/>
+              </a:gs>
+              <a:gs pos="100000">
+                <a:schemeClr val="tx1">
+                  <a:lumMod val="75000"/>
+                </a:schemeClr>
+              </a:gs>
+            </a:gsLst>
+            <a:lin ang="5580000" scaled="0"/>
+            <a:tileRect/>
+          </a:gradFill>
+          <a:effectLst>
+            <a:glow rad="38100">
+              <a:schemeClr val="bg1">
+                <a:lumMod val="50000"/>
+                <a:lumOff val="50000"/>
+                <a:alpha val="20000"/>
+              </a:schemeClr>
+            </a:glow>
+            <a:outerShdw blurRad="44450" dist="12700" dir="13860000" algn="tl" rotWithShape="0">
+              <a:srgbClr val="000000">
+                <a:alpha val="20000"/>
+              </a:srgbClr>
+            </a:outerShdw>
+          </a:effectLst>
+          <a:latin typeface="+mn-lt"/>
+          <a:ea typeface="+mn-ea"/>
+          <a:cs typeface="+mn-cs"/>
+        </a:defRPr>
+      </a:lvl1pPr>
+      <a:lvl2pPr marL="557213" indent="-214313" algn="l" defTabSz="342900" rtl="0" eaLnBrk="1" latinLnBrk="0" hangingPunct="1">
+        <a:spcBef>
+          <a:spcPct val="20000"/>
+        </a:spcBef>
+        <a:spcAft>
+          <a:spcPts val="450"/>
+        </a:spcAft>
+        <a:buClr>
+          <a:schemeClr val="tx1"/>
+        </a:buClr>
+        <a:buSzPct val="100000"/>
+        <a:buFont typeface="Arial"/>
+        <a:buChar char="•"/>
+        <a:defRPr sz="1350" kern="1200" cap="small">
+          <a:gradFill flip="none" rotWithShape="1">
+            <a:gsLst>
+              <a:gs pos="0">
+                <a:schemeClr val="tx1"/>
+              </a:gs>
+              <a:gs pos="100000">
+                <a:schemeClr val="tx1">
+                  <a:lumMod val="75000"/>
+                </a:schemeClr>
+              </a:gs>
+            </a:gsLst>
+            <a:lin ang="5580000" scaled="0"/>
+            <a:tileRect/>
+          </a:gradFill>
+          <a:effectLst>
+            <a:glow rad="38100">
+              <a:schemeClr val="bg1">
+                <a:lumMod val="50000"/>
+                <a:lumOff val="50000"/>
+                <a:alpha val="20000"/>
+              </a:schemeClr>
+            </a:glow>
+            <a:outerShdw blurRad="44450" dist="12700" dir="13860000" algn="tl" rotWithShape="0">
+              <a:srgbClr val="000000">
+                <a:alpha val="20000"/>
+              </a:srgbClr>
+            </a:outerShdw>
+          </a:effectLst>
+          <a:latin typeface="+mn-lt"/>
+          <a:ea typeface="+mn-ea"/>
+          <a:cs typeface="+mn-cs"/>
+        </a:defRPr>
+      </a:lvl2pPr>
+      <a:lvl3pPr marL="900113" indent="-214313" algn="l" defTabSz="342900" rtl="0" eaLnBrk="1" latinLnBrk="0" hangingPunct="1">
+        <a:spcBef>
+          <a:spcPct val="20000"/>
+        </a:spcBef>
+        <a:spcAft>
+          <a:spcPts val="450"/>
+        </a:spcAft>
+        <a:buClr>
+          <a:schemeClr val="tx1"/>
+        </a:buClr>
+        <a:buSzPct val="100000"/>
+        <a:buFont typeface="Arial"/>
+        <a:buChar char="•"/>
+        <a:defRPr sz="1200" kern="1200" cap="small">
+          <a:gradFill flip="none" rotWithShape="1">
+            <a:gsLst>
+              <a:gs pos="0">
+                <a:schemeClr val="tx1"/>
+              </a:gs>
+              <a:gs pos="100000">
+                <a:schemeClr val="tx1">
+                  <a:lumMod val="75000"/>
+                </a:schemeClr>
+              </a:gs>
+            </a:gsLst>
+            <a:lin ang="5580000" scaled="0"/>
+            <a:tileRect/>
+          </a:gradFill>
+          <a:effectLst>
+            <a:glow rad="38100">
+              <a:schemeClr val="bg1">
+                <a:lumMod val="50000"/>
+                <a:lumOff val="50000"/>
+                <a:alpha val="20000"/>
+              </a:schemeClr>
+            </a:glow>
+            <a:outerShdw blurRad="44450" dist="12700" dir="13860000" algn="tl" rotWithShape="0">
+              <a:srgbClr val="000000">
+                <a:alpha val="20000"/>
+              </a:srgbClr>
+            </a:outerShdw>
+          </a:effectLst>
+          <a:latin typeface="+mn-lt"/>
+          <a:ea typeface="+mn-ea"/>
+          <a:cs typeface="+mn-cs"/>
+        </a:defRPr>
+      </a:lvl3pPr>
+      <a:lvl4pPr marL="1157288" indent="-128588" algn="l" defTabSz="342900" rtl="0" eaLnBrk="1" latinLnBrk="0" hangingPunct="1">
+        <a:spcBef>
+          <a:spcPct val="20000"/>
+        </a:spcBef>
+        <a:spcAft>
+          <a:spcPts val="450"/>
+        </a:spcAft>
+        <a:buClr>
+          <a:schemeClr val="tx1"/>
+        </a:buClr>
+        <a:buSzPct val="100000"/>
+        <a:buFont typeface="Arial"/>
+        <a:buChar char="•"/>
+        <a:defRPr sz="1050" kern="1200" cap="small">
+          <a:gradFill flip="none" rotWithShape="1">
+            <a:gsLst>
+              <a:gs pos="0">
+                <a:schemeClr val="tx1"/>
+              </a:gs>
+              <a:gs pos="100000">
+                <a:schemeClr val="tx1">
+                  <a:lumMod val="75000"/>
+                </a:schemeClr>
+              </a:gs>
+            </a:gsLst>
+            <a:lin ang="5580000" scaled="0"/>
+            <a:tileRect/>
+          </a:gradFill>
+          <a:effectLst>
+            <a:glow rad="38100">
+              <a:schemeClr val="bg1">
+                <a:lumMod val="50000"/>
+                <a:lumOff val="50000"/>
+                <a:alpha val="20000"/>
+              </a:schemeClr>
+            </a:glow>
+            <a:outerShdw blurRad="44450" dist="12700" dir="13860000" algn="tl" rotWithShape="0">
+              <a:srgbClr val="000000">
+                <a:alpha val="20000"/>
+              </a:srgbClr>
+            </a:outerShdw>
+          </a:effectLst>
+          <a:latin typeface="+mn-lt"/>
+          <a:ea typeface="+mn-ea"/>
+          <a:cs typeface="+mn-cs"/>
+        </a:defRPr>
+      </a:lvl4pPr>
+      <a:lvl5pPr marL="1500188" indent="-128588" algn="l" defTabSz="342900" rtl="0" eaLnBrk="1" latinLnBrk="0" hangingPunct="1">
+        <a:spcBef>
+          <a:spcPct val="20000"/>
+        </a:spcBef>
+        <a:spcAft>
+          <a:spcPts val="450"/>
+        </a:spcAft>
+        <a:buClr>
+          <a:schemeClr val="tx1"/>
+        </a:buClr>
+        <a:buSzPct val="100000"/>
+        <a:buFont typeface="Arial"/>
+        <a:buChar char="•"/>
+        <a:defRPr sz="1050" kern="1200" cap="small">
+          <a:gradFill flip="none" rotWithShape="1">
+            <a:gsLst>
+              <a:gs pos="0">
+                <a:schemeClr val="tx1"/>
+              </a:gs>
+              <a:gs pos="100000">
+                <a:schemeClr val="tx1">
+                  <a:lumMod val="75000"/>
+                </a:schemeClr>
+              </a:gs>
+            </a:gsLst>
+            <a:lin ang="5580000" scaled="0"/>
+            <a:tileRect/>
+          </a:gradFill>
+          <a:effectLst>
+            <a:glow rad="38100">
+              <a:schemeClr val="bg1">
+                <a:lumMod val="50000"/>
+                <a:lumOff val="50000"/>
+                <a:alpha val="20000"/>
+              </a:schemeClr>
+            </a:glow>
+            <a:outerShdw blurRad="44450" dist="12700" dir="13860000" algn="tl" rotWithShape="0">
+              <a:srgbClr val="000000">
+                <a:alpha val="20000"/>
+              </a:srgbClr>
+            </a:outerShdw>
+          </a:effectLst>
+          <a:latin typeface="+mn-lt"/>
+          <a:ea typeface="+mn-ea"/>
+          <a:cs typeface="+mn-cs"/>
+        </a:defRPr>
+      </a:lvl5pPr>
+      <a:lvl6pPr marL="1885950" indent="-171450" algn="l" defTabSz="342900" rtl="0" eaLnBrk="1" latinLnBrk="0" hangingPunct="1">
+        <a:spcBef>
+          <a:spcPct val="20000"/>
+        </a:spcBef>
+        <a:spcAft>
+          <a:spcPts val="450"/>
+        </a:spcAft>
+        <a:buClr>
+          <a:schemeClr val="tx1"/>
+        </a:buClr>
+        <a:buSzPct val="100000"/>
+        <a:buFont typeface="Arial"/>
+        <a:buChar char="•"/>
+        <a:defRPr sz="900" kern="1200" cap="small">
+          <a:gradFill flip="none" rotWithShape="1">
+            <a:gsLst>
+              <a:gs pos="0">
+                <a:schemeClr val="tx1"/>
+              </a:gs>
+              <a:gs pos="100000">
+                <a:schemeClr val="tx1">
+                  <a:lumMod val="75000"/>
+                </a:schemeClr>
+              </a:gs>
+            </a:gsLst>
+            <a:lin ang="5580000" scaled="0"/>
+            <a:tileRect/>
+          </a:gradFill>
+          <a:effectLst>
+            <a:glow rad="38100">
+              <a:schemeClr val="bg1">
+                <a:lumMod val="50000"/>
+                <a:lumOff val="50000"/>
+                <a:alpha val="20000"/>
+              </a:schemeClr>
+            </a:glow>
+            <a:outerShdw blurRad="44450" dist="12700" dir="13860000" algn="tl" rotWithShape="0">
+              <a:srgbClr val="000000">
+                <a:alpha val="20000"/>
+              </a:srgbClr>
+            </a:outerShdw>
+          </a:effectLst>
+          <a:latin typeface="+mn-lt"/>
+          <a:ea typeface="+mn-ea"/>
+          <a:cs typeface="+mn-cs"/>
+        </a:defRPr>
+      </a:lvl6pPr>
+      <a:lvl7pPr marL="2228850" indent="-171450" algn="l" defTabSz="342900" rtl="0" eaLnBrk="1" latinLnBrk="0" hangingPunct="1">
+        <a:spcBef>
+          <a:spcPct val="20000"/>
+        </a:spcBef>
+        <a:spcAft>
+          <a:spcPts val="450"/>
+        </a:spcAft>
+        <a:buClr>
+          <a:schemeClr val="tx1"/>
+        </a:buClr>
+        <a:buSzPct val="100000"/>
+        <a:buFont typeface="Arial"/>
+        <a:buChar char="•"/>
+        <a:defRPr sz="900" kern="1200" cap="small">
+          <a:gradFill flip="none" rotWithShape="1">
+            <a:gsLst>
+              <a:gs pos="0">
+                <a:schemeClr val="tx1"/>
+              </a:gs>
+              <a:gs pos="100000">
+                <a:schemeClr val="tx1">
+                  <a:lumMod val="75000"/>
+                </a:schemeClr>
+              </a:gs>
+            </a:gsLst>
+            <a:lin ang="5580000" scaled="0"/>
+            <a:tileRect/>
+          </a:gradFill>
+          <a:effectLst>
+            <a:glow rad="38100">
+              <a:schemeClr val="bg1">
+                <a:lumMod val="50000"/>
+                <a:lumOff val="50000"/>
+                <a:alpha val="20000"/>
+              </a:schemeClr>
+            </a:glow>
+            <a:outerShdw blurRad="44450" dist="12700" dir="13860000" algn="tl" rotWithShape="0">
+              <a:srgbClr val="000000">
+                <a:alpha val="20000"/>
+              </a:srgbClr>
+            </a:outerShdw>
+          </a:effectLst>
+          <a:latin typeface="+mn-lt"/>
+          <a:ea typeface="+mn-ea"/>
+          <a:cs typeface="+mn-cs"/>
+        </a:defRPr>
+      </a:lvl7pPr>
+      <a:lvl8pPr marL="2571750" indent="-171450" algn="l" defTabSz="342900" rtl="0" eaLnBrk="1" latinLnBrk="0" hangingPunct="1">
+        <a:spcBef>
+          <a:spcPct val="20000"/>
+        </a:spcBef>
+        <a:spcAft>
+          <a:spcPts val="450"/>
+        </a:spcAft>
+        <a:buClr>
+          <a:schemeClr val="tx1"/>
+        </a:buClr>
+        <a:buSzPct val="100000"/>
+        <a:buFont typeface="Arial"/>
+        <a:buChar char="•"/>
+        <a:defRPr sz="900" kern="1200" cap="small">
+          <a:gradFill flip="none" rotWithShape="1">
+            <a:gsLst>
+              <a:gs pos="0">
+                <a:schemeClr val="tx1"/>
+              </a:gs>
+              <a:gs pos="100000">
+                <a:schemeClr val="tx1">
+                  <a:lumMod val="75000"/>
+                </a:schemeClr>
+              </a:gs>
+            </a:gsLst>
+            <a:lin ang="5580000" scaled="0"/>
+            <a:tileRect/>
+          </a:gradFill>
+          <a:effectLst>
+            <a:glow rad="38100">
+              <a:schemeClr val="bg1">
+                <a:lumMod val="50000"/>
+                <a:lumOff val="50000"/>
+                <a:alpha val="20000"/>
+              </a:schemeClr>
+            </a:glow>
+            <a:outerShdw blurRad="44450" dist="12700" dir="13860000" algn="tl" rotWithShape="0">
+              <a:srgbClr val="000000">
+                <a:alpha val="20000"/>
+              </a:srgbClr>
+            </a:outerShdw>
+          </a:effectLst>
+          <a:latin typeface="+mn-lt"/>
+          <a:ea typeface="+mn-ea"/>
+          <a:cs typeface="+mn-cs"/>
+        </a:defRPr>
+      </a:lvl8pPr>
+      <a:lvl9pPr marL="2914650" indent="-171450" algn="l" defTabSz="342900" rtl="0" eaLnBrk="1" latinLnBrk="0" hangingPunct="1">
+        <a:spcBef>
+          <a:spcPct val="20000"/>
+        </a:spcBef>
+        <a:spcAft>
+          <a:spcPts val="450"/>
+        </a:spcAft>
+        <a:buClr>
+          <a:schemeClr val="tx1"/>
+        </a:buClr>
+        <a:buSzPct val="100000"/>
+        <a:buFont typeface="Arial"/>
+        <a:buChar char="•"/>
+        <a:defRPr sz="900" kern="1200" cap="small">
+          <a:gradFill flip="none" rotWithShape="1">
+            <a:gsLst>
+              <a:gs pos="0">
+                <a:schemeClr val="tx1"/>
+              </a:gs>
+              <a:gs pos="100000">
+                <a:schemeClr val="tx1">
+                  <a:lumMod val="75000"/>
+                </a:schemeClr>
+              </a:gs>
+            </a:gsLst>
+            <a:lin ang="5580000" scaled="0"/>
+            <a:tileRect/>
+          </a:gradFill>
+          <a:effectLst>
+            <a:glow rad="38100">
+              <a:schemeClr val="bg1">
+                <a:lumMod val="50000"/>
+                <a:lumOff val="50000"/>
+                <a:alpha val="20000"/>
+              </a:schemeClr>
+            </a:glow>
+            <a:outerShdw blurRad="44450" dist="12700" dir="13860000" algn="tl" rotWithShape="0">
+              <a:srgbClr val="000000">
+                <a:alpha val="20000"/>
+              </a:srgbClr>
+            </a:outerShdw>
+          </a:effectLst>
+          <a:latin typeface="+mn-lt"/>
+          <a:ea typeface="+mn-ea"/>
+          <a:cs typeface="+mn-cs"/>
+        </a:defRPr>
+      </a:lvl9pPr>
+    </p:bodyStyle>
+    <p:otherStyle>
+      <a:defPPr>
+        <a:defRPr lang="en-US"/>
+      </a:defPPr>
+      <a:lvl1pPr marL="0" algn="l" defTabSz="342900" rtl="0" eaLnBrk="1" latinLnBrk="0" hangingPunct="1">
+        <a:defRPr sz="1350" kern="1200">
+          <a:solidFill>
+            <a:schemeClr val="tx1"/>
+          </a:solidFill>
+          <a:latin typeface="+mn-lt"/>
+          <a:ea typeface="+mn-ea"/>
+          <a:cs typeface="+mn-cs"/>
+        </a:defRPr>
+      </a:lvl1pPr>
+      <a:lvl2pPr marL="342900" algn="l" defTabSz="342900" rtl="0" eaLnBrk="1" latinLnBrk="0" hangingPunct="1">
+        <a:defRPr sz="1350" kern="1200">
+          <a:solidFill>
+            <a:schemeClr val="tx1"/>
+          </a:solidFill>
+          <a:latin typeface="+mn-lt"/>
+          <a:ea typeface="+mn-ea"/>
+          <a:cs typeface="+mn-cs"/>
+        </a:defRPr>
+      </a:lvl2pPr>
+      <a:lvl3pPr marL="685800" algn="l" defTabSz="342900" rtl="0" eaLnBrk="1" latinLnBrk="0" hangingPunct="1">
+        <a:defRPr sz="1350" kern="1200">
+          <a:solidFill>
+            <a:schemeClr val="tx1"/>
+          </a:solidFill>
+          <a:latin typeface="+mn-lt"/>
+          <a:ea typeface="+mn-ea"/>
+          <a:cs typeface="+mn-cs"/>
+        </a:defRPr>
+      </a:lvl3pPr>
+      <a:lvl4pPr marL="1028700" algn="l" defTabSz="342900" rtl="0" eaLnBrk="1" latinLnBrk="0" hangingPunct="1">
+        <a:defRPr sz="1350" kern="1200">
+          <a:solidFill>
+            <a:schemeClr val="tx1"/>
+          </a:solidFill>
+          <a:latin typeface="+mn-lt"/>
+          <a:ea typeface="+mn-ea"/>
+          <a:cs typeface="+mn-cs"/>
+        </a:defRPr>
+      </a:lvl4pPr>
+      <a:lvl5pPr marL="1371600" algn="l" defTabSz="342900" rtl="0" eaLnBrk="1" latinLnBrk="0" hangingPunct="1">
+        <a:defRPr sz="1350" kern="1200">
+          <a:solidFill>
+            <a:schemeClr val="tx1"/>
+          </a:solidFill>
+          <a:latin typeface="+mn-lt"/>
+          <a:ea typeface="+mn-ea"/>
+          <a:cs typeface="+mn-cs"/>
+        </a:defRPr>
+      </a:lvl5pPr>
+      <a:lvl6pPr marL="1714500" algn="l" defTabSz="342900" rtl="0" eaLnBrk="1" latinLnBrk="0" hangingPunct="1">
+        <a:defRPr sz="1350" kern="1200">
+          <a:solidFill>
+            <a:schemeClr val="tx1"/>
+          </a:solidFill>
+          <a:latin typeface="+mn-lt"/>
+          <a:ea typeface="+mn-ea"/>
+          <a:cs typeface="+mn-cs"/>
+        </a:defRPr>
+      </a:lvl6pPr>
+      <a:lvl7pPr marL="2057400" algn="l" defTabSz="342900" rtl="0" eaLnBrk="1" latinLnBrk="0" hangingPunct="1">
+        <a:defRPr sz="1350" kern="1200">
+          <a:solidFill>
+            <a:schemeClr val="tx1"/>
+          </a:solidFill>
+          <a:latin typeface="+mn-lt"/>
+          <a:ea typeface="+mn-ea"/>
+          <a:cs typeface="+mn-cs"/>
+        </a:defRPr>
+      </a:lvl7pPr>
+      <a:lvl8pPr marL="2400300" algn="l" defTabSz="342900" rtl="0" eaLnBrk="1" latinLnBrk="0" hangingPunct="1">
+        <a:defRPr sz="1350" kern="1200">
+          <a:solidFill>
+            <a:schemeClr val="tx1"/>
+          </a:solidFill>
+          <a:latin typeface="+mn-lt"/>
+          <a:ea typeface="+mn-ea"/>
+          <a:cs typeface="+mn-cs"/>
+        </a:defRPr>
+      </a:lvl8pPr>
+      <a:lvl9pPr marL="2743200" algn="l" defTabSz="342900" rtl="0" eaLnBrk="1" latinLnBrk="0" hangingPunct="1">
+        <a:defRPr sz="1350" kern="1200">
+          <a:solidFill>
+            <a:schemeClr val="tx1"/>
+          </a:solidFill>
+          <a:latin typeface="+mn-lt"/>
+          <a:ea typeface="+mn-ea"/>
+          <a:cs typeface="+mn-cs"/>
+        </a:defRPr>
+      </a:lvl9pPr>
+    </p:otherStyle>
+  </p:txStyles>
+</p:sldMaster>
+</file>
+
 <file path=ppt/slides/slide1.xml><?xml version="1.0" encoding="utf-8"?>
 <p:sld xmlns:a="http://schemas.openxmlformats.org/drawingml/2006/main" xmlns:r="http://schemas.openxmlformats.org/officeDocument/2006/relationships" xmlns:p="http://schemas.openxmlformats.org/presentationml/2006/main">
   <p:cSld name="Slide 1">
@@ -1532,7 +7407,7 @@
             <a:spLocks noGrp="1"/>
           </p:cNvSpPr>
           <p:nvPr>
-            <p:ph type="title" idx="100" hasCustomPrompt="1"/>
+            <p:ph type="title" idx="100"/>
           </p:nvPr>
         </p:nvSpPr>
         <p:spPr>
@@ -1558,10 +7433,15 @@
                 <a:solidFill>
                   <a:schemeClr val="tx1"/>
                 </a:solidFill>
+                <a:latin typeface="Times New Roman" panose="02020603050405020304" pitchFamily="18" charset="0"/>
+                <a:cs typeface="Times New Roman" panose="02020603050405020304" pitchFamily="18" charset="0"/>
               </a:rPr>
               <a:t>Data-Efficient Visual Quality Inspection</a:t>
             </a:r>
-            <a:endParaRPr lang="en-US" sz="3800" dirty="0"/>
+            <a:endParaRPr lang="en-US" sz="3800" dirty="0">
+              <a:latin typeface="Times New Roman" panose="02020603050405020304" pitchFamily="18" charset="0"/>
+              <a:cs typeface="Times New Roman" panose="02020603050405020304" pitchFamily="18" charset="0"/>
+            </a:endParaRPr>
           </a:p>
         </p:txBody>
       </p:sp>
@@ -1572,7 +7452,7 @@
             <a:spLocks noGrp="1"/>
           </p:cNvSpPr>
           <p:nvPr>
-            <p:ph type="body" idx="101" hasCustomPrompt="1"/>
+            <p:ph type="body" idx="101"/>
           </p:nvPr>
         </p:nvSpPr>
         <p:spPr>
@@ -1957,6 +7837,1768 @@
 
 <file path=ppt/slides/slide3.xml><?xml version="1.0" encoding="utf-8"?>
 <p:sld xmlns:a="http://schemas.openxmlformats.org/drawingml/2006/main" xmlns:r="http://schemas.openxmlformats.org/officeDocument/2006/relationships" xmlns:p="http://schemas.openxmlformats.org/presentationml/2006/main">
+  <p:cSld>
+    <p:spTree>
+      <p:nvGrpSpPr>
+        <p:cNvPr id="1" name="">
+          <a:extLst>
+            <a:ext uri="{FF2B5EF4-FFF2-40B4-BE49-F238E27FC236}">
+              <a16:creationId xmlns:a16="http://schemas.microsoft.com/office/drawing/2014/main" id="{74E13074-41C4-395A-E004-68BD06C82181}"/>
+            </a:ext>
+          </a:extLst>
+        </p:cNvPr>
+        <p:cNvGrpSpPr/>
+        <p:nvPr/>
+      </p:nvGrpSpPr>
+      <p:grpSpPr>
+        <a:xfrm>
+          <a:off x="0" y="0"/>
+          <a:ext cx="0" cy="0"/>
+          <a:chOff x="0" y="0"/>
+          <a:chExt cx="0" cy="0"/>
+        </a:xfrm>
+      </p:grpSpPr>
+      <p:sp>
+        <p:nvSpPr>
+          <p:cNvPr id="2" name="Text 1">
+            <a:extLst>
+              <a:ext uri="{FF2B5EF4-FFF2-40B4-BE49-F238E27FC236}">
+                <a16:creationId xmlns:a16="http://schemas.microsoft.com/office/drawing/2014/main" id="{81FA752E-244B-F0E9-21FE-82C6D24D760B}"/>
+              </a:ext>
+            </a:extLst>
+          </p:cNvPr>
+          <p:cNvSpPr>
+            <a:spLocks noGrp="1"/>
+          </p:cNvSpPr>
+          <p:nvPr>
+            <p:ph type="title" idx="101" hasCustomPrompt="1"/>
+          </p:nvPr>
+        </p:nvSpPr>
+        <p:spPr>
+          <a:xfrm>
+            <a:off x="457200" y="182232"/>
+            <a:ext cx="8229600" cy="640080"/>
+          </a:xfrm>
+          <a:prstGeom prst="rect">
+            <a:avLst/>
+          </a:prstGeom>
+          <a:noFill/>
+          <a:ln/>
+        </p:spPr>
+        <p:txBody>
+          <a:bodyPr wrap="square" lIns="0" tIns="0" rIns="0" bIns="0" rtlCol="0" anchor="ctr"/>
+          <a:lstStyle/>
+          <a:p>
+            <a:pPr marL="0" indent="0" algn="l">
+              <a:buNone/>
+            </a:pPr>
+            <a:r>
+              <a:rPr lang="en-US" sz="3200" b="1" dirty="0">
+                <a:solidFill>
+                  <a:schemeClr val="tx1"/>
+                </a:solidFill>
+              </a:rPr>
+              <a:t>Literature Review</a:t>
+            </a:r>
+            <a:endParaRPr lang="en-US" sz="3200" dirty="0"/>
+          </a:p>
+        </p:txBody>
+      </p:sp>
+      <p:sp>
+        <p:nvSpPr>
+          <p:cNvPr id="3" name="Text 1">
+            <a:extLst>
+              <a:ext uri="{FF2B5EF4-FFF2-40B4-BE49-F238E27FC236}">
+                <a16:creationId xmlns:a16="http://schemas.microsoft.com/office/drawing/2014/main" id="{707579B7-B75D-71CE-114B-E0EDA8EE74F6}"/>
+              </a:ext>
+            </a:extLst>
+          </p:cNvPr>
+          <p:cNvSpPr txBox="1"/>
+          <p:nvPr/>
+        </p:nvSpPr>
+        <p:spPr>
+          <a:xfrm>
+            <a:off x="457199" y="883991"/>
+            <a:ext cx="8229600" cy="274320"/>
+          </a:xfrm>
+          <a:prstGeom prst="rect">
+            <a:avLst/>
+          </a:prstGeom>
+          <a:noFill/>
+          <a:ln/>
+        </p:spPr>
+        <p:txBody>
+          <a:bodyPr wrap="square" lIns="0" tIns="0" rIns="0" bIns="0" rtlCol="0" anchor="t"/>
+          <a:lstStyle/>
+          <a:p>
+            <a:pPr marL="0" indent="0">
+              <a:buNone/>
+            </a:pPr>
+            <a:r>
+              <a:rPr lang="en-US" sz="1400" b="1" dirty="0"/>
+              <a:t>Five studies were reviewed:</a:t>
+            </a:r>
+            <a:endParaRPr lang="en-US" sz="1400" dirty="0"/>
+          </a:p>
+        </p:txBody>
+      </p:sp>
+      <p:sp>
+        <p:nvSpPr>
+          <p:cNvPr id="6" name="Text 4">
+            <a:extLst>
+              <a:ext uri="{FF2B5EF4-FFF2-40B4-BE49-F238E27FC236}">
+                <a16:creationId xmlns:a16="http://schemas.microsoft.com/office/drawing/2014/main" id="{AD8165BA-24E9-2408-D80F-689BAA2FEF18}"/>
+              </a:ext>
+            </a:extLst>
+          </p:cNvPr>
+          <p:cNvSpPr txBox="1"/>
+          <p:nvPr/>
+        </p:nvSpPr>
+        <p:spPr>
+          <a:xfrm>
+            <a:off x="391886" y="3406140"/>
+            <a:ext cx="8229600" cy="1463040"/>
+          </a:xfrm>
+          <a:prstGeom prst="rect">
+            <a:avLst/>
+          </a:prstGeom>
+          <a:noFill/>
+          <a:ln/>
+        </p:spPr>
+        <p:txBody>
+          <a:bodyPr wrap="square" lIns="0" tIns="0" rIns="0" bIns="0" rtlCol="0" anchor="t"/>
+          <a:lstStyle/>
+          <a:p>
+            <a:r>
+              <a:rPr lang="en-US" sz="1400" b="1" dirty="0"/>
+              <a:t>Three gaps motivate the experiments: </a:t>
+            </a:r>
+          </a:p>
+          <a:p>
+            <a:endParaRPr lang="en-AE" sz="900" dirty="0"/>
+          </a:p>
+          <a:p>
+            <a:pPr marL="285750" lvl="0" indent="-285750">
+              <a:buFont typeface="Arial" panose="020B0604020202020204" pitchFamily="34" charset="0"/>
+              <a:buChar char="•"/>
+            </a:pPr>
+            <a:r>
+              <a:rPr lang="en-US" sz="1400" dirty="0"/>
+              <a:t>no controlled study of how performance changes as labelled training data decreases for both </a:t>
+            </a:r>
+            <a:r>
+              <a:rPr lang="en-US" sz="1400" dirty="0" err="1"/>
+              <a:t>ViT</a:t>
+            </a:r>
+            <a:r>
+              <a:rPr lang="en-US" sz="1400" dirty="0"/>
+              <a:t> and CNN on casting images.</a:t>
+            </a:r>
+            <a:endParaRPr lang="en-AE" sz="1400" dirty="0"/>
+          </a:p>
+          <a:p>
+            <a:pPr marL="285750" lvl="0" indent="-285750">
+              <a:buFont typeface="Arial" panose="020B0604020202020204" pitchFamily="34" charset="0"/>
+              <a:buChar char="•"/>
+            </a:pPr>
+            <a:r>
+              <a:rPr lang="en-US" sz="1400" dirty="0"/>
+              <a:t>no like-for-like comparison of </a:t>
+            </a:r>
+            <a:r>
+              <a:rPr lang="en-US" sz="1400" dirty="0" err="1"/>
+              <a:t>ViT</a:t>
+            </a:r>
+            <a:r>
+              <a:rPr lang="en-US" sz="1400" dirty="0"/>
+              <a:t> and </a:t>
+            </a:r>
+            <a:r>
+              <a:rPr lang="en-US" sz="1400" dirty="0" err="1"/>
+              <a:t>ResNet</a:t>
+            </a:r>
+            <a:r>
+              <a:rPr lang="en-US" sz="1400" dirty="0"/>
+              <a:t> on this modality.</a:t>
+            </a:r>
+            <a:endParaRPr lang="en-AE" sz="1400" dirty="0"/>
+          </a:p>
+          <a:p>
+            <a:pPr marL="285750" lvl="0" indent="-285750">
+              <a:buFont typeface="Arial" panose="020B0604020202020204" pitchFamily="34" charset="0"/>
+              <a:buChar char="•"/>
+            </a:pPr>
+            <a:r>
+              <a:rPr lang="en-US" sz="1400" dirty="0"/>
+              <a:t>results of defect detection performance and their computational cost are rarely reported together.</a:t>
+            </a:r>
+            <a:endParaRPr lang="en-AE" sz="1400" dirty="0"/>
+          </a:p>
+        </p:txBody>
+      </p:sp>
+      <p:sp>
+        <p:nvSpPr>
+          <p:cNvPr id="25" name="Slide Number Placeholder 0">
+            <a:extLst>
+              <a:ext uri="{FF2B5EF4-FFF2-40B4-BE49-F238E27FC236}">
+                <a16:creationId xmlns:a16="http://schemas.microsoft.com/office/drawing/2014/main" id="{58D4F267-1FC5-C17E-55CA-BB8619F70E0F}"/>
+              </a:ext>
+            </a:extLst>
+          </p:cNvPr>
+          <p:cNvSpPr>
+            <a:spLocks noGrp="1"/>
+          </p:cNvSpPr>
+          <p:nvPr>
+            <p:ph type="sldNum" sz="quarter" idx="4294967295"/>
+          </p:nvPr>
+        </p:nvSpPr>
+        <p:spPr>
+          <a:xfrm>
+            <a:off x="8229600" y="4754880"/>
+            <a:ext cx="457200" cy="228600"/>
+          </a:xfrm>
+          <a:prstGeom prst="rect">
+            <a:avLst/>
+          </a:prstGeom>
+          <a:extLst>
+            <a:ext uri="{C572A759-6A51-4108-AA02-DFA0A04FC94B}">
+              <ma14:wrappingTextBoxFlag xmlns="" xmlns:ma14="http://schemas.microsoft.com/office/mac/drawingml/2011/main" val="0"/>
+            </a:ext>
+          </a:extLst>
+        </p:spPr>
+        <p:txBody>
+          <a:bodyPr/>
+          <a:lstStyle>
+            <a:lvl1pPr>
+              <a:defRPr sz="1000">
+                <a:solidFill>
+                  <a:schemeClr val="accent2"/>
+                </a:solidFill>
+              </a:defRPr>
+            </a:lvl1pPr>
+          </a:lstStyle>
+          <a:p>
+            <a:pPr algn="r"/>
+            <a:fld id="{F7021451-1387-4CA6-816F-3879F97B5CBC}" type="slidenum">
+              <a:rPr lang="en-US" b="0"/>
+              <a:t>3</a:t>
+            </a:fld>
+            <a:endParaRPr lang="en-US"/>
+          </a:p>
+        </p:txBody>
+      </p:sp>
+      <p:graphicFrame>
+        <p:nvGraphicFramePr>
+          <p:cNvPr id="7" name="Table 6">
+            <a:extLst>
+              <a:ext uri="{FF2B5EF4-FFF2-40B4-BE49-F238E27FC236}">
+                <a16:creationId xmlns:a16="http://schemas.microsoft.com/office/drawing/2014/main" id="{49D7A2A3-A31E-D595-A1E7-4B0BBB646D59}"/>
+              </a:ext>
+            </a:extLst>
+          </p:cNvPr>
+          <p:cNvGraphicFramePr>
+            <a:graphicFrameLocks noGrp="1"/>
+          </p:cNvGraphicFramePr>
+          <p:nvPr>
+            <p:extLst>
+              <p:ext uri="{D42A27DB-BD31-4B8C-83A1-F6EECF244321}">
+                <p14:modId xmlns:p14="http://schemas.microsoft.com/office/powerpoint/2010/main" val="3713743607"/>
+              </p:ext>
+            </p:extLst>
+          </p:nvPr>
+        </p:nvGraphicFramePr>
+        <p:xfrm>
+          <a:off x="1136468" y="1222238"/>
+          <a:ext cx="6871063" cy="2082665"/>
+        </p:xfrm>
+        <a:graphic>
+          <a:graphicData uri="http://schemas.openxmlformats.org/drawingml/2006/table">
+            <a:tbl>
+              <a:tblPr firstRow="1" firstCol="1" bandRow="1">
+                <a:tableStyleId>{5C22544A-7EE6-4342-B048-85BDC9FD1C3A}</a:tableStyleId>
+              </a:tblPr>
+              <a:tblGrid>
+                <a:gridCol w="3281833">
+                  <a:extLst>
+                    <a:ext uri="{9D8B030D-6E8A-4147-A177-3AD203B41FA5}">
+                      <a16:colId xmlns:a16="http://schemas.microsoft.com/office/drawing/2014/main" val="434539396"/>
+                    </a:ext>
+                  </a:extLst>
+                </a:gridCol>
+                <a:gridCol w="1793087">
+                  <a:extLst>
+                    <a:ext uri="{9D8B030D-6E8A-4147-A177-3AD203B41FA5}">
+                      <a16:colId xmlns:a16="http://schemas.microsoft.com/office/drawing/2014/main" val="2295762735"/>
+                    </a:ext>
+                  </a:extLst>
+                </a:gridCol>
+                <a:gridCol w="1796143">
+                  <a:extLst>
+                    <a:ext uri="{9D8B030D-6E8A-4147-A177-3AD203B41FA5}">
+                      <a16:colId xmlns:a16="http://schemas.microsoft.com/office/drawing/2014/main" val="2258627823"/>
+                    </a:ext>
+                  </a:extLst>
+                </a:gridCol>
+              </a:tblGrid>
+              <a:tr h="215537">
+                <a:tc>
+                  <a:txBody>
+                    <a:bodyPr/>
+                    <a:lstStyle/>
+                    <a:p>
+                      <a:pPr>
+                        <a:lnSpc>
+                          <a:spcPct val="115000"/>
+                        </a:lnSpc>
+                        <a:spcAft>
+                          <a:spcPts val="1000"/>
+                        </a:spcAft>
+                        <a:buNone/>
+                      </a:pPr>
+                      <a:r>
+                        <a:rPr lang="en-US" sz="900" dirty="0">
+                          <a:solidFill>
+                            <a:schemeClr val="tx1"/>
+                          </a:solidFill>
+                          <a:effectLst/>
+                        </a:rPr>
+                        <a:t>Study</a:t>
+                      </a:r>
+                      <a:endParaRPr lang="en-AE" sz="1100" dirty="0">
+                        <a:solidFill>
+                          <a:schemeClr val="tx1"/>
+                        </a:solidFill>
+                        <a:effectLst/>
+                        <a:latin typeface="Calibri" panose="020F0502020204030204" pitchFamily="34" charset="0"/>
+                        <a:ea typeface="MS Mincho" panose="02020609040205080304" pitchFamily="49" charset="-128"/>
+                        <a:cs typeface="Arial" panose="020B0604020202020204" pitchFamily="34" charset="0"/>
+                      </a:endParaRPr>
+                    </a:p>
+                  </a:txBody>
+                  <a:tcPr marL="68580" marR="68580" marT="0" marB="0">
+                    <a:lnL w="12700" cap="flat" cmpd="sng" algn="ctr">
+                      <a:solidFill>
+                        <a:schemeClr val="tx1"/>
+                      </a:solidFill>
+                      <a:prstDash val="solid"/>
+                      <a:round/>
+                      <a:headEnd type="none" w="med" len="med"/>
+                      <a:tailEnd type="none" w="med" len="med"/>
+                    </a:lnL>
+                    <a:lnR w="12700" cap="flat" cmpd="sng" algn="ctr">
+                      <a:solidFill>
+                        <a:schemeClr val="tx1"/>
+                      </a:solidFill>
+                      <a:prstDash val="solid"/>
+                      <a:round/>
+                      <a:headEnd type="none" w="med" len="med"/>
+                      <a:tailEnd type="none" w="med" len="med"/>
+                    </a:lnR>
+                    <a:lnT w="12700" cap="flat" cmpd="sng" algn="ctr">
+                      <a:solidFill>
+                        <a:schemeClr val="tx1"/>
+                      </a:solidFill>
+                      <a:prstDash val="solid"/>
+                      <a:round/>
+                      <a:headEnd type="none" w="med" len="med"/>
+                      <a:tailEnd type="none" w="med" len="med"/>
+                    </a:lnT>
+                    <a:lnB w="12700" cap="flat" cmpd="sng" algn="ctr">
+                      <a:solidFill>
+                        <a:schemeClr val="tx1"/>
+                      </a:solidFill>
+                      <a:prstDash val="solid"/>
+                      <a:round/>
+                      <a:headEnd type="none" w="med" len="med"/>
+                      <a:tailEnd type="none" w="med" len="med"/>
+                    </a:lnB>
+                    <a:solidFill>
+                      <a:schemeClr val="accent6">
+                        <a:lumMod val="75000"/>
+                      </a:schemeClr>
+                    </a:solidFill>
+                  </a:tcPr>
+                </a:tc>
+                <a:tc>
+                  <a:txBody>
+                    <a:bodyPr/>
+                    <a:lstStyle/>
+                    <a:p>
+                      <a:pPr>
+                        <a:lnSpc>
+                          <a:spcPct val="115000"/>
+                        </a:lnSpc>
+                        <a:spcAft>
+                          <a:spcPts val="1000"/>
+                        </a:spcAft>
+                        <a:buNone/>
+                      </a:pPr>
+                      <a:r>
+                        <a:rPr lang="en-US" sz="900" dirty="0">
+                          <a:solidFill>
+                            <a:schemeClr val="tx1"/>
+                          </a:solidFill>
+                          <a:effectLst/>
+                        </a:rPr>
+                        <a:t>Focus</a:t>
+                      </a:r>
+                      <a:endParaRPr lang="en-AE" sz="1100" dirty="0">
+                        <a:solidFill>
+                          <a:schemeClr val="tx1"/>
+                        </a:solidFill>
+                        <a:effectLst/>
+                        <a:latin typeface="Calibri" panose="020F0502020204030204" pitchFamily="34" charset="0"/>
+                        <a:ea typeface="MS Mincho" panose="02020609040205080304" pitchFamily="49" charset="-128"/>
+                        <a:cs typeface="Arial" panose="020B0604020202020204" pitchFamily="34" charset="0"/>
+                      </a:endParaRPr>
+                    </a:p>
+                  </a:txBody>
+                  <a:tcPr marL="68580" marR="68580" marT="0" marB="0">
+                    <a:lnL w="12700" cap="flat" cmpd="sng" algn="ctr">
+                      <a:solidFill>
+                        <a:schemeClr val="tx1"/>
+                      </a:solidFill>
+                      <a:prstDash val="solid"/>
+                      <a:round/>
+                      <a:headEnd type="none" w="med" len="med"/>
+                      <a:tailEnd type="none" w="med" len="med"/>
+                    </a:lnL>
+                    <a:lnR w="12700" cap="flat" cmpd="sng" algn="ctr">
+                      <a:solidFill>
+                        <a:schemeClr val="tx1"/>
+                      </a:solidFill>
+                      <a:prstDash val="solid"/>
+                      <a:round/>
+                      <a:headEnd type="none" w="med" len="med"/>
+                      <a:tailEnd type="none" w="med" len="med"/>
+                    </a:lnR>
+                    <a:lnT w="12700" cap="flat" cmpd="sng" algn="ctr">
+                      <a:solidFill>
+                        <a:schemeClr val="tx1"/>
+                      </a:solidFill>
+                      <a:prstDash val="solid"/>
+                      <a:round/>
+                      <a:headEnd type="none" w="med" len="med"/>
+                      <a:tailEnd type="none" w="med" len="med"/>
+                    </a:lnT>
+                    <a:lnB w="12700" cap="flat" cmpd="sng" algn="ctr">
+                      <a:solidFill>
+                        <a:schemeClr val="tx1"/>
+                      </a:solidFill>
+                      <a:prstDash val="solid"/>
+                      <a:round/>
+                      <a:headEnd type="none" w="med" len="med"/>
+                      <a:tailEnd type="none" w="med" len="med"/>
+                    </a:lnB>
+                    <a:solidFill>
+                      <a:schemeClr val="accent6">
+                        <a:lumMod val="75000"/>
+                      </a:schemeClr>
+                    </a:solidFill>
+                  </a:tcPr>
+                </a:tc>
+                <a:tc>
+                  <a:txBody>
+                    <a:bodyPr/>
+                    <a:lstStyle/>
+                    <a:p>
+                      <a:pPr>
+                        <a:lnSpc>
+                          <a:spcPct val="115000"/>
+                        </a:lnSpc>
+                        <a:spcAft>
+                          <a:spcPts val="1000"/>
+                        </a:spcAft>
+                        <a:buNone/>
+                      </a:pPr>
+                      <a:r>
+                        <a:rPr lang="en-US" sz="900" dirty="0">
+                          <a:solidFill>
+                            <a:schemeClr val="tx1"/>
+                          </a:solidFill>
+                          <a:effectLst/>
+                        </a:rPr>
+                        <a:t>Gap for this project</a:t>
+                      </a:r>
+                      <a:endParaRPr lang="en-AE" sz="1100" dirty="0">
+                        <a:solidFill>
+                          <a:schemeClr val="tx1"/>
+                        </a:solidFill>
+                        <a:effectLst/>
+                        <a:latin typeface="Calibri" panose="020F0502020204030204" pitchFamily="34" charset="0"/>
+                        <a:ea typeface="MS Mincho" panose="02020609040205080304" pitchFamily="49" charset="-128"/>
+                        <a:cs typeface="Arial" panose="020B0604020202020204" pitchFamily="34" charset="0"/>
+                      </a:endParaRPr>
+                    </a:p>
+                  </a:txBody>
+                  <a:tcPr marL="68580" marR="68580" marT="0" marB="0">
+                    <a:lnL w="12700" cap="flat" cmpd="sng" algn="ctr">
+                      <a:solidFill>
+                        <a:schemeClr val="tx1"/>
+                      </a:solidFill>
+                      <a:prstDash val="solid"/>
+                      <a:round/>
+                      <a:headEnd type="none" w="med" len="med"/>
+                      <a:tailEnd type="none" w="med" len="med"/>
+                    </a:lnL>
+                    <a:lnR w="12700" cap="flat" cmpd="sng" algn="ctr">
+                      <a:solidFill>
+                        <a:schemeClr val="tx1"/>
+                      </a:solidFill>
+                      <a:prstDash val="solid"/>
+                      <a:round/>
+                      <a:headEnd type="none" w="med" len="med"/>
+                      <a:tailEnd type="none" w="med" len="med"/>
+                    </a:lnR>
+                    <a:lnT w="12700" cap="flat" cmpd="sng" algn="ctr">
+                      <a:solidFill>
+                        <a:schemeClr val="tx1"/>
+                      </a:solidFill>
+                      <a:prstDash val="solid"/>
+                      <a:round/>
+                      <a:headEnd type="none" w="med" len="med"/>
+                      <a:tailEnd type="none" w="med" len="med"/>
+                    </a:lnT>
+                    <a:lnB w="12700" cap="flat" cmpd="sng" algn="ctr">
+                      <a:solidFill>
+                        <a:schemeClr val="tx1"/>
+                      </a:solidFill>
+                      <a:prstDash val="solid"/>
+                      <a:round/>
+                      <a:headEnd type="none" w="med" len="med"/>
+                      <a:tailEnd type="none" w="med" len="med"/>
+                    </a:lnB>
+                    <a:solidFill>
+                      <a:schemeClr val="accent6">
+                        <a:lumMod val="75000"/>
+                      </a:schemeClr>
+                    </a:solidFill>
+                  </a:tcPr>
+                </a:tc>
+                <a:extLst>
+                  <a:ext uri="{0D108BD9-81ED-4DB2-BD59-A6C34878D82A}">
+                    <a16:rowId xmlns:a16="http://schemas.microsoft.com/office/drawing/2014/main" val="3084303818"/>
+                  </a:ext>
+                </a:extLst>
+              </a:tr>
+              <a:tr h="338546">
+                <a:tc>
+                  <a:txBody>
+                    <a:bodyPr/>
+                    <a:lstStyle/>
+                    <a:p>
+                      <a:pPr>
+                        <a:lnSpc>
+                          <a:spcPct val="115000"/>
+                        </a:lnSpc>
+                        <a:spcAft>
+                          <a:spcPts val="1000"/>
+                        </a:spcAft>
+                        <a:buNone/>
+                      </a:pPr>
+                      <a:r>
+                        <a:rPr lang="en-US" sz="900" dirty="0">
+                          <a:solidFill>
+                            <a:schemeClr val="tx1"/>
+                          </a:solidFill>
+                          <a:effectLst/>
+                        </a:rPr>
+                        <a:t>A survey of deep learning for industrial visual anomaly detection. </a:t>
+                      </a:r>
+                      <a:endParaRPr lang="en-AE" sz="1100" dirty="0">
+                        <a:solidFill>
+                          <a:schemeClr val="tx1"/>
+                        </a:solidFill>
+                        <a:effectLst/>
+                        <a:latin typeface="Calibri" panose="020F0502020204030204" pitchFamily="34" charset="0"/>
+                        <a:ea typeface="MS Mincho" panose="02020609040205080304" pitchFamily="49" charset="-128"/>
+                        <a:cs typeface="Arial" panose="020B0604020202020204" pitchFamily="34" charset="0"/>
+                      </a:endParaRPr>
+                    </a:p>
+                  </a:txBody>
+                  <a:tcPr marL="68580" marR="68580" marT="0" marB="0">
+                    <a:lnL w="12700" cap="flat" cmpd="sng" algn="ctr">
+                      <a:solidFill>
+                        <a:schemeClr val="tx1"/>
+                      </a:solidFill>
+                      <a:prstDash val="solid"/>
+                      <a:round/>
+                      <a:headEnd type="none" w="med" len="med"/>
+                      <a:tailEnd type="none" w="med" len="med"/>
+                    </a:lnL>
+                    <a:lnR w="12700" cap="flat" cmpd="sng" algn="ctr">
+                      <a:solidFill>
+                        <a:schemeClr val="tx1"/>
+                      </a:solidFill>
+                      <a:prstDash val="solid"/>
+                      <a:round/>
+                      <a:headEnd type="none" w="med" len="med"/>
+                      <a:tailEnd type="none" w="med" len="med"/>
+                    </a:lnR>
+                    <a:lnT w="12700" cap="flat" cmpd="sng" algn="ctr">
+                      <a:solidFill>
+                        <a:schemeClr val="tx1"/>
+                      </a:solidFill>
+                      <a:prstDash val="solid"/>
+                      <a:round/>
+                      <a:headEnd type="none" w="med" len="med"/>
+                      <a:tailEnd type="none" w="med" len="med"/>
+                    </a:lnT>
+                    <a:lnB w="12700" cap="flat" cmpd="sng" algn="ctr">
+                      <a:solidFill>
+                        <a:schemeClr val="tx1"/>
+                      </a:solidFill>
+                      <a:prstDash val="solid"/>
+                      <a:round/>
+                      <a:headEnd type="none" w="med" len="med"/>
+                      <a:tailEnd type="none" w="med" len="med"/>
+                    </a:lnB>
+                    <a:solidFill>
+                      <a:schemeClr val="bg1"/>
+                    </a:solidFill>
+                  </a:tcPr>
+                </a:tc>
+                <a:tc>
+                  <a:txBody>
+                    <a:bodyPr/>
+                    <a:lstStyle/>
+                    <a:p>
+                      <a:pPr>
+                        <a:lnSpc>
+                          <a:spcPct val="115000"/>
+                        </a:lnSpc>
+                        <a:spcAft>
+                          <a:spcPts val="1000"/>
+                        </a:spcAft>
+                        <a:buNone/>
+                      </a:pPr>
+                      <a:r>
+                        <a:rPr lang="en-US" sz="900" dirty="0">
+                          <a:effectLst/>
+                        </a:rPr>
+                        <a:t>Industrial anomaly detection survey</a:t>
+                      </a:r>
+                      <a:endParaRPr lang="en-AE" sz="1100" dirty="0">
+                        <a:solidFill>
+                          <a:srgbClr val="000000"/>
+                        </a:solidFill>
+                        <a:effectLst/>
+                        <a:latin typeface="Calibri" panose="020F0502020204030204" pitchFamily="34" charset="0"/>
+                        <a:ea typeface="MS Mincho" panose="02020609040205080304" pitchFamily="49" charset="-128"/>
+                        <a:cs typeface="Arial" panose="020B0604020202020204" pitchFamily="34" charset="0"/>
+                      </a:endParaRPr>
+                    </a:p>
+                  </a:txBody>
+                  <a:tcPr marL="68580" marR="68580" marT="0" marB="0">
+                    <a:lnL w="12700" cap="flat" cmpd="sng" algn="ctr">
+                      <a:solidFill>
+                        <a:schemeClr val="tx1"/>
+                      </a:solidFill>
+                      <a:prstDash val="solid"/>
+                      <a:round/>
+                      <a:headEnd type="none" w="med" len="med"/>
+                      <a:tailEnd type="none" w="med" len="med"/>
+                    </a:lnL>
+                    <a:lnR w="12700" cap="flat" cmpd="sng" algn="ctr">
+                      <a:solidFill>
+                        <a:schemeClr val="tx1"/>
+                      </a:solidFill>
+                      <a:prstDash val="solid"/>
+                      <a:round/>
+                      <a:headEnd type="none" w="med" len="med"/>
+                      <a:tailEnd type="none" w="med" len="med"/>
+                    </a:lnR>
+                    <a:lnT w="12700" cap="flat" cmpd="sng" algn="ctr">
+                      <a:solidFill>
+                        <a:schemeClr val="tx1"/>
+                      </a:solidFill>
+                      <a:prstDash val="solid"/>
+                      <a:round/>
+                      <a:headEnd type="none" w="med" len="med"/>
+                      <a:tailEnd type="none" w="med" len="med"/>
+                    </a:lnT>
+                    <a:lnB w="12700" cap="flat" cmpd="sng" algn="ctr">
+                      <a:solidFill>
+                        <a:schemeClr val="tx1"/>
+                      </a:solidFill>
+                      <a:prstDash val="solid"/>
+                      <a:round/>
+                      <a:headEnd type="none" w="med" len="med"/>
+                      <a:tailEnd type="none" w="med" len="med"/>
+                    </a:lnB>
+                    <a:solidFill>
+                      <a:schemeClr val="bg1"/>
+                    </a:solidFill>
+                  </a:tcPr>
+                </a:tc>
+                <a:tc>
+                  <a:txBody>
+                    <a:bodyPr/>
+                    <a:lstStyle/>
+                    <a:p>
+                      <a:pPr>
+                        <a:lnSpc>
+                          <a:spcPct val="115000"/>
+                        </a:lnSpc>
+                        <a:spcAft>
+                          <a:spcPts val="1000"/>
+                        </a:spcAft>
+                        <a:buNone/>
+                      </a:pPr>
+                      <a:r>
+                        <a:rPr lang="en-US" sz="900" dirty="0">
+                          <a:effectLst/>
+                        </a:rPr>
+                        <a:t>No reduced-label </a:t>
+                      </a:r>
+                      <a:r>
+                        <a:rPr lang="en-US" sz="900" dirty="0" err="1">
+                          <a:effectLst/>
+                        </a:rPr>
+                        <a:t>ViT</a:t>
+                      </a:r>
+                      <a:r>
+                        <a:rPr lang="en-US" sz="900" dirty="0">
+                          <a:effectLst/>
+                        </a:rPr>
+                        <a:t>/CNN protocol</a:t>
+                      </a:r>
+                      <a:endParaRPr lang="en-AE" sz="1100" dirty="0">
+                        <a:solidFill>
+                          <a:srgbClr val="000000"/>
+                        </a:solidFill>
+                        <a:effectLst/>
+                        <a:latin typeface="Calibri" panose="020F0502020204030204" pitchFamily="34" charset="0"/>
+                        <a:ea typeface="MS Mincho" panose="02020609040205080304" pitchFamily="49" charset="-128"/>
+                        <a:cs typeface="Arial" panose="020B0604020202020204" pitchFamily="34" charset="0"/>
+                      </a:endParaRPr>
+                    </a:p>
+                  </a:txBody>
+                  <a:tcPr marL="68580" marR="68580" marT="0" marB="0">
+                    <a:lnL w="12700" cap="flat" cmpd="sng" algn="ctr">
+                      <a:solidFill>
+                        <a:schemeClr val="tx1"/>
+                      </a:solidFill>
+                      <a:prstDash val="solid"/>
+                      <a:round/>
+                      <a:headEnd type="none" w="med" len="med"/>
+                      <a:tailEnd type="none" w="med" len="med"/>
+                    </a:lnL>
+                    <a:lnR w="12700" cap="flat" cmpd="sng" algn="ctr">
+                      <a:solidFill>
+                        <a:schemeClr val="tx1"/>
+                      </a:solidFill>
+                      <a:prstDash val="solid"/>
+                      <a:round/>
+                      <a:headEnd type="none" w="med" len="med"/>
+                      <a:tailEnd type="none" w="med" len="med"/>
+                    </a:lnR>
+                    <a:lnT w="12700" cap="flat" cmpd="sng" algn="ctr">
+                      <a:solidFill>
+                        <a:schemeClr val="tx1"/>
+                      </a:solidFill>
+                      <a:prstDash val="solid"/>
+                      <a:round/>
+                      <a:headEnd type="none" w="med" len="med"/>
+                      <a:tailEnd type="none" w="med" len="med"/>
+                    </a:lnT>
+                    <a:lnB w="12700" cap="flat" cmpd="sng" algn="ctr">
+                      <a:solidFill>
+                        <a:schemeClr val="tx1"/>
+                      </a:solidFill>
+                      <a:prstDash val="solid"/>
+                      <a:round/>
+                      <a:headEnd type="none" w="med" len="med"/>
+                      <a:tailEnd type="none" w="med" len="med"/>
+                    </a:lnB>
+                    <a:solidFill>
+                      <a:schemeClr val="bg1"/>
+                    </a:solidFill>
+                  </a:tcPr>
+                </a:tc>
+                <a:extLst>
+                  <a:ext uri="{0D108BD9-81ED-4DB2-BD59-A6C34878D82A}">
+                    <a16:rowId xmlns:a16="http://schemas.microsoft.com/office/drawing/2014/main" val="4255662048"/>
+                  </a:ext>
+                </a:extLst>
+              </a:tr>
+              <a:tr h="338546">
+                <a:tc>
+                  <a:txBody>
+                    <a:bodyPr/>
+                    <a:lstStyle/>
+                    <a:p>
+                      <a:pPr>
+                        <a:lnSpc>
+                          <a:spcPct val="115000"/>
+                        </a:lnSpc>
+                        <a:spcAft>
+                          <a:spcPts val="1000"/>
+                        </a:spcAft>
+                        <a:buNone/>
+                      </a:pPr>
+                      <a:r>
+                        <a:rPr lang="en-US" sz="900" dirty="0">
+                          <a:solidFill>
+                            <a:schemeClr val="tx1"/>
+                          </a:solidFill>
+                          <a:effectLst/>
+                        </a:rPr>
+                        <a:t>A survey on industrial image anomaly detection: Methods, benchmarks and rethinks. </a:t>
+                      </a:r>
+                      <a:endParaRPr lang="en-AE" sz="1100" dirty="0">
+                        <a:solidFill>
+                          <a:schemeClr val="tx1"/>
+                        </a:solidFill>
+                        <a:effectLst/>
+                        <a:latin typeface="Calibri" panose="020F0502020204030204" pitchFamily="34" charset="0"/>
+                        <a:ea typeface="MS Mincho" panose="02020609040205080304" pitchFamily="49" charset="-128"/>
+                        <a:cs typeface="Arial" panose="020B0604020202020204" pitchFamily="34" charset="0"/>
+                      </a:endParaRPr>
+                    </a:p>
+                  </a:txBody>
+                  <a:tcPr marL="68580" marR="68580" marT="0" marB="0">
+                    <a:lnL w="12700" cap="flat" cmpd="sng" algn="ctr">
+                      <a:solidFill>
+                        <a:schemeClr val="tx1"/>
+                      </a:solidFill>
+                      <a:prstDash val="solid"/>
+                      <a:round/>
+                      <a:headEnd type="none" w="med" len="med"/>
+                      <a:tailEnd type="none" w="med" len="med"/>
+                    </a:lnL>
+                    <a:lnR w="12700" cap="flat" cmpd="sng" algn="ctr">
+                      <a:solidFill>
+                        <a:schemeClr val="tx1"/>
+                      </a:solidFill>
+                      <a:prstDash val="solid"/>
+                      <a:round/>
+                      <a:headEnd type="none" w="med" len="med"/>
+                      <a:tailEnd type="none" w="med" len="med"/>
+                    </a:lnR>
+                    <a:lnT w="12700" cap="flat" cmpd="sng" algn="ctr">
+                      <a:solidFill>
+                        <a:schemeClr val="tx1"/>
+                      </a:solidFill>
+                      <a:prstDash val="solid"/>
+                      <a:round/>
+                      <a:headEnd type="none" w="med" len="med"/>
+                      <a:tailEnd type="none" w="med" len="med"/>
+                    </a:lnT>
+                    <a:lnB w="12700" cap="flat" cmpd="sng" algn="ctr">
+                      <a:solidFill>
+                        <a:schemeClr val="tx1"/>
+                      </a:solidFill>
+                      <a:prstDash val="solid"/>
+                      <a:round/>
+                      <a:headEnd type="none" w="med" len="med"/>
+                      <a:tailEnd type="none" w="med" len="med"/>
+                    </a:lnB>
+                    <a:solidFill>
+                      <a:schemeClr val="bg1"/>
+                    </a:solidFill>
+                  </a:tcPr>
+                </a:tc>
+                <a:tc>
+                  <a:txBody>
+                    <a:bodyPr/>
+                    <a:lstStyle/>
+                    <a:p>
+                      <a:pPr>
+                        <a:lnSpc>
+                          <a:spcPct val="115000"/>
+                        </a:lnSpc>
+                        <a:spcAft>
+                          <a:spcPts val="1000"/>
+                        </a:spcAft>
+                        <a:buNone/>
+                      </a:pPr>
+                      <a:r>
+                        <a:rPr lang="en-US" sz="900" dirty="0">
+                          <a:effectLst/>
+                        </a:rPr>
+                        <a:t>Methods and benchmarks survey</a:t>
+                      </a:r>
+                      <a:endParaRPr lang="en-AE" sz="1100" dirty="0">
+                        <a:solidFill>
+                          <a:srgbClr val="000000"/>
+                        </a:solidFill>
+                        <a:effectLst/>
+                        <a:latin typeface="Calibri" panose="020F0502020204030204" pitchFamily="34" charset="0"/>
+                        <a:ea typeface="MS Mincho" panose="02020609040205080304" pitchFamily="49" charset="-128"/>
+                        <a:cs typeface="Arial" panose="020B0604020202020204" pitchFamily="34" charset="0"/>
+                      </a:endParaRPr>
+                    </a:p>
+                  </a:txBody>
+                  <a:tcPr marL="68580" marR="68580" marT="0" marB="0">
+                    <a:lnL w="12700" cap="flat" cmpd="sng" algn="ctr">
+                      <a:solidFill>
+                        <a:schemeClr val="tx1"/>
+                      </a:solidFill>
+                      <a:prstDash val="solid"/>
+                      <a:round/>
+                      <a:headEnd type="none" w="med" len="med"/>
+                      <a:tailEnd type="none" w="med" len="med"/>
+                    </a:lnL>
+                    <a:lnR w="12700" cap="flat" cmpd="sng" algn="ctr">
+                      <a:solidFill>
+                        <a:schemeClr val="tx1"/>
+                      </a:solidFill>
+                      <a:prstDash val="solid"/>
+                      <a:round/>
+                      <a:headEnd type="none" w="med" len="med"/>
+                      <a:tailEnd type="none" w="med" len="med"/>
+                    </a:lnR>
+                    <a:lnT w="12700" cap="flat" cmpd="sng" algn="ctr">
+                      <a:solidFill>
+                        <a:schemeClr val="tx1"/>
+                      </a:solidFill>
+                      <a:prstDash val="solid"/>
+                      <a:round/>
+                      <a:headEnd type="none" w="med" len="med"/>
+                      <a:tailEnd type="none" w="med" len="med"/>
+                    </a:lnT>
+                    <a:lnB w="12700" cap="flat" cmpd="sng" algn="ctr">
+                      <a:solidFill>
+                        <a:schemeClr val="tx1"/>
+                      </a:solidFill>
+                      <a:prstDash val="solid"/>
+                      <a:round/>
+                      <a:headEnd type="none" w="med" len="med"/>
+                      <a:tailEnd type="none" w="med" len="med"/>
+                    </a:lnB>
+                    <a:solidFill>
+                      <a:schemeClr val="bg1"/>
+                    </a:solidFill>
+                  </a:tcPr>
+                </a:tc>
+                <a:tc>
+                  <a:txBody>
+                    <a:bodyPr/>
+                    <a:lstStyle/>
+                    <a:p>
+                      <a:pPr>
+                        <a:lnSpc>
+                          <a:spcPct val="115000"/>
+                        </a:lnSpc>
+                        <a:spcAft>
+                          <a:spcPts val="1000"/>
+                        </a:spcAft>
+                        <a:buNone/>
+                      </a:pPr>
+                      <a:r>
+                        <a:rPr lang="en-US" sz="900" dirty="0">
+                          <a:effectLst/>
+                        </a:rPr>
+                        <a:t>No casting-photo </a:t>
+                      </a:r>
+                      <a:r>
+                        <a:rPr lang="en-US" sz="900" dirty="0" err="1">
+                          <a:effectLst/>
+                        </a:rPr>
+                        <a:t>ViT</a:t>
+                      </a:r>
+                      <a:r>
+                        <a:rPr lang="en-US" sz="900" dirty="0">
+                          <a:effectLst/>
+                        </a:rPr>
+                        <a:t> vs CNN</a:t>
+                      </a:r>
+                      <a:endParaRPr lang="en-AE" sz="1100" dirty="0">
+                        <a:solidFill>
+                          <a:srgbClr val="000000"/>
+                        </a:solidFill>
+                        <a:effectLst/>
+                        <a:latin typeface="Calibri" panose="020F0502020204030204" pitchFamily="34" charset="0"/>
+                        <a:ea typeface="MS Mincho" panose="02020609040205080304" pitchFamily="49" charset="-128"/>
+                        <a:cs typeface="Arial" panose="020B0604020202020204" pitchFamily="34" charset="0"/>
+                      </a:endParaRPr>
+                    </a:p>
+                  </a:txBody>
+                  <a:tcPr marL="68580" marR="68580" marT="0" marB="0">
+                    <a:lnL w="12700" cap="flat" cmpd="sng" algn="ctr">
+                      <a:solidFill>
+                        <a:schemeClr val="tx1"/>
+                      </a:solidFill>
+                      <a:prstDash val="solid"/>
+                      <a:round/>
+                      <a:headEnd type="none" w="med" len="med"/>
+                      <a:tailEnd type="none" w="med" len="med"/>
+                    </a:lnL>
+                    <a:lnR w="12700" cap="flat" cmpd="sng" algn="ctr">
+                      <a:solidFill>
+                        <a:schemeClr val="tx1"/>
+                      </a:solidFill>
+                      <a:prstDash val="solid"/>
+                      <a:round/>
+                      <a:headEnd type="none" w="med" len="med"/>
+                      <a:tailEnd type="none" w="med" len="med"/>
+                    </a:lnR>
+                    <a:lnT w="12700" cap="flat" cmpd="sng" algn="ctr">
+                      <a:solidFill>
+                        <a:schemeClr val="tx1"/>
+                      </a:solidFill>
+                      <a:prstDash val="solid"/>
+                      <a:round/>
+                      <a:headEnd type="none" w="med" len="med"/>
+                      <a:tailEnd type="none" w="med" len="med"/>
+                    </a:lnT>
+                    <a:lnB w="12700" cap="flat" cmpd="sng" algn="ctr">
+                      <a:solidFill>
+                        <a:schemeClr val="tx1"/>
+                      </a:solidFill>
+                      <a:prstDash val="solid"/>
+                      <a:round/>
+                      <a:headEnd type="none" w="med" len="med"/>
+                      <a:tailEnd type="none" w="med" len="med"/>
+                    </a:lnB>
+                    <a:solidFill>
+                      <a:schemeClr val="bg1"/>
+                    </a:solidFill>
+                  </a:tcPr>
+                </a:tc>
+                <a:extLst>
+                  <a:ext uri="{0D108BD9-81ED-4DB2-BD59-A6C34878D82A}">
+                    <a16:rowId xmlns:a16="http://schemas.microsoft.com/office/drawing/2014/main" val="1249519288"/>
+                  </a:ext>
+                </a:extLst>
+              </a:tr>
+              <a:tr h="338546">
+                <a:tc>
+                  <a:txBody>
+                    <a:bodyPr/>
+                    <a:lstStyle/>
+                    <a:p>
+                      <a:pPr>
+                        <a:lnSpc>
+                          <a:spcPct val="115000"/>
+                        </a:lnSpc>
+                        <a:spcAft>
+                          <a:spcPts val="1000"/>
+                        </a:spcAft>
+                        <a:buNone/>
+                      </a:pPr>
+                      <a:r>
+                        <a:rPr lang="en-US" sz="900" dirty="0">
+                          <a:solidFill>
+                            <a:schemeClr val="tx1"/>
+                          </a:solidFill>
+                          <a:effectLst/>
+                        </a:rPr>
+                        <a:t>Beyond local receptive fields: Vision transformers for real-time surface defect detection in FDM. </a:t>
+                      </a:r>
+                      <a:endParaRPr lang="en-AE" sz="1100" dirty="0">
+                        <a:solidFill>
+                          <a:schemeClr val="tx1"/>
+                        </a:solidFill>
+                        <a:effectLst/>
+                        <a:latin typeface="Calibri" panose="020F0502020204030204" pitchFamily="34" charset="0"/>
+                        <a:ea typeface="MS Mincho" panose="02020609040205080304" pitchFamily="49" charset="-128"/>
+                        <a:cs typeface="Arial" panose="020B0604020202020204" pitchFamily="34" charset="0"/>
+                      </a:endParaRPr>
+                    </a:p>
+                  </a:txBody>
+                  <a:tcPr marL="68580" marR="68580" marT="0" marB="0">
+                    <a:lnL w="12700" cap="flat" cmpd="sng" algn="ctr">
+                      <a:solidFill>
+                        <a:schemeClr val="tx1"/>
+                      </a:solidFill>
+                      <a:prstDash val="solid"/>
+                      <a:round/>
+                      <a:headEnd type="none" w="med" len="med"/>
+                      <a:tailEnd type="none" w="med" len="med"/>
+                    </a:lnL>
+                    <a:lnR w="12700" cap="flat" cmpd="sng" algn="ctr">
+                      <a:solidFill>
+                        <a:schemeClr val="tx1"/>
+                      </a:solidFill>
+                      <a:prstDash val="solid"/>
+                      <a:round/>
+                      <a:headEnd type="none" w="med" len="med"/>
+                      <a:tailEnd type="none" w="med" len="med"/>
+                    </a:lnR>
+                    <a:lnT w="12700" cap="flat" cmpd="sng" algn="ctr">
+                      <a:solidFill>
+                        <a:schemeClr val="tx1"/>
+                      </a:solidFill>
+                      <a:prstDash val="solid"/>
+                      <a:round/>
+                      <a:headEnd type="none" w="med" len="med"/>
+                      <a:tailEnd type="none" w="med" len="med"/>
+                    </a:lnT>
+                    <a:lnB w="12700" cap="flat" cmpd="sng" algn="ctr">
+                      <a:solidFill>
+                        <a:schemeClr val="tx1"/>
+                      </a:solidFill>
+                      <a:prstDash val="solid"/>
+                      <a:round/>
+                      <a:headEnd type="none" w="med" len="med"/>
+                      <a:tailEnd type="none" w="med" len="med"/>
+                    </a:lnB>
+                    <a:solidFill>
+                      <a:schemeClr val="bg1"/>
+                    </a:solidFill>
+                  </a:tcPr>
+                </a:tc>
+                <a:tc>
+                  <a:txBody>
+                    <a:bodyPr/>
+                    <a:lstStyle/>
+                    <a:p>
+                      <a:pPr>
+                        <a:lnSpc>
+                          <a:spcPct val="115000"/>
+                        </a:lnSpc>
+                        <a:spcAft>
+                          <a:spcPts val="1000"/>
+                        </a:spcAft>
+                        <a:buNone/>
+                      </a:pPr>
+                      <a:r>
+                        <a:rPr lang="en-US" sz="900" dirty="0" err="1">
+                          <a:effectLst/>
+                        </a:rPr>
+                        <a:t>ViT</a:t>
+                      </a:r>
+                      <a:r>
+                        <a:rPr lang="en-US" sz="900" dirty="0">
+                          <a:effectLst/>
+                        </a:rPr>
+                        <a:t> on FDM depth maps</a:t>
+                      </a:r>
+                      <a:endParaRPr lang="en-AE" sz="1100" dirty="0">
+                        <a:solidFill>
+                          <a:srgbClr val="000000"/>
+                        </a:solidFill>
+                        <a:effectLst/>
+                        <a:latin typeface="Calibri" panose="020F0502020204030204" pitchFamily="34" charset="0"/>
+                        <a:ea typeface="MS Mincho" panose="02020609040205080304" pitchFamily="49" charset="-128"/>
+                        <a:cs typeface="Arial" panose="020B0604020202020204" pitchFamily="34" charset="0"/>
+                      </a:endParaRPr>
+                    </a:p>
+                  </a:txBody>
+                  <a:tcPr marL="68580" marR="68580" marT="0" marB="0">
+                    <a:lnL w="12700" cap="flat" cmpd="sng" algn="ctr">
+                      <a:solidFill>
+                        <a:schemeClr val="tx1"/>
+                      </a:solidFill>
+                      <a:prstDash val="solid"/>
+                      <a:round/>
+                      <a:headEnd type="none" w="med" len="med"/>
+                      <a:tailEnd type="none" w="med" len="med"/>
+                    </a:lnL>
+                    <a:lnR w="12700" cap="flat" cmpd="sng" algn="ctr">
+                      <a:solidFill>
+                        <a:schemeClr val="tx1"/>
+                      </a:solidFill>
+                      <a:prstDash val="solid"/>
+                      <a:round/>
+                      <a:headEnd type="none" w="med" len="med"/>
+                      <a:tailEnd type="none" w="med" len="med"/>
+                    </a:lnR>
+                    <a:lnT w="12700" cap="flat" cmpd="sng" algn="ctr">
+                      <a:solidFill>
+                        <a:schemeClr val="tx1"/>
+                      </a:solidFill>
+                      <a:prstDash val="solid"/>
+                      <a:round/>
+                      <a:headEnd type="none" w="med" len="med"/>
+                      <a:tailEnd type="none" w="med" len="med"/>
+                    </a:lnT>
+                    <a:lnB w="12700" cap="flat" cmpd="sng" algn="ctr">
+                      <a:solidFill>
+                        <a:schemeClr val="tx1"/>
+                      </a:solidFill>
+                      <a:prstDash val="solid"/>
+                      <a:round/>
+                      <a:headEnd type="none" w="med" len="med"/>
+                      <a:tailEnd type="none" w="med" len="med"/>
+                    </a:lnB>
+                    <a:solidFill>
+                      <a:schemeClr val="bg1"/>
+                    </a:solidFill>
+                  </a:tcPr>
+                </a:tc>
+                <a:tc>
+                  <a:txBody>
+                    <a:bodyPr/>
+                    <a:lstStyle/>
+                    <a:p>
+                      <a:pPr>
+                        <a:lnSpc>
+                          <a:spcPct val="115000"/>
+                        </a:lnSpc>
+                        <a:spcAft>
+                          <a:spcPts val="1000"/>
+                        </a:spcAft>
+                        <a:buNone/>
+                      </a:pPr>
+                      <a:r>
+                        <a:rPr lang="en-US" sz="900" dirty="0">
+                          <a:effectLst/>
+                        </a:rPr>
+                        <a:t>Different modality; no CNN control</a:t>
+                      </a:r>
+                      <a:endParaRPr lang="en-AE" sz="1100" dirty="0">
+                        <a:solidFill>
+                          <a:srgbClr val="000000"/>
+                        </a:solidFill>
+                        <a:effectLst/>
+                        <a:latin typeface="Calibri" panose="020F0502020204030204" pitchFamily="34" charset="0"/>
+                        <a:ea typeface="MS Mincho" panose="02020609040205080304" pitchFamily="49" charset="-128"/>
+                        <a:cs typeface="Arial" panose="020B0604020202020204" pitchFamily="34" charset="0"/>
+                      </a:endParaRPr>
+                    </a:p>
+                  </a:txBody>
+                  <a:tcPr marL="68580" marR="68580" marT="0" marB="0">
+                    <a:lnL w="12700" cap="flat" cmpd="sng" algn="ctr">
+                      <a:solidFill>
+                        <a:schemeClr val="tx1"/>
+                      </a:solidFill>
+                      <a:prstDash val="solid"/>
+                      <a:round/>
+                      <a:headEnd type="none" w="med" len="med"/>
+                      <a:tailEnd type="none" w="med" len="med"/>
+                    </a:lnL>
+                    <a:lnR w="12700" cap="flat" cmpd="sng" algn="ctr">
+                      <a:solidFill>
+                        <a:schemeClr val="tx1"/>
+                      </a:solidFill>
+                      <a:prstDash val="solid"/>
+                      <a:round/>
+                      <a:headEnd type="none" w="med" len="med"/>
+                      <a:tailEnd type="none" w="med" len="med"/>
+                    </a:lnR>
+                    <a:lnT w="12700" cap="flat" cmpd="sng" algn="ctr">
+                      <a:solidFill>
+                        <a:schemeClr val="tx1"/>
+                      </a:solidFill>
+                      <a:prstDash val="solid"/>
+                      <a:round/>
+                      <a:headEnd type="none" w="med" len="med"/>
+                      <a:tailEnd type="none" w="med" len="med"/>
+                    </a:lnT>
+                    <a:lnB w="12700" cap="flat" cmpd="sng" algn="ctr">
+                      <a:solidFill>
+                        <a:schemeClr val="tx1"/>
+                      </a:solidFill>
+                      <a:prstDash val="solid"/>
+                      <a:round/>
+                      <a:headEnd type="none" w="med" len="med"/>
+                      <a:tailEnd type="none" w="med" len="med"/>
+                    </a:lnB>
+                    <a:solidFill>
+                      <a:schemeClr val="bg1"/>
+                    </a:solidFill>
+                  </a:tcPr>
+                </a:tc>
+                <a:extLst>
+                  <a:ext uri="{0D108BD9-81ED-4DB2-BD59-A6C34878D82A}">
+                    <a16:rowId xmlns:a16="http://schemas.microsoft.com/office/drawing/2014/main" val="2595467175"/>
+                  </a:ext>
+                </a:extLst>
+              </a:tr>
+              <a:tr h="512944">
+                <a:tc>
+                  <a:txBody>
+                    <a:bodyPr/>
+                    <a:lstStyle/>
+                    <a:p>
+                      <a:pPr>
+                        <a:lnSpc>
+                          <a:spcPct val="115000"/>
+                        </a:lnSpc>
+                        <a:spcAft>
+                          <a:spcPts val="1000"/>
+                        </a:spcAft>
+                        <a:buNone/>
+                      </a:pPr>
+                      <a:r>
+                        <a:rPr lang="en-US" sz="900" dirty="0">
+                          <a:solidFill>
+                            <a:schemeClr val="tx1"/>
+                          </a:solidFill>
+                          <a:effectLst/>
+                        </a:rPr>
+                        <a:t>SDA-</a:t>
+                      </a:r>
+                      <a:r>
+                        <a:rPr lang="en-US" sz="900" dirty="0" err="1">
+                          <a:solidFill>
+                            <a:schemeClr val="tx1"/>
+                          </a:solidFill>
+                          <a:effectLst/>
+                        </a:rPr>
+                        <a:t>PVTDet</a:t>
+                      </a:r>
+                      <a:r>
+                        <a:rPr lang="en-US" sz="900" dirty="0">
+                          <a:solidFill>
+                            <a:schemeClr val="tx1"/>
+                          </a:solidFill>
+                          <a:effectLst/>
+                        </a:rPr>
+                        <a:t>: A spatial-cross dual attention pyramid vision transformer detector for casting defect detection in radiography images. </a:t>
+                      </a:r>
+                      <a:endParaRPr lang="en-AE" sz="1100" dirty="0">
+                        <a:solidFill>
+                          <a:schemeClr val="tx1"/>
+                        </a:solidFill>
+                        <a:effectLst/>
+                        <a:latin typeface="Calibri" panose="020F0502020204030204" pitchFamily="34" charset="0"/>
+                        <a:ea typeface="MS Mincho" panose="02020609040205080304" pitchFamily="49" charset="-128"/>
+                        <a:cs typeface="Arial" panose="020B0604020202020204" pitchFamily="34" charset="0"/>
+                      </a:endParaRPr>
+                    </a:p>
+                  </a:txBody>
+                  <a:tcPr marL="68580" marR="68580" marT="0" marB="0">
+                    <a:lnL w="12700" cap="flat" cmpd="sng" algn="ctr">
+                      <a:solidFill>
+                        <a:schemeClr val="tx1"/>
+                      </a:solidFill>
+                      <a:prstDash val="solid"/>
+                      <a:round/>
+                      <a:headEnd type="none" w="med" len="med"/>
+                      <a:tailEnd type="none" w="med" len="med"/>
+                    </a:lnL>
+                    <a:lnR w="12700" cap="flat" cmpd="sng" algn="ctr">
+                      <a:solidFill>
+                        <a:schemeClr val="tx1"/>
+                      </a:solidFill>
+                      <a:prstDash val="solid"/>
+                      <a:round/>
+                      <a:headEnd type="none" w="med" len="med"/>
+                      <a:tailEnd type="none" w="med" len="med"/>
+                    </a:lnR>
+                    <a:lnT w="12700" cap="flat" cmpd="sng" algn="ctr">
+                      <a:solidFill>
+                        <a:schemeClr val="tx1"/>
+                      </a:solidFill>
+                      <a:prstDash val="solid"/>
+                      <a:round/>
+                      <a:headEnd type="none" w="med" len="med"/>
+                      <a:tailEnd type="none" w="med" len="med"/>
+                    </a:lnT>
+                    <a:lnB w="12700" cap="flat" cmpd="sng" algn="ctr">
+                      <a:solidFill>
+                        <a:schemeClr val="tx1"/>
+                      </a:solidFill>
+                      <a:prstDash val="solid"/>
+                      <a:round/>
+                      <a:headEnd type="none" w="med" len="med"/>
+                      <a:tailEnd type="none" w="med" len="med"/>
+                    </a:lnB>
+                    <a:solidFill>
+                      <a:schemeClr val="bg1"/>
+                    </a:solidFill>
+                  </a:tcPr>
+                </a:tc>
+                <a:tc>
+                  <a:txBody>
+                    <a:bodyPr/>
+                    <a:lstStyle/>
+                    <a:p>
+                      <a:pPr>
+                        <a:lnSpc>
+                          <a:spcPct val="115000"/>
+                        </a:lnSpc>
+                        <a:spcAft>
+                          <a:spcPts val="1000"/>
+                        </a:spcAft>
+                        <a:buNone/>
+                      </a:pPr>
+                      <a:r>
+                        <a:rPr lang="en-US" sz="900" dirty="0">
+                          <a:effectLst/>
+                        </a:rPr>
+                        <a:t>Radiography casting detection</a:t>
+                      </a:r>
+                      <a:endParaRPr lang="en-AE" sz="1100" dirty="0">
+                        <a:solidFill>
+                          <a:srgbClr val="000000"/>
+                        </a:solidFill>
+                        <a:effectLst/>
+                        <a:latin typeface="Calibri" panose="020F0502020204030204" pitchFamily="34" charset="0"/>
+                        <a:ea typeface="MS Mincho" panose="02020609040205080304" pitchFamily="49" charset="-128"/>
+                        <a:cs typeface="Arial" panose="020B0604020202020204" pitchFamily="34" charset="0"/>
+                      </a:endParaRPr>
+                    </a:p>
+                  </a:txBody>
+                  <a:tcPr marL="68580" marR="68580" marT="0" marB="0">
+                    <a:lnL w="12700" cap="flat" cmpd="sng" algn="ctr">
+                      <a:solidFill>
+                        <a:schemeClr val="tx1"/>
+                      </a:solidFill>
+                      <a:prstDash val="solid"/>
+                      <a:round/>
+                      <a:headEnd type="none" w="med" len="med"/>
+                      <a:tailEnd type="none" w="med" len="med"/>
+                    </a:lnL>
+                    <a:lnR w="12700" cap="flat" cmpd="sng" algn="ctr">
+                      <a:solidFill>
+                        <a:schemeClr val="tx1"/>
+                      </a:solidFill>
+                      <a:prstDash val="solid"/>
+                      <a:round/>
+                      <a:headEnd type="none" w="med" len="med"/>
+                      <a:tailEnd type="none" w="med" len="med"/>
+                    </a:lnR>
+                    <a:lnT w="12700" cap="flat" cmpd="sng" algn="ctr">
+                      <a:solidFill>
+                        <a:schemeClr val="tx1"/>
+                      </a:solidFill>
+                      <a:prstDash val="solid"/>
+                      <a:round/>
+                      <a:headEnd type="none" w="med" len="med"/>
+                      <a:tailEnd type="none" w="med" len="med"/>
+                    </a:lnT>
+                    <a:lnB w="12700" cap="flat" cmpd="sng" algn="ctr">
+                      <a:solidFill>
+                        <a:schemeClr val="tx1"/>
+                      </a:solidFill>
+                      <a:prstDash val="solid"/>
+                      <a:round/>
+                      <a:headEnd type="none" w="med" len="med"/>
+                      <a:tailEnd type="none" w="med" len="med"/>
+                    </a:lnB>
+                    <a:solidFill>
+                      <a:schemeClr val="bg1"/>
+                    </a:solidFill>
+                  </a:tcPr>
+                </a:tc>
+                <a:tc>
+                  <a:txBody>
+                    <a:bodyPr/>
+                    <a:lstStyle/>
+                    <a:p>
+                      <a:pPr>
+                        <a:lnSpc>
+                          <a:spcPct val="115000"/>
+                        </a:lnSpc>
+                        <a:spcAft>
+                          <a:spcPts val="1000"/>
+                        </a:spcAft>
+                        <a:buNone/>
+                      </a:pPr>
+                      <a:r>
+                        <a:rPr lang="en-US" sz="900" dirty="0">
+                          <a:effectLst/>
+                        </a:rPr>
+                        <a:t>Localization, not photo classification</a:t>
+                      </a:r>
+                      <a:endParaRPr lang="en-AE" sz="1100" dirty="0">
+                        <a:solidFill>
+                          <a:srgbClr val="000000"/>
+                        </a:solidFill>
+                        <a:effectLst/>
+                        <a:latin typeface="Calibri" panose="020F0502020204030204" pitchFamily="34" charset="0"/>
+                        <a:ea typeface="MS Mincho" panose="02020609040205080304" pitchFamily="49" charset="-128"/>
+                        <a:cs typeface="Arial" panose="020B0604020202020204" pitchFamily="34" charset="0"/>
+                      </a:endParaRPr>
+                    </a:p>
+                  </a:txBody>
+                  <a:tcPr marL="68580" marR="68580" marT="0" marB="0">
+                    <a:lnL w="12700" cap="flat" cmpd="sng" algn="ctr">
+                      <a:solidFill>
+                        <a:schemeClr val="tx1"/>
+                      </a:solidFill>
+                      <a:prstDash val="solid"/>
+                      <a:round/>
+                      <a:headEnd type="none" w="med" len="med"/>
+                      <a:tailEnd type="none" w="med" len="med"/>
+                    </a:lnL>
+                    <a:lnR w="12700" cap="flat" cmpd="sng" algn="ctr">
+                      <a:solidFill>
+                        <a:schemeClr val="tx1"/>
+                      </a:solidFill>
+                      <a:prstDash val="solid"/>
+                      <a:round/>
+                      <a:headEnd type="none" w="med" len="med"/>
+                      <a:tailEnd type="none" w="med" len="med"/>
+                    </a:lnR>
+                    <a:lnT w="12700" cap="flat" cmpd="sng" algn="ctr">
+                      <a:solidFill>
+                        <a:schemeClr val="tx1"/>
+                      </a:solidFill>
+                      <a:prstDash val="solid"/>
+                      <a:round/>
+                      <a:headEnd type="none" w="med" len="med"/>
+                      <a:tailEnd type="none" w="med" len="med"/>
+                    </a:lnT>
+                    <a:lnB w="12700" cap="flat" cmpd="sng" algn="ctr">
+                      <a:solidFill>
+                        <a:schemeClr val="tx1"/>
+                      </a:solidFill>
+                      <a:prstDash val="solid"/>
+                      <a:round/>
+                      <a:headEnd type="none" w="med" len="med"/>
+                      <a:tailEnd type="none" w="med" len="med"/>
+                    </a:lnB>
+                    <a:solidFill>
+                      <a:schemeClr val="bg1"/>
+                    </a:solidFill>
+                  </a:tcPr>
+                </a:tc>
+                <a:extLst>
+                  <a:ext uri="{0D108BD9-81ED-4DB2-BD59-A6C34878D82A}">
+                    <a16:rowId xmlns:a16="http://schemas.microsoft.com/office/drawing/2014/main" val="3651431798"/>
+                  </a:ext>
+                </a:extLst>
+              </a:tr>
+              <a:tr h="338546">
+                <a:tc>
+                  <a:txBody>
+                    <a:bodyPr/>
+                    <a:lstStyle/>
+                    <a:p>
+                      <a:pPr>
+                        <a:lnSpc>
+                          <a:spcPct val="115000"/>
+                        </a:lnSpc>
+                        <a:spcAft>
+                          <a:spcPts val="1000"/>
+                        </a:spcAft>
+                        <a:buNone/>
+                      </a:pPr>
+                      <a:r>
+                        <a:rPr lang="en-US" sz="900" dirty="0">
+                          <a:solidFill>
+                            <a:schemeClr val="tx1"/>
+                          </a:solidFill>
+                          <a:effectLst/>
+                        </a:rPr>
+                        <a:t>Smart casting. </a:t>
+                      </a:r>
+                      <a:endParaRPr lang="en-AE" sz="1100" dirty="0">
+                        <a:solidFill>
+                          <a:schemeClr val="tx1"/>
+                        </a:solidFill>
+                        <a:effectLst/>
+                        <a:latin typeface="Calibri" panose="020F0502020204030204" pitchFamily="34" charset="0"/>
+                        <a:ea typeface="MS Mincho" panose="02020609040205080304" pitchFamily="49" charset="-128"/>
+                        <a:cs typeface="Arial" panose="020B0604020202020204" pitchFamily="34" charset="0"/>
+                      </a:endParaRPr>
+                    </a:p>
+                  </a:txBody>
+                  <a:tcPr marL="68580" marR="68580" marT="0" marB="0">
+                    <a:lnL w="12700" cap="flat" cmpd="sng" algn="ctr">
+                      <a:solidFill>
+                        <a:schemeClr val="tx1"/>
+                      </a:solidFill>
+                      <a:prstDash val="solid"/>
+                      <a:round/>
+                      <a:headEnd type="none" w="med" len="med"/>
+                      <a:tailEnd type="none" w="med" len="med"/>
+                    </a:lnL>
+                    <a:lnR w="12700" cap="flat" cmpd="sng" algn="ctr">
+                      <a:solidFill>
+                        <a:schemeClr val="tx1"/>
+                      </a:solidFill>
+                      <a:prstDash val="solid"/>
+                      <a:round/>
+                      <a:headEnd type="none" w="med" len="med"/>
+                      <a:tailEnd type="none" w="med" len="med"/>
+                    </a:lnR>
+                    <a:lnT w="12700" cap="flat" cmpd="sng" algn="ctr">
+                      <a:solidFill>
+                        <a:schemeClr val="tx1"/>
+                      </a:solidFill>
+                      <a:prstDash val="solid"/>
+                      <a:round/>
+                      <a:headEnd type="none" w="med" len="med"/>
+                      <a:tailEnd type="none" w="med" len="med"/>
+                    </a:lnT>
+                    <a:lnB w="12700" cap="flat" cmpd="sng" algn="ctr">
+                      <a:solidFill>
+                        <a:schemeClr val="tx1"/>
+                      </a:solidFill>
+                      <a:prstDash val="solid"/>
+                      <a:round/>
+                      <a:headEnd type="none" w="med" len="med"/>
+                      <a:tailEnd type="none" w="med" len="med"/>
+                    </a:lnB>
+                    <a:solidFill>
+                      <a:schemeClr val="bg1"/>
+                    </a:solidFill>
+                  </a:tcPr>
+                </a:tc>
+                <a:tc>
+                  <a:txBody>
+                    <a:bodyPr/>
+                    <a:lstStyle/>
+                    <a:p>
+                      <a:pPr>
+                        <a:lnSpc>
+                          <a:spcPct val="115000"/>
+                        </a:lnSpc>
+                        <a:spcAft>
+                          <a:spcPts val="1000"/>
+                        </a:spcAft>
+                        <a:buNone/>
+                      </a:pPr>
+                      <a:r>
+                        <a:rPr lang="en-US" sz="900" dirty="0">
+                          <a:effectLst/>
+                        </a:rPr>
+                        <a:t>Smart casting impeller CNN/</a:t>
+                      </a:r>
+                      <a:r>
+                        <a:rPr lang="en-US" sz="900" dirty="0" err="1">
+                          <a:effectLst/>
+                        </a:rPr>
+                        <a:t>ViT</a:t>
+                      </a:r>
+                      <a:endParaRPr lang="en-AE" sz="1100" dirty="0">
+                        <a:solidFill>
+                          <a:srgbClr val="000000"/>
+                        </a:solidFill>
+                        <a:effectLst/>
+                        <a:latin typeface="Calibri" panose="020F0502020204030204" pitchFamily="34" charset="0"/>
+                        <a:ea typeface="MS Mincho" panose="02020609040205080304" pitchFamily="49" charset="-128"/>
+                        <a:cs typeface="Arial" panose="020B0604020202020204" pitchFamily="34" charset="0"/>
+                      </a:endParaRPr>
+                    </a:p>
+                  </a:txBody>
+                  <a:tcPr marL="68580" marR="68580" marT="0" marB="0">
+                    <a:lnL w="12700" cap="flat" cmpd="sng" algn="ctr">
+                      <a:solidFill>
+                        <a:schemeClr val="tx1"/>
+                      </a:solidFill>
+                      <a:prstDash val="solid"/>
+                      <a:round/>
+                      <a:headEnd type="none" w="med" len="med"/>
+                      <a:tailEnd type="none" w="med" len="med"/>
+                    </a:lnL>
+                    <a:lnR w="12700" cap="flat" cmpd="sng" algn="ctr">
+                      <a:solidFill>
+                        <a:schemeClr val="tx1"/>
+                      </a:solidFill>
+                      <a:prstDash val="solid"/>
+                      <a:round/>
+                      <a:headEnd type="none" w="med" len="med"/>
+                      <a:tailEnd type="none" w="med" len="med"/>
+                    </a:lnR>
+                    <a:lnT w="12700" cap="flat" cmpd="sng" algn="ctr">
+                      <a:solidFill>
+                        <a:schemeClr val="tx1"/>
+                      </a:solidFill>
+                      <a:prstDash val="solid"/>
+                      <a:round/>
+                      <a:headEnd type="none" w="med" len="med"/>
+                      <a:tailEnd type="none" w="med" len="med"/>
+                    </a:lnT>
+                    <a:lnB w="12700" cap="flat" cmpd="sng" algn="ctr">
+                      <a:solidFill>
+                        <a:schemeClr val="tx1"/>
+                      </a:solidFill>
+                      <a:prstDash val="solid"/>
+                      <a:round/>
+                      <a:headEnd type="none" w="med" len="med"/>
+                      <a:tailEnd type="none" w="med" len="med"/>
+                    </a:lnB>
+                    <a:solidFill>
+                      <a:schemeClr val="bg1"/>
+                    </a:solidFill>
+                  </a:tcPr>
+                </a:tc>
+                <a:tc>
+                  <a:txBody>
+                    <a:bodyPr/>
+                    <a:lstStyle/>
+                    <a:p>
+                      <a:pPr>
+                        <a:lnSpc>
+                          <a:spcPct val="115000"/>
+                        </a:lnSpc>
+                        <a:spcAft>
+                          <a:spcPts val="1000"/>
+                        </a:spcAft>
+                        <a:buNone/>
+                      </a:pPr>
+                      <a:r>
+                        <a:rPr lang="en-US" sz="900" dirty="0">
+                          <a:effectLst/>
+                        </a:rPr>
+                        <a:t>No data-efficiency or cost table</a:t>
+                      </a:r>
+                      <a:endParaRPr lang="en-AE" sz="1100" dirty="0">
+                        <a:solidFill>
+                          <a:srgbClr val="000000"/>
+                        </a:solidFill>
+                        <a:effectLst/>
+                        <a:latin typeface="Calibri" panose="020F0502020204030204" pitchFamily="34" charset="0"/>
+                        <a:ea typeface="MS Mincho" panose="02020609040205080304" pitchFamily="49" charset="-128"/>
+                        <a:cs typeface="Arial" panose="020B0604020202020204" pitchFamily="34" charset="0"/>
+                      </a:endParaRPr>
+                    </a:p>
+                  </a:txBody>
+                  <a:tcPr marL="68580" marR="68580" marT="0" marB="0">
+                    <a:lnL w="12700" cap="flat" cmpd="sng" algn="ctr">
+                      <a:solidFill>
+                        <a:schemeClr val="tx1"/>
+                      </a:solidFill>
+                      <a:prstDash val="solid"/>
+                      <a:round/>
+                      <a:headEnd type="none" w="med" len="med"/>
+                      <a:tailEnd type="none" w="med" len="med"/>
+                    </a:lnL>
+                    <a:lnR w="12700" cap="flat" cmpd="sng" algn="ctr">
+                      <a:solidFill>
+                        <a:schemeClr val="tx1"/>
+                      </a:solidFill>
+                      <a:prstDash val="solid"/>
+                      <a:round/>
+                      <a:headEnd type="none" w="med" len="med"/>
+                      <a:tailEnd type="none" w="med" len="med"/>
+                    </a:lnR>
+                    <a:lnT w="12700" cap="flat" cmpd="sng" algn="ctr">
+                      <a:solidFill>
+                        <a:schemeClr val="tx1"/>
+                      </a:solidFill>
+                      <a:prstDash val="solid"/>
+                      <a:round/>
+                      <a:headEnd type="none" w="med" len="med"/>
+                      <a:tailEnd type="none" w="med" len="med"/>
+                    </a:lnT>
+                    <a:lnB w="12700" cap="flat" cmpd="sng" algn="ctr">
+                      <a:solidFill>
+                        <a:schemeClr val="tx1"/>
+                      </a:solidFill>
+                      <a:prstDash val="solid"/>
+                      <a:round/>
+                      <a:headEnd type="none" w="med" len="med"/>
+                      <a:tailEnd type="none" w="med" len="med"/>
+                    </a:lnB>
+                    <a:solidFill>
+                      <a:schemeClr val="bg1"/>
+                    </a:solidFill>
+                  </a:tcPr>
+                </a:tc>
+                <a:extLst>
+                  <a:ext uri="{0D108BD9-81ED-4DB2-BD59-A6C34878D82A}">
+                    <a16:rowId xmlns:a16="http://schemas.microsoft.com/office/drawing/2014/main" val="1069067991"/>
+                  </a:ext>
+                </a:extLst>
+              </a:tr>
+            </a:tbl>
+          </a:graphicData>
+        </a:graphic>
+      </p:graphicFrame>
+    </p:spTree>
+    <p:extLst>
+      <p:ext uri="{BB962C8B-B14F-4D97-AF65-F5344CB8AC3E}">
+        <p14:creationId xmlns:p14="http://schemas.microsoft.com/office/powerpoint/2010/main" val="3333902659"/>
+      </p:ext>
+    </p:extLst>
+  </p:cSld>
+  <p:clrMapOvr>
+    <a:masterClrMapping/>
+  </p:clrMapOvr>
+</p:sld>
+</file>
+
+<file path=ppt/slides/slide4.xml><?xml version="1.0" encoding="utf-8"?>
+<p:sld xmlns:a="http://schemas.openxmlformats.org/drawingml/2006/main" xmlns:r="http://schemas.openxmlformats.org/officeDocument/2006/relationships" xmlns:p="http://schemas.openxmlformats.org/presentationml/2006/main">
   <p:cSld name="Slide 3">
     <p:spTree>
       <p:nvGrpSpPr>
@@ -1984,7 +9626,7 @@
         </p:nvSpPr>
         <p:spPr>
           <a:xfrm>
-            <a:off x="457200" y="320040"/>
+            <a:off x="300445" y="250154"/>
             <a:ext cx="8229600" cy="640080"/>
           </a:xfrm>
           <a:prstGeom prst="rect">
@@ -2020,7 +9662,7 @@
         </p:nvSpPr>
         <p:spPr>
           <a:xfrm>
-            <a:off x="457200" y="1143000"/>
+            <a:off x="457200" y="1031965"/>
             <a:ext cx="3931920" cy="320040"/>
           </a:xfrm>
           <a:prstGeom prst="rect">
@@ -2056,7 +9698,7 @@
         </p:nvSpPr>
         <p:spPr>
           <a:xfrm>
-            <a:off x="4826725" y="1143000"/>
+            <a:off x="4826725" y="1031965"/>
             <a:ext cx="3931920" cy="320040"/>
           </a:xfrm>
           <a:prstGeom prst="rect">
@@ -2100,7 +9742,7 @@
         </p:blipFill>
         <p:spPr>
           <a:xfrm>
-            <a:off x="457200" y="1554480"/>
+            <a:off x="457200" y="1443445"/>
             <a:ext cx="1554480" cy="1554480"/>
           </a:xfrm>
           <a:prstGeom prst="rect">
@@ -2124,7 +9766,7 @@
         </p:blipFill>
         <p:spPr>
           <a:xfrm>
-            <a:off x="2641962" y="1554480"/>
+            <a:off x="2641962" y="1443445"/>
             <a:ext cx="1554480" cy="1554480"/>
           </a:xfrm>
           <a:prstGeom prst="rect">
@@ -2140,7 +9782,7 @@
         </p:nvSpPr>
         <p:spPr>
           <a:xfrm>
-            <a:off x="457200" y="3136392"/>
+            <a:off x="457200" y="3025357"/>
             <a:ext cx="1554480" cy="228600"/>
           </a:xfrm>
           <a:prstGeom prst="rect">
@@ -2176,7 +9818,7 @@
         </p:nvSpPr>
         <p:spPr>
           <a:xfrm>
-            <a:off x="2641962" y="3136392"/>
+            <a:off x="2641962" y="3025357"/>
             <a:ext cx="1554480" cy="228600"/>
           </a:xfrm>
           <a:prstGeom prst="rect">
@@ -2212,7 +9854,7 @@
         </p:nvSpPr>
         <p:spPr>
           <a:xfrm>
-            <a:off x="457200" y="3474720"/>
+            <a:off x="457200" y="3517175"/>
             <a:ext cx="3931920" cy="1188720"/>
           </a:xfrm>
           <a:prstGeom prst="rect">
@@ -2233,14 +9875,14 @@
               <a:buChar char="•"/>
             </a:pPr>
             <a:r>
-              <a:rPr lang="en-US" sz="1400" dirty="0">
+              <a:rPr lang="en-US" sz="1200" dirty="0">
                 <a:solidFill>
                   <a:schemeClr val="tx2"/>
                 </a:solidFill>
               </a:rPr>
-              <a:t>Kaggle Casting Product Image Data (CC BY-SA 4.0)</a:t>
-            </a:r>
-            <a:endParaRPr lang="en-US" sz="1400" dirty="0"/>
+              <a:t>Used Kaggle Casting Product Image Data (CC BY-SA 4.0).</a:t>
+            </a:r>
+            <a:endParaRPr lang="en-US" sz="1200" dirty="0"/>
           </a:p>
           <a:p>
             <a:pPr marL="342900" indent="-342900">
@@ -2251,14 +9893,14 @@
               <a:buChar char="•"/>
             </a:pPr>
             <a:r>
-              <a:rPr lang="en-US" sz="1400" dirty="0">
+              <a:rPr lang="en-US" sz="1200" dirty="0">
                 <a:solidFill>
                   <a:schemeClr val="tx2"/>
                 </a:solidFill>
               </a:rPr>
-              <a:t>Train pool 5,638, validation 995, Test 715 (262 acceptable, 453 defective)</a:t>
-            </a:r>
-            <a:endParaRPr lang="en-US" sz="1400" dirty="0"/>
+              <a:t>Data split: Train pool 5,638, validation 995, Test 715 (262 acceptable, 453 defective).</a:t>
+            </a:r>
+            <a:endParaRPr lang="en-US" sz="1200" dirty="0"/>
           </a:p>
           <a:p>
             <a:pPr marL="342900" indent="-342900">
@@ -2269,14 +9911,14 @@
               <a:buChar char="•"/>
             </a:pPr>
             <a:r>
-              <a:rPr lang="en-US" sz="1400" dirty="0">
+              <a:rPr lang="en-US" sz="1200" dirty="0">
                 <a:solidFill>
                   <a:schemeClr val="tx2"/>
                 </a:solidFill>
               </a:rPr>
               <a:t>Augmented copies grouped by filename to prevent leakage.</a:t>
             </a:r>
-            <a:endParaRPr lang="en-US" sz="1400" dirty="0"/>
+            <a:endParaRPr lang="en-US" sz="1200" dirty="0"/>
           </a:p>
         </p:txBody>
       </p:sp>
@@ -2288,7 +9930,7 @@
         </p:nvSpPr>
         <p:spPr>
           <a:xfrm>
-            <a:off x="4826725" y="1741932"/>
+            <a:off x="4826724" y="1630897"/>
             <a:ext cx="3931920" cy="3017520"/>
           </a:xfrm>
           <a:prstGeom prst="rect">
@@ -2413,7 +10055,7 @@
             <a:pPr algn="r"/>
             <a:fld id="{F7021451-1387-4CA6-816F-3879F97B5CBC}" type="slidenum">
               <a:rPr lang="en-US" b="0"/>
-              <a:t>3</a:t>
+              <a:t>4</a:t>
             </a:fld>
             <a:endParaRPr lang="en-US"/>
           </a:p>
@@ -2427,7 +10069,7 @@
 </p:sld>
 </file>
 
-<file path=ppt/slides/slide4.xml><?xml version="1.0" encoding="utf-8"?>
+<file path=ppt/slides/slide5.xml><?xml version="1.0" encoding="utf-8"?>
 <p:sld xmlns:a="http://schemas.openxmlformats.org/drawingml/2006/main" xmlns:r="http://schemas.openxmlformats.org/officeDocument/2006/relationships" xmlns:p="http://schemas.openxmlformats.org/presentationml/2006/main">
   <p:cSld name="Slide 4">
     <p:spTree>
@@ -2456,7 +10098,7 @@
         </p:nvSpPr>
         <p:spPr>
           <a:xfrm>
-            <a:off x="457200" y="320040"/>
+            <a:off x="457200" y="231866"/>
             <a:ext cx="8229600" cy="640080"/>
           </a:xfrm>
           <a:prstGeom prst="rect">
@@ -2492,7 +10134,7 @@
         </p:nvSpPr>
         <p:spPr>
           <a:xfrm>
-            <a:off x="457200" y="1188720"/>
+            <a:off x="457200" y="986899"/>
             <a:ext cx="8229600" cy="365760"/>
           </a:xfrm>
           <a:prstGeom prst="rect">
@@ -2529,13 +10171,13 @@
           <p:nvPr>
             <p:extLst>
               <p:ext uri="{D42A27DB-BD31-4B8C-83A1-F6EECF244321}">
-                <p14:modId xmlns:p14="http://schemas.microsoft.com/office/powerpoint/2010/main" val="3172979401"/>
+                <p14:modId xmlns:p14="http://schemas.microsoft.com/office/powerpoint/2010/main" val="2841424107"/>
               </p:ext>
             </p:extLst>
           </p:nvPr>
         </p:nvGraphicFramePr>
         <p:xfrm>
-          <a:off x="457200" y="1737360"/>
+          <a:off x="457200" y="1724297"/>
           <a:ext cx="5486400" cy="2432304"/>
         </p:xfrm>
         <a:graphic>
@@ -5759,7 +13401,7 @@
                   <a:schemeClr val="tx2"/>
                 </a:solidFill>
               </a:rPr>
-              <a:t>1–3 missed defects per run</a:t>
+              <a:t>1–3 missed defects per run.</a:t>
             </a:r>
             <a:endParaRPr lang="en-US" sz="1400" dirty="0"/>
           </a:p>
@@ -5804,7 +13446,7 @@
             <a:pPr algn="r"/>
             <a:fld id="{F7021451-1387-4CA6-816F-3879F97B5CBC}" type="slidenum">
               <a:rPr lang="en-US" b="0"/>
-              <a:t>4</a:t>
+              <a:t>5</a:t>
             </a:fld>
             <a:endParaRPr lang="en-US"/>
           </a:p>
@@ -5818,7 +13460,7 @@
 </p:sld>
 </file>
 
-<file path=ppt/slides/slide5.xml><?xml version="1.0" encoding="utf-8"?>
+<file path=ppt/slides/slide6.xml><?xml version="1.0" encoding="utf-8"?>
 <p:sld xmlns:a="http://schemas.openxmlformats.org/drawingml/2006/main" xmlns:r="http://schemas.openxmlformats.org/officeDocument/2006/relationships" xmlns:p="http://schemas.openxmlformats.org/presentationml/2006/main">
   <p:cSld name="Slide 5">
     <p:spTree>
@@ -6066,7 +13708,7 @@
         </p:nvSpPr>
         <p:spPr>
           <a:xfrm>
-            <a:off x="5669280" y="3840480"/>
+            <a:off x="5845629" y="3694176"/>
             <a:ext cx="3017520" cy="548640"/>
           </a:xfrm>
           <a:prstGeom prst="rect">
@@ -6150,7 +13792,7 @@
             <a:pPr algn="r"/>
             <a:fld id="{F7021451-1387-4CA6-816F-3879F97B5CBC}" type="slidenum">
               <a:rPr lang="en-US" b="0"/>
-              <a:t>5</a:t>
+              <a:t>6</a:t>
             </a:fld>
             <a:endParaRPr lang="en-US"/>
           </a:p>
@@ -6164,7 +13806,7 @@
 </p:sld>
 </file>
 
-<file path=ppt/slides/slide6.xml><?xml version="1.0" encoding="utf-8"?>
+<file path=ppt/slides/slide7.xml><?xml version="1.0" encoding="utf-8"?>
 <p:sld xmlns:a="http://schemas.openxmlformats.org/drawingml/2006/main" xmlns:r="http://schemas.openxmlformats.org/officeDocument/2006/relationships" xmlns:p="http://schemas.openxmlformats.org/presentationml/2006/main">
   <p:cSld name="Slide 6">
     <p:spTree>
@@ -6650,7 +14292,7 @@
             <a:pPr algn="r"/>
             <a:fld id="{F7021451-1387-4CA6-816F-3879F97B5CBC}" type="slidenum">
               <a:rPr lang="en-US" b="0"/>
-              <a:t>6</a:t>
+              <a:t>7</a:t>
             </a:fld>
             <a:endParaRPr lang="en-US"/>
           </a:p>
@@ -6664,7 +14306,7 @@
 </p:sld>
 </file>
 
-<file path=ppt/slides/slide7.xml><?xml version="1.0" encoding="utf-8"?>
+<file path=ppt/slides/slide8.xml><?xml version="1.0" encoding="utf-8"?>
 <p:sld xmlns:a="http://schemas.openxmlformats.org/drawingml/2006/main" xmlns:r="http://schemas.openxmlformats.org/officeDocument/2006/relationships" xmlns:p="http://schemas.openxmlformats.org/presentationml/2006/main">
   <p:cSld name="Slide 7">
     <p:spTree>
@@ -6857,7 +14499,7 @@
             <a:pPr algn="r"/>
             <a:fld id="{F7021451-1387-4CA6-816F-3879F97B5CBC}" type="slidenum">
               <a:rPr lang="en-US" b="0"/>
-              <a:t>7</a:t>
+              <a:t>8</a:t>
             </a:fld>
             <a:endParaRPr lang="en-US"/>
           </a:p>
@@ -7167,6 +14809,262 @@
 </file>
 
 <file path=ppt/theme/theme2.xml><?xml version="1.0" encoding="utf-8"?>
+<a:theme xmlns:a="http://schemas.openxmlformats.org/drawingml/2006/main" name="Mesh">
+  <a:themeElements>
+    <a:clrScheme name="Mesh">
+      <a:dk1>
+        <a:sysClr val="windowText" lastClr="000000"/>
+      </a:dk1>
+      <a:lt1>
+        <a:sysClr val="window" lastClr="FFFFFF"/>
+      </a:lt1>
+      <a:dk2>
+        <a:srgbClr val="363D46"/>
+      </a:dk2>
+      <a:lt2>
+        <a:srgbClr val="EBEBEB"/>
+      </a:lt2>
+      <a:accent1>
+        <a:srgbClr val="6F6F6F"/>
+      </a:accent1>
+      <a:accent2>
+        <a:srgbClr val="BFBFA5"/>
+      </a:accent2>
+      <a:accent3>
+        <a:srgbClr val="DCD084"/>
+      </a:accent3>
+      <a:accent4>
+        <a:srgbClr val="E7BF5F"/>
+      </a:accent4>
+      <a:accent5>
+        <a:srgbClr val="E9A039"/>
+      </a:accent5>
+      <a:accent6>
+        <a:srgbClr val="CF7133"/>
+      </a:accent6>
+      <a:hlink>
+        <a:srgbClr val="F28943"/>
+      </a:hlink>
+      <a:folHlink>
+        <a:srgbClr val="F1B76C"/>
+      </a:folHlink>
+    </a:clrScheme>
+    <a:fontScheme name="Mesh">
+      <a:majorFont>
+        <a:latin typeface="Century Gothic" panose="020B0502020202020204"/>
+        <a:ea typeface=""/>
+        <a:cs typeface=""/>
+        <a:font script="Jpan" typeface="ＭＳ ゴシック"/>
+        <a:font script="Hang" typeface="맑은 고딕"/>
+        <a:font script="Hans" typeface="宋体"/>
+        <a:font script="Hant" typeface="新細明體"/>
+        <a:font script="Arab" typeface="Tahoma"/>
+        <a:font script="Hebr" typeface="Gisha"/>
+        <a:font script="Thai" typeface="DilleniaUPC"/>
+        <a:font script="Ethi" typeface="Nyala"/>
+        <a:font script="Beng" typeface="Vrinda"/>
+        <a:font script="Gujr" typeface="Shruti"/>
+        <a:font script="Khmr" typeface="DaunPenh"/>
+        <a:font script="Knda" typeface="Tunga"/>
+        <a:font script="Guru" typeface="Raavi"/>
+        <a:font script="Cans" typeface="Euphemia"/>
+        <a:font script="Cher" typeface="Plantagenet Cherokee"/>
+        <a:font script="Yiii" typeface="Microsoft Yi Baiti"/>
+        <a:font script="Tibt" typeface="Microsoft Himalaya"/>
+        <a:font script="Thaa" typeface="MV Boli"/>
+        <a:font script="Deva" typeface="Mangal"/>
+        <a:font script="Telu" typeface="Gautami"/>
+        <a:font script="Taml" typeface="Latha"/>
+        <a:font script="Syrc" typeface="Estrangelo Edessa"/>
+        <a:font script="Orya" typeface="Kalinga"/>
+        <a:font script="Mlym" typeface="Kartika"/>
+        <a:font script="Laoo" typeface="DokChampa"/>
+        <a:font script="Sinh" typeface="Iskoola Pota"/>
+        <a:font script="Mong" typeface="Mongolian Baiti"/>
+        <a:font script="Viet" typeface="Tahoma"/>
+        <a:font script="Uigh" typeface="Microsoft Uighur"/>
+        <a:font script="Geor" typeface="Sylfaen"/>
+      </a:majorFont>
+      <a:minorFont>
+        <a:latin typeface="Century Gothic" panose="020B0502020202020204"/>
+        <a:ea typeface=""/>
+        <a:cs typeface=""/>
+        <a:font script="Jpan" typeface="ＭＳ ゴシック"/>
+        <a:font script="Hang" typeface="맑은 고딕"/>
+        <a:font script="Hans" typeface="宋体"/>
+        <a:font script="Hant" typeface="新細明體"/>
+        <a:font script="Arab" typeface="Tahoma"/>
+        <a:font script="Hebr" typeface="Gisha"/>
+        <a:font script="Thai" typeface="DilleniaUPC"/>
+        <a:font script="Ethi" typeface="Nyala"/>
+        <a:font script="Beng" typeface="Vrinda"/>
+        <a:font script="Gujr" typeface="Shruti"/>
+        <a:font script="Khmr" typeface="DaunPenh"/>
+        <a:font script="Knda" typeface="Tunga"/>
+        <a:font script="Guru" typeface="Raavi"/>
+        <a:font script="Cans" typeface="Euphemia"/>
+        <a:font script="Cher" typeface="Plantagenet Cherokee"/>
+        <a:font script="Yiii" typeface="Microsoft Yi Baiti"/>
+        <a:font script="Tibt" typeface="Microsoft Himalaya"/>
+        <a:font script="Thaa" typeface="MV Boli"/>
+        <a:font script="Deva" typeface="Mangal"/>
+        <a:font script="Telu" typeface="Gautami"/>
+        <a:font script="Taml" typeface="Latha"/>
+        <a:font script="Syrc" typeface="Estrangelo Edessa"/>
+        <a:font script="Orya" typeface="Kalinga"/>
+        <a:font script="Mlym" typeface="Kartika"/>
+        <a:font script="Laoo" typeface="DokChampa"/>
+        <a:font script="Sinh" typeface="Iskoola Pota"/>
+        <a:font script="Mong" typeface="Mongolian Baiti"/>
+        <a:font script="Viet" typeface="Verdana"/>
+        <a:font script="Uigh" typeface="Microsoft Uighur"/>
+        <a:font script="Geor" typeface="Sylfaen"/>
+      </a:minorFont>
+    </a:fontScheme>
+    <a:fmtScheme name="Mesh">
+      <a:fillStyleLst>
+        <a:solidFill>
+          <a:schemeClr val="phClr"/>
+        </a:solidFill>
+        <a:gradFill rotWithShape="1">
+          <a:gsLst>
+            <a:gs pos="0">
+              <a:schemeClr val="phClr">
+                <a:tint val="60000"/>
+                <a:lumMod val="110000"/>
+              </a:schemeClr>
+            </a:gs>
+            <a:gs pos="100000">
+              <a:schemeClr val="phClr">
+                <a:tint val="82000"/>
+              </a:schemeClr>
+            </a:gs>
+          </a:gsLst>
+          <a:lin ang="5400000" scaled="0"/>
+        </a:gradFill>
+        <a:gradFill rotWithShape="1">
+          <a:gsLst>
+            <a:gs pos="0">
+              <a:schemeClr val="phClr">
+                <a:tint val="96000"/>
+                <a:lumMod val="104000"/>
+              </a:schemeClr>
+            </a:gs>
+            <a:gs pos="100000">
+              <a:schemeClr val="phClr">
+                <a:shade val="84000"/>
+                <a:lumMod val="84000"/>
+              </a:schemeClr>
+            </a:gs>
+          </a:gsLst>
+          <a:lin ang="5400000" scaled="0"/>
+        </a:gradFill>
+      </a:fillStyleLst>
+      <a:lnStyleLst>
+        <a:ln w="9525" cap="rnd" cmpd="sng" algn="ctr">
+          <a:solidFill>
+            <a:schemeClr val="phClr"/>
+          </a:solidFill>
+          <a:prstDash val="solid"/>
+        </a:ln>
+        <a:ln w="19050" cap="rnd" cmpd="sng" algn="ctr">
+          <a:solidFill>
+            <a:schemeClr val="phClr"/>
+          </a:solidFill>
+          <a:prstDash val="solid"/>
+        </a:ln>
+        <a:ln w="25400" cap="rnd" cmpd="sng" algn="ctr">
+          <a:solidFill>
+            <a:schemeClr val="phClr"/>
+          </a:solidFill>
+          <a:prstDash val="solid"/>
+        </a:ln>
+      </a:lnStyleLst>
+      <a:effectStyleLst>
+        <a:effectStyle>
+          <a:effectLst/>
+        </a:effectStyle>
+        <a:effectStyle>
+          <a:effectLst>
+            <a:innerShdw blurRad="50800" dist="25400" dir="13500000">
+              <a:srgbClr val="000000">
+                <a:alpha val="55000"/>
+              </a:srgbClr>
+            </a:innerShdw>
+          </a:effectLst>
+        </a:effectStyle>
+        <a:effectStyle>
+          <a:effectLst>
+            <a:outerShdw blurRad="50800" dist="38100" dir="5400000" rotWithShape="0">
+              <a:srgbClr val="000000">
+                <a:alpha val="60000"/>
+              </a:srgbClr>
+            </a:outerShdw>
+          </a:effectLst>
+          <a:scene3d>
+            <a:camera prst="orthographicFront">
+              <a:rot lat="0" lon="0" rev="0"/>
+            </a:camera>
+            <a:lightRig rig="threePt" dir="tl"/>
+          </a:scene3d>
+          <a:sp3d>
+            <a:bevelT w="25400" h="25400" prst="slope"/>
+          </a:sp3d>
+        </a:effectStyle>
+      </a:effectStyleLst>
+      <a:bgFillStyleLst>
+        <a:solidFill>
+          <a:schemeClr val="phClr"/>
+        </a:solidFill>
+        <a:gradFill rotWithShape="1">
+          <a:gsLst>
+            <a:gs pos="0">
+              <a:schemeClr val="phClr">
+                <a:tint val="90000"/>
+                <a:lumMod val="110000"/>
+              </a:schemeClr>
+            </a:gs>
+            <a:gs pos="100000">
+              <a:schemeClr val="phClr">
+                <a:shade val="64000"/>
+                <a:lumMod val="98000"/>
+              </a:schemeClr>
+            </a:gs>
+          </a:gsLst>
+          <a:lin ang="5400000" scaled="0"/>
+        </a:gradFill>
+        <a:blipFill rotWithShape="1">
+          <a:blip xmlns:r="http://schemas.openxmlformats.org/officeDocument/2006/relationships" r:embed="rId1">
+            <a:duotone>
+              <a:schemeClr val="phClr">
+                <a:shade val="28000"/>
+                <a:satMod val="94000"/>
+                <a:lumMod val="20000"/>
+              </a:schemeClr>
+              <a:schemeClr val="phClr">
+                <a:tint val="94000"/>
+                <a:shade val="84000"/>
+                <a:satMod val="148000"/>
+                <a:lumMod val="114000"/>
+              </a:schemeClr>
+            </a:duotone>
+          </a:blip>
+          <a:stretch/>
+        </a:blipFill>
+      </a:bgFillStyleLst>
+    </a:fmtScheme>
+  </a:themeElements>
+  <a:objectDefaults/>
+  <a:extraClrSchemeLst/>
+  <a:extLst>
+    <a:ext uri="{05A4C25C-085E-4340-85A3-A5531E510DB2}">
+      <thm15:themeFamily xmlns:thm15="http://schemas.microsoft.com/office/thememl/2012/main" name="Mesh" id="{789EC3FE-34FD-429C-9918-760025E6C145}" vid="{B8BE45C0-8141-4D58-8C71-A009BC26FBBB}"/>
+    </a:ext>
+  </a:extLst>
+</a:theme>
+</file>
+
+<file path=ppt/theme/theme3.xml><?xml version="1.0" encoding="utf-8"?>
 <a:theme xmlns:a="http://schemas.openxmlformats.org/drawingml/2006/main" name="Office Theme">
   <a:themeElements>
     <a:clrScheme name="Office">
